--- a/public/img/New_City_Hakathon.pptx
+++ b/public/img/New_City_Hakathon.pptx
@@ -4,6 +4,9 @@
   <p:sldMasterIdLst>
     <p:sldMasterId id="2147483648" r:id="rId1"/>
   </p:sldMasterIdLst>
+  <p:notesMasterIdLst>
+    <p:notesMasterId r:id="rId27"/>
+  </p:notesMasterIdLst>
   <p:sldIdLst>
     <p:sldId id="256" r:id="rId2"/>
     <p:sldId id="257" r:id="rId3"/>
@@ -31,9 +34,6 @@
     <p:sldId id="279" r:id="rId25"/>
     <p:sldId id="280" r:id="rId26"/>
   </p:sldIdLst>
-  <p:notesMasterIdLst>
-    <p:notesMasterId r:id="rId27"/>
-  </p:notesMasterIdLst>
   <p:sldSz cx="18288000" cy="10287000"/>
   <p:notesSz cx="10287000" cy="18288000"/>
   <p:defaultTextStyle>
@@ -128,6 +128,11 @@
       </a:defRPr>
     </a:lvl9pPr>
   </p:defaultTextStyle>
+  <p:extLst>
+    <p:ext uri="{EFAFB233-063F-42B5-8137-9DF3F51BA10A}">
+      <p15:sldGuideLst xmlns:p15="http://schemas.microsoft.com/office/powerpoint/2012/main"/>
+    </p:ext>
+  </p:extLst>
 </p:presentation>
 </file>
 
@@ -153,234 +158,10 @@
           <a:chExt cx="0" cy="0"/>
         </a:xfrm>
       </p:grpSpPr>
-      <p:sp>
-        <p:nvSpPr>
-          <p:cNvPr id="2" name="Header Placeholder 1"/>
-          <p:cNvSpPr>
-            <a:spLocks noGrp="1"/>
-          </p:cNvSpPr>
-          <p:nvPr>
-            <p:ph type="hdr" sz="quarter"/>
-          </p:nvPr>
-        </p:nvSpPr>
-        <p:spPr>
-          <a:xfrm>
-            <a:off x="0" y="0"/>
-            <a:ext cx="2971800" cy="458788"/>
-          </a:xfrm>
-          <a:prstGeom prst="rect">
-            <a:avLst/>
-          </a:prstGeom>
-        </p:spPr>
-        <p:txBody>
-          <a:bodyPr vert="horz" lIns="91440" tIns="45720" rIns="91440" bIns="45720" rtlCol="0"/>
-          <a:lstStyle>
-            <a:lvl1pPr algn="l">
-              <a:defRPr sz="1200"/>
-            </a:lvl1pPr>
-          </a:lstStyle>
-          <a:p>
-            <a:endParaRPr lang="en-US"/>
-          </a:p>
-        </p:txBody>
-      </p:sp>
-      <p:sp>
-        <p:nvSpPr>
-          <p:cNvPr id="3" name="Date Placeholder 2"/>
-          <p:cNvSpPr>
-            <a:spLocks noGrp="1"/>
-          </p:cNvSpPr>
-          <p:nvPr>
-            <p:ph type="dt" idx="1"/>
-          </p:nvPr>
-        </p:nvSpPr>
-        <p:spPr>
-          <a:xfrm>
-            <a:off x="3884613" y="0"/>
-            <a:ext cx="2971800" cy="458788"/>
-          </a:xfrm>
-          <a:prstGeom prst="rect">
-            <a:avLst/>
-          </a:prstGeom>
-        </p:spPr>
-        <p:txBody>
-          <a:bodyPr vert="horz" lIns="91440" tIns="45720" rIns="91440" bIns="45720" rtlCol="0"/>
-          <a:lstStyle>
-            <a:lvl1pPr algn="r">
-              <a:defRPr sz="1200"/>
-            </a:lvl1pPr>
-          </a:lstStyle>
-          <a:p>
-            <a:fld id="{5282F153-3F37-0F45-9E97-73ACFA13230C}" type="datetimeFigureOut">
-              <a:rPr lang="en-US"/>
-              <a:t>7/23/19</a:t>
-            </a:fld>
-            <a:endParaRPr lang="en-US"/>
-          </a:p>
-        </p:txBody>
-      </p:sp>
-      <p:sp>
-        <p:nvSpPr>
-          <p:cNvPr id="4" name="Slide Image Placeholder 3"/>
-          <p:cNvSpPr>
-            <a:spLocks noGrp="1" noRot="1" noChangeAspect="1"/>
-          </p:cNvSpPr>
-          <p:nvPr>
-            <p:ph type="sldImg" idx="2"/>
-          </p:nvPr>
-        </p:nvSpPr>
-        <p:spPr>
-          <a:xfrm>
-            <a:off x="685800" y="1143000"/>
-            <a:ext cx="5486400" cy="3086100"/>
-          </a:xfrm>
-          <a:prstGeom prst="rect">
-            <a:avLst/>
-          </a:prstGeom>
-          <a:noFill/>
-          <a:ln w="12700">
-            <a:solidFill>
-              <a:prstClr val="black"/>
-            </a:solidFill>
-          </a:ln>
-        </p:spPr>
-        <p:txBody>
-          <a:bodyPr vert="horz" lIns="91440" tIns="45720" rIns="91440" bIns="45720" rtlCol="0" anchor="ctr"/>
-          <a:lstStyle/>
-          <a:p>
-            <a:endParaRPr lang="en-US"/>
-          </a:p>
-        </p:txBody>
-      </p:sp>
-      <p:sp>
-        <p:nvSpPr>
-          <p:cNvPr id="5" name="Notes Placeholder 4"/>
-          <p:cNvSpPr>
-            <a:spLocks noGrp="1"/>
-          </p:cNvSpPr>
-          <p:nvPr>
-            <p:ph type="body" sz="quarter" idx="3"/>
-          </p:nvPr>
-        </p:nvSpPr>
-        <p:spPr>
-          <a:xfrm>
-            <a:off x="685800" y="4400550"/>
-            <a:ext cx="5486400" cy="3600450"/>
-          </a:xfrm>
-          <a:prstGeom prst="rect">
-            <a:avLst/>
-          </a:prstGeom>
-        </p:spPr>
-        <p:txBody>
-          <a:bodyPr vert="horz" lIns="91440" tIns="45720" rIns="91440" bIns="45720" rtlCol="0"/>
-          <a:lstStyle/>
-          <a:p>
-            <a:pPr lvl="0"/>
-            <a:r>
-              <a:rPr lang="en-US"/>
-              <a:t>Click to edit Master text styles</a:t>
-            </a:r>
-          </a:p>
-          <a:p>
-            <a:pPr lvl="1"/>
-            <a:r>
-              <a:rPr lang="en-US"/>
-              <a:t>Second level</a:t>
-            </a:r>
-          </a:p>
-          <a:p>
-            <a:pPr lvl="2"/>
-            <a:r>
-              <a:rPr lang="en-US"/>
-              <a:t>Third level</a:t>
-            </a:r>
-          </a:p>
-          <a:p>
-            <a:pPr lvl="3"/>
-            <a:r>
-              <a:rPr lang="en-US"/>
-              <a:t>Fourth level</a:t>
-            </a:r>
-          </a:p>
-          <a:p>
-            <a:pPr lvl="4"/>
-            <a:r>
-              <a:rPr lang="en-US"/>
-              <a:t>Fifth level</a:t>
-            </a:r>
-          </a:p>
-        </p:txBody>
-      </p:sp>
-      <p:sp>
-        <p:nvSpPr>
-          <p:cNvPr id="6" name="Footer Placeholder 5"/>
-          <p:cNvSpPr>
-            <a:spLocks noGrp="1"/>
-          </p:cNvSpPr>
-          <p:nvPr>
-            <p:ph type="ftr" sz="quarter" idx="4"/>
-          </p:nvPr>
-        </p:nvSpPr>
-        <p:spPr>
-          <a:xfrm>
-            <a:off x="0" y="8685213"/>
-            <a:ext cx="2971800" cy="458787"/>
-          </a:xfrm>
-          <a:prstGeom prst="rect">
-            <a:avLst/>
-          </a:prstGeom>
-        </p:spPr>
-        <p:txBody>
-          <a:bodyPr vert="horz" lIns="91440" tIns="45720" rIns="91440" bIns="45720" rtlCol="0" anchor="b"/>
-          <a:lstStyle>
-            <a:lvl1pPr algn="l">
-              <a:defRPr sz="1200"/>
-            </a:lvl1pPr>
-          </a:lstStyle>
-          <a:p>
-            <a:endParaRPr lang="en-US"/>
-          </a:p>
-        </p:txBody>
-      </p:sp>
-      <p:sp>
-        <p:nvSpPr>
-          <p:cNvPr id="7" name="Slide Number Placeholder 6"/>
-          <p:cNvSpPr>
-            <a:spLocks noGrp="1"/>
-          </p:cNvSpPr>
-          <p:nvPr>
-            <p:ph type="sldNum" sz="quarter" idx="5"/>
-          </p:nvPr>
-        </p:nvSpPr>
-        <p:spPr>
-          <a:xfrm>
-            <a:off x="3884613" y="8685213"/>
-            <a:ext cx="2971800" cy="458787"/>
-          </a:xfrm>
-          <a:prstGeom prst="rect">
-            <a:avLst/>
-          </a:prstGeom>
-        </p:spPr>
-        <p:txBody>
-          <a:bodyPr vert="horz" lIns="91440" tIns="45720" rIns="91440" bIns="45720" rtlCol="0" anchor="b"/>
-          <a:lstStyle>
-            <a:lvl1pPr algn="r">
-              <a:defRPr sz="1200"/>
-            </a:lvl1pPr>
-          </a:lstStyle>
-          <a:p>
-            <a:fld id="{CE5E9CC1-C706-0F49-92D6-E571CC5EEA8F}" type="slidenum">
-              <a:rPr lang="en-US"/>
-              <a:t>‹#›</a:t>
-            </a:fld>
-            <a:endParaRPr lang="en-US"/>
-          </a:p>
-        </p:txBody>
-      </p:sp>
     </p:spTree>
     <p:extLst>
       <p:ext uri="{BB962C8B-B14F-4D97-AF65-F5344CB8AC3E}">
-        <p14:creationId xmlns:p14="http://schemas.microsoft.com/office/powerpoint/2010/main" val="1024086991"/>
+        <p14:creationId xmlns:p14="http://schemas.microsoft.com/office/powerpoint/2010/main" val="833303211"/>
       </p:ext>
     </p:extLst>
   </p:cSld>
@@ -528,7 +309,6 @@
               <a:rPr lang="en-US" dirty="0"/>
               <a:t>Good morning. The objective of this session is not to enumerate AI tools. It is to examine how a single discipline — treating yourself as the operator rather than the output — separates students who compound capability from those who erode it. We will follow one composite case study across an academic year, identify the mechanism at each decision point, and leave you with seven prompt templates calibrated for graduate-level rigour.</a:t>
             </a:r>
-            <a:endParaRPr lang="en-US" dirty="0"/>
           </a:p>
         </p:txBody>
       </p:sp>
@@ -616,7 +396,6 @@
               <a:rPr lang="en-US" dirty="0"/>
               <a:t>Outcome. The case subject moved from a 68 percent semester average to 91 percent in a single term. The hours invested were not materially different. The structure of those hours was. A control case — a peer with identical access to identical tools — declined over the same period. The variable is not access. The variable is whether the prompt structure forces the student to do cognitive work or permits the model to substitute for it.</a:t>
             </a:r>
-            <a:endParaRPr lang="en-US" dirty="0"/>
           </a:p>
         </p:txBody>
       </p:sp>
@@ -704,7 +483,6 @@
               <a:rPr lang="en-US" dirty="0"/>
               <a:t>Chapter two. Research integrity. The capstone phase requires a literature review across roughly forty primary sources within a fourteen-day window. The failure mode is well-documented: large language models fabricate citations that are syntactically plausible but bibliographically nonexistent. This is not a hypothetical risk. Bohannon, 2023, in Science, documented this pattern in submitted student work; departments across multiple institutions have updated academic-integrity policies in response. A pasted abstract followed by a generated paragraph produces the appearance of scholarship without the substance.</a:t>
             </a:r>
-            <a:endParaRPr lang="en-US" dirty="0"/>
           </a:p>
         </p:txBody>
       </p:sp>
@@ -792,7 +570,6 @@
               <a:rPr lang="en-US" dirty="0"/>
               <a:t>The corrected approach is structural. For each paper, three questions, not one summary. The first establishes the central claim and method. The second isolates the assumptions on which the paper's validity depends. The third identifies the strongest counter-position in the literature. This converts a passive intake task into an analytical one and forces the student to engage with the paper rather than its abstract.</a:t>
             </a:r>
-            <a:endParaRPr lang="en-US" dirty="0"/>
           </a:p>
         </p:txBody>
       </p:sp>
@@ -880,7 +657,6 @@
               <a:rPr lang="en-US" dirty="0"/>
               <a:t>Source tooling. Perplexity provides search with linked citations that resolve to primary sources. Elicit and Consensus index peer-reviewed literature with free tiers sufficient for undergraduate work. SciSpace assists with mathematical exposition. Connected Papers visualises citation networks, which is particularly valuable for identifying foundational work that abstract-level search misses. All five operate without institutional credentials.</a:t>
             </a:r>
-            <a:endParaRPr lang="en-US" dirty="0"/>
           </a:p>
         </p:txBody>
       </p:sp>
@@ -968,7 +744,6 @@
               <a:rPr lang="en-US" dirty="0"/>
               <a:t>The non-negotiable rule: no citation appears in your submitted work that you have not personally opened, read, and verified. This is not a stylistic preference. It is the dividing line between research and misconduct. Verification is a thirty-second action; the consequence of skipping it is the invalidation of the entire submission and, in serious cases, formal disciplinary review.</a:t>
             </a:r>
-            <a:endParaRPr lang="en-US" dirty="0"/>
           </a:p>
         </p:txBody>
       </p:sp>
@@ -1056,7 +831,6 @@
               <a:rPr lang="en-US" dirty="0"/>
               <a:t>Chapter three. Communication and visual production. The capstone defence requires presentation materials. Historically this constraint advantaged students with prior design training or external resources. The current generation of generative tools removes that asymmetry. Three workflows replace what previously required commercial software licences and several days of work: programmatic diagramming via Mermaid, asset generation via Canva and Ideogram, and end-to-end deck composition via Gamma.</a:t>
             </a:r>
-            <a:endParaRPr lang="en-US" dirty="0"/>
           </a:p>
         </p:txBody>
       </p:sp>
@@ -1144,7 +918,6 @@
               <a:rPr lang="en-US" dirty="0"/>
               <a:t>Mermaid is a text-to-diagram syntax. The student describes the system in natural language, requests Mermaid output, and renders it at mermaid.live or directly within Notion, GitHub, and Obsidian. The output is editable, version-controllable, and free in perpetuity. The example on the next slide produces a publication-grade flowchart from a single prompt of approximately fifty words.</a:t>
             </a:r>
-            <a:endParaRPr lang="en-US" dirty="0"/>
           </a:p>
         </p:txBody>
       </p:sp>
@@ -1232,7 +1005,6 @@
               <a:rPr lang="en-US" dirty="0"/>
               <a:t>For static visuals: Canva with Magic Studio handles layout and brand consistency. Microsoft Designer integrates with the Microsoft account ecosystem and is appropriate for routine graphic work. Ideogram is the current state of the art for AI-generated images that contain readable typography — a non-trivial capability that other models still fail at reliably. The constraint that has shifted is no longer technical execution; it is editorial judgment. Selecting the one option from ten that does not appear generic is now the limiting skill.</a:t>
             </a:r>
-            <a:endParaRPr lang="en-US" dirty="0"/>
           </a:p>
         </p:txBody>
       </p:sp>
@@ -1320,7 +1092,6 @@
               <a:rPr lang="en-US" dirty="0"/>
               <a:t>Chapter four. Software development. The case subject had completed a single introductory programming course. Within one academic semester he produced and deployed a functional study-planning application. This is not unusual under current conditions; it is the median outcome for students who engage seriously. The risk surface, however, has shifted from the build itself to the comprehension of what was built.</a:t>
             </a:r>
-            <a:endParaRPr lang="en-US" dirty="0"/>
           </a:p>
         </p:txBody>
       </p:sp>
@@ -1408,7 +1179,6 @@
               <a:rPr lang="en-US" dirty="0"/>
               <a:t>The student development stack: Cursor and GitHub Copilot — both available without charge to students who verify their institutional email at education.github.com — provide AI-assisted code completion at professional grade. Bolt.new and v0 by Vercel produce running applications from natural-language specifications. Replit consolidates editing, runtime, and deployment in a single browser environment, including from mobile devices. The barrier to a first shipped product is now measured in days, not semesters.</a:t>
             </a:r>
-            <a:endParaRPr lang="en-US" dirty="0"/>
           </a:p>
         </p:txBody>
       </p:sp>
@@ -1496,7 +1266,6 @@
               <a:rPr lang="en-US" dirty="0"/>
               <a:t>Consider Omar — a fourth-year student carrying a standard senior load: four courses, a capstone project, and part-time professional commitments. Eight months ago he adopted generative AI as a primary work tool. The relevant observation is not that he used it; nearly everyone does. The relevant observation is that the failure mode of generative AI is silent. Output volume rises while comprehension declines, and the divergence is undetectable until it is assessed under examination conditions.</a:t>
             </a:r>
-            <a:endParaRPr lang="en-US" dirty="0"/>
           </a:p>
         </p:txBody>
       </p:sp>
@@ -1584,7 +1353,6 @@
               <a:rPr lang="en-US" dirty="0"/>
               <a:t>The corresponding risk is comprehension debt. The default debugging prompt — paste the error and request a fix — yields working code without producing learning. The technical interview, twelve to eighteen months later, requires the student to reason about code without an AI assistant present. The structured alternative requires the model to first explain the error class, enumerate likely causes, and walk through a diagnostic procedure before proposing a fix. The first prompt produces dependence. The second produces capability. The cumulative effect over a semester is substantial and observable in performance assessments.</a:t>
             </a:r>
-            <a:endParaRPr lang="en-US" dirty="0"/>
           </a:p>
         </p:txBody>
       </p:sp>
@@ -1672,7 +1440,6 @@
               <a:rPr lang="en-US" dirty="0"/>
               <a:t>Chapter five. Commercial application. When a student project demonstrates genuine market signal — actual users, repeat usage, willingness to pay — the question of converting it to a venture arises. The default behaviour is to request a business plan. This is the wrong tool. A generated business plan produces structurally plausible text without ground-truth contact with customers, which is the only signal that determines whether a venture is viable.</a:t>
             </a:r>
-            <a:endParaRPr lang="en-US" dirty="0"/>
           </a:p>
         </p:txBody>
       </p:sp>
@@ -1760,7 +1527,6 @@
               <a:rPr lang="en-US" dirty="0"/>
               <a:t>The structurally correct prompt is adversarial. The model is instructed to assume the role of a critical reviewer — an investor or domain expert — and pose the ten questions a paying customer would raise before transacting. The student answers in their own words, without model assistance. The answers, refined and verified against direct customer conversations, become the operating plan. The plan is in the founder's voice, grounded in the founder's evidence, and survives external scrutiny.</a:t>
             </a:r>
-            <a:endParaRPr lang="en-US" dirty="0"/>
           </a:p>
         </p:txBody>
       </p:sp>
@@ -1848,7 +1614,6 @@
               <a:rPr lang="en-US" dirty="0"/>
               <a:t>On production capability. Once a product exists, marketing and content production at the level previously requiring a five-person team is now accessible to a single operator. ChatGPT and Claude for copywriting; Canva for brand assets; CapCut with automatic Arabic and English captioning for video; ElevenLabs for voice synthesis with Arabic support; Suno for licensed-original music. Production is no longer the constraint. The constraints that remain are taste, consistency, and direct customer understanding — capabilities that do not transfer from the model to the operator.</a:t>
             </a:r>
-            <a:endParaRPr lang="en-US" dirty="0"/>
           </a:p>
         </p:txBody>
       </p:sp>
@@ -1936,7 +1701,6 @@
               <a:rPr lang="en-US" dirty="0"/>
               <a:t>This slide consolidates the seven prompt templates into a single reference. Study guide, active recall, the Feynman protocol, the three-question paper read, the Mermaid diagram brief, the diagnostic debugging contract, and the adversarial business interrogation. The templates are the deliverable of this session. They are intentionally specific. Modify the bracketed parameters; preserve the structure.</a:t>
             </a:r>
-            <a:endParaRPr lang="en-US" dirty="0"/>
           </a:p>
         </p:txBody>
       </p:sp>
@@ -2024,7 +1788,6 @@
               <a:rPr lang="en-US" dirty="0"/>
               <a:t>The boundary condition. Generative models do not adjudicate questions of value, identity, or commitment. They draft; you decide. Use the model to compose an essay; do not use it to determine your position. Use the model to debug code; do not use it to choose a career path. Use the model to construct a business plan; do not use it to determine whether the venture is worth pursuing. The function of judgment is not delegable. When it is delegated, the operator role has been forfeited.</a:t>
             </a:r>
-            <a:endParaRPr lang="en-US" dirty="0"/>
           </a:p>
         </p:txBody>
       </p:sp>
@@ -2112,7 +1875,6 @@
               <a:rPr lang="en-US" dirty="0"/>
               <a:t>This is the operating principle that organises the entire session. Use AI; do not let AI use you. The two trajectories are visually indistinguishable for approximately ninety days. After six months, the divergence is measurable across grades, project outcomes, and professional readiness. We will examine five domains — studying, research, design, software, and entrepreneurship — and isolate the mechanism that produces the divergence in each.</a:t>
             </a:r>
-            <a:endParaRPr lang="en-US" dirty="0"/>
           </a:p>
         </p:txBody>
       </p:sp>
@@ -2200,7 +1962,6 @@
               <a:rPr lang="en-US" dirty="0"/>
               <a:t>Chapter one. Examination preparation. Two hundred pages of lecture notes, nine days to a final assessment. The default behaviour is to request a summary. A summary read passively produces what cognitive science labels the illusion of fluency: the material feels familiar without being encoded. Roediger and Karpicke, 2006, demonstrated that re-reading produces near-zero gains in long-term retention compared to retrieval practice. A summary is re-reading at higher density.</a:t>
             </a:r>
-            <a:endParaRPr lang="en-US" dirty="0"/>
           </a:p>
         </p:txBody>
       </p:sp>
@@ -2288,7 +2049,6 @@
               <a:rPr lang="en-US" dirty="0"/>
               <a:t>The corrected approach treats AI as the architect of a study system, not as the student. Same nine days, same source material, same free-tier tools. The difference is the prompt structure: every interaction is designed to force retrieval, expose contradiction, and identify the boundary of comprehension. The next three slides specify the exact templates.</a:t>
             </a:r>
-            <a:endParaRPr lang="en-US" dirty="0"/>
           </a:p>
         </p:txBody>
       </p:sp>
@@ -2376,7 +2136,6 @@
               <a:rPr lang="en-US" dirty="0"/>
               <a:t>On tool selection: NotebookLM constrains its outputs to user-supplied sources and produces inline citations to the source pages, which substantially reduces hallucination risk for closed-domain study material. ChatGPT and Claude serve as general-purpose tutors for explanation and structured writing. The recommendation is two primary tools used fluently, not five tools used superficially. Tool churn is a measurable productivity loss.</a:t>
             </a:r>
-            <a:endParaRPr lang="en-US" dirty="0"/>
           </a:p>
         </p:txBody>
       </p:sp>
@@ -2464,7 +2223,6 @@
               <a:rPr lang="en-US" dirty="0"/>
               <a:t>Prompt one — the study tutor. Five components: role, context, task, format, constraint. The constraint line — explicit instructions not to invent facts and to flag contradictions in source material — materially reduces fabrication. The output is not a summary; it is a structured diagnostic that identifies what the student does not yet understand. Notice the specificity of the task — four named outputs, not a single open request.</a:t>
             </a:r>
-            <a:endParaRPr lang="en-US" dirty="0"/>
           </a:p>
         </p:txBody>
       </p:sp>
@@ -2552,7 +2310,6 @@
               <a:rPr lang="en-US" dirty="0"/>
               <a:t>Prompt two — active recall. Retrieval practice is the most replicated finding in the cognitive science of learning. The protocol: generate twenty multiple-choice items, mark them, and for every incorrect response require an explanation of the misconception, not merely the correct answer. The explanation is the learning event. Re-running the cycle nightly compounds gains; the meta-analysis literature reports effect sizes of d equals 0.7 and above for retrieval over re-reading.</a:t>
             </a:r>
-            <a:endParaRPr lang="en-US" dirty="0"/>
           </a:p>
         </p:txBody>
       </p:sp>
@@ -2640,7 +2397,6 @@
               <a:rPr lang="en-US" dirty="0"/>
               <a:t>Prompt three — the Feynman protocol. The technique formalises a Nobel laureate's diagnostic for genuine understanding: explain the concept to a non-expert until you encounter the point where you cannot continue. AI substitutes for the patient interlocutor. The instruction to remain in role and ask only clarifying questions is essential; without it, the model defaults to filling gaps and obscures the point of failure.</a:t>
             </a:r>
-            <a:endParaRPr lang="en-US" dirty="0"/>
           </a:p>
         </p:txBody>
       </p:sp>
@@ -2713,6 +2469,11 @@
 <file path=ppt/slideMasters/slideMaster1.xml><?xml version="1.0" encoding="utf-8"?>
 <p:sldMaster xmlns:a="http://schemas.openxmlformats.org/drawingml/2006/main" xmlns:r="http://schemas.openxmlformats.org/officeDocument/2006/relationships" xmlns:p="http://schemas.openxmlformats.org/presentationml/2006/main">
   <p:cSld>
+    <p:bg>
+      <p:bgRef idx="1001">
+        <a:schemeClr val="bg1"/>
+      </p:bgRef>
+    </p:bg>
     <p:spTree>
       <p:nvGrpSpPr>
         <p:cNvPr id="1" name=""/>
@@ -2995,6 +2756,7 @@
         <a:solidFill>
           <a:srgbClr val="0E0E0E"/>
         </a:solidFill>
+        <a:effectLst/>
       </p:bgPr>
     </p:bg>
     <p:spTree>
@@ -3076,11 +2838,11 @@
           </a:bodyPr>
           <a:lstStyle/>
           <a:p>
-            <a:pPr algn="l" indent="0" marL="0">
-              <a:buNone/>
-            </a:pPr>
-            <a:r>
-              <a:rPr lang="en-US" sz="1800" spc="72" kern="0" dirty="0">
+            <a:pPr marL="0" indent="0" algn="l">
+              <a:buNone/>
+            </a:pPr>
+            <a:r>
+              <a:rPr lang="en-US" sz="1800" kern="0" spc="72" dirty="0">
                 <a:solidFill>
                   <a:srgbClr val="FF5B1F"/>
                 </a:solidFill>
@@ -3117,11 +2879,11 @@
           </a:bodyPr>
           <a:lstStyle/>
           <a:p>
-            <a:pPr algn="l" indent="0" marL="0">
-              <a:buNone/>
-            </a:pPr>
-            <a:r>
-              <a:rPr lang="en-US" sz="1800" spc="72" kern="0" dirty="0">
+            <a:pPr marL="0" indent="0" algn="l">
+              <a:buNone/>
+            </a:pPr>
+            <a:r>
+              <a:rPr lang="en-US" sz="1800" kern="0" spc="72" dirty="0">
                 <a:solidFill>
                   <a:srgbClr val="F2EFE8">
                     <a:alpha val="55000"/>
@@ -3160,11 +2922,11 @@
           </a:bodyPr>
           <a:lstStyle/>
           <a:p>
-            <a:pPr algn="l" indent="0" marL="0">
-              <a:buNone/>
-            </a:pPr>
-            <a:r>
-              <a:rPr lang="en-US" sz="1800" spc="324" kern="0" dirty="0">
+            <a:pPr marL="0" indent="0" algn="l">
+              <a:buNone/>
+            </a:pPr>
+            <a:r>
+              <a:rPr lang="en-US" sz="1800" kern="0" spc="324" dirty="0">
                 <a:solidFill>
                   <a:srgbClr val="FF5B1F"/>
                 </a:solidFill>
@@ -3201,14 +2963,14 @@
           </a:bodyPr>
           <a:lstStyle/>
           <a:p>
-            <a:pPr algn="l" indent="0" marL="0">
+            <a:pPr marL="0" indent="0" algn="l">
               <a:lnSpc>
                 <a:spcPct val="90000"/>
               </a:lnSpc>
               <a:buNone/>
             </a:pPr>
             <a:r>
-              <a:rPr lang="en-US" sz="13500" spc="-472" kern="0" dirty="0">
+              <a:rPr lang="en-US" sz="13500" kern="0" spc="-472" dirty="0">
                 <a:solidFill>
                   <a:srgbClr val="F2EFE8"/>
                 </a:solidFill>
@@ -3218,14 +2980,8 @@
               </a:rPr>
               <a:t>AI for </a:t>
             </a:r>
-            <a:pPr algn="l" indent="0" marL="0">
-              <a:lnSpc>
-                <a:spcPct val="90000"/>
-              </a:lnSpc>
-              <a:buNone/>
-            </a:pPr>
-            <a:r>
-              <a:rPr lang="en-US" sz="13500" i="1" spc="-472" kern="0" dirty="0">
+            <a:r>
+              <a:rPr lang="en-US" sz="13500" i="1" kern="0" spc="-472" dirty="0">
                 <a:solidFill>
                   <a:srgbClr val="FF5B1F"/>
                 </a:solidFill>
@@ -3235,14 +2991,8 @@
               </a:rPr>
               <a:t>real </a:t>
             </a:r>
-            <a:pPr algn="l" indent="0" marL="0">
-              <a:lnSpc>
-                <a:spcPct val="90000"/>
-              </a:lnSpc>
-              <a:buNone/>
-            </a:pPr>
-            <a:r>
-              <a:rPr lang="en-US" sz="13500" spc="-472" kern="0" dirty="0">
+            <a:r>
+              <a:rPr lang="en-US" sz="13500" kern="0" spc="-472" dirty="0">
                 <a:solidFill>
                   <a:srgbClr val="F2EFE8"/>
                 </a:solidFill>
@@ -3279,11 +3029,11 @@
           </a:bodyPr>
           <a:lstStyle/>
           <a:p>
-            <a:pPr algn="l" indent="0" marL="0">
-              <a:buNone/>
-            </a:pPr>
-            <a:r>
-              <a:rPr lang="en-US" sz="1800" spc="72" kern="0" dirty="0">
+            <a:pPr marL="0" indent="0" algn="l">
+              <a:buNone/>
+            </a:pPr>
+            <a:r>
+              <a:rPr lang="en-US" sz="1800" kern="0" spc="72" dirty="0">
                 <a:solidFill>
                   <a:srgbClr val="F2EFE8">
                     <a:alpha val="55000"/>
@@ -3322,7 +3072,7 @@
           </a:bodyPr>
           <a:lstStyle/>
           <a:p>
-            <a:pPr algn="l" indent="0" marL="0">
+            <a:pPr marL="0" indent="0" algn="l">
               <a:lnSpc>
                 <a:spcPct val="100000"/>
               </a:lnSpc>
@@ -3366,7 +3116,7 @@
           </a:bodyPr>
           <a:lstStyle/>
           <a:p>
-            <a:pPr algn="l" indent="0" marL="0">
+            <a:pPr marL="0" indent="0" algn="l">
               <a:lnSpc>
                 <a:spcPct val="140000"/>
               </a:lnSpc>
@@ -3412,7 +3162,7 @@
           </a:bodyPr>
           <a:lstStyle/>
           <a:p>
-            <a:pPr algn="l" indent="0" marL="0">
+            <a:pPr marL="0" indent="0" algn="l">
               <a:buNone/>
             </a:pPr>
             <a:r>
@@ -3446,6 +3196,7 @@
         <a:solidFill>
           <a:srgbClr val="F2EFE8"/>
         </a:solidFill>
+        <a:effectLst/>
       </p:bgPr>
     </p:bg>
     <p:spTree>
@@ -3505,11 +3256,11 @@
           </a:bodyPr>
           <a:lstStyle/>
           <a:p>
-            <a:pPr algn="l" indent="0" marL="0">
-              <a:buNone/>
-            </a:pPr>
-            <a:r>
-              <a:rPr lang="en-US" sz="1800" spc="108" kern="0" dirty="0">
+            <a:pPr marL="0" indent="0" algn="l">
+              <a:buNone/>
+            </a:pPr>
+            <a:r>
+              <a:rPr lang="en-US" sz="1800" kern="0" spc="108" dirty="0">
                 <a:solidFill>
                   <a:srgbClr val="888076"/>
                 </a:solidFill>
@@ -3546,11 +3297,11 @@
           </a:bodyPr>
           <a:lstStyle/>
           <a:p>
-            <a:pPr algn="l" indent="0" marL="0">
-              <a:buNone/>
-            </a:pPr>
-            <a:r>
-              <a:rPr lang="en-US" sz="1800" spc="108" kern="0" dirty="0">
+            <a:pPr marL="0" indent="0" algn="l">
+              <a:buNone/>
+            </a:pPr>
+            <a:r>
+              <a:rPr lang="en-US" sz="1800" kern="0" spc="108" dirty="0">
                 <a:solidFill>
                   <a:srgbClr val="888076"/>
                 </a:solidFill>
@@ -3607,11 +3358,11 @@
           </a:bodyPr>
           <a:lstStyle/>
           <a:p>
-            <a:pPr algn="l" indent="0" marL="0">
-              <a:buNone/>
-            </a:pPr>
-            <a:r>
-              <a:rPr lang="en-US" sz="1800" spc="144" kern="0" dirty="0">
+            <a:pPr marL="0" indent="0" algn="l">
+              <a:buNone/>
+            </a:pPr>
+            <a:r>
+              <a:rPr lang="en-US" sz="1800" kern="0" spc="144" dirty="0">
                 <a:solidFill>
                   <a:srgbClr val="FF5B1F"/>
                 </a:solidFill>
@@ -3648,11 +3399,11 @@
           </a:bodyPr>
           <a:lstStyle/>
           <a:p>
-            <a:pPr algn="l" indent="0" marL="0">
-              <a:buNone/>
-            </a:pPr>
-            <a:r>
-              <a:rPr lang="en-US" sz="1800" spc="144" kern="0" dirty="0">
+            <a:pPr marL="0" indent="0" algn="l">
+              <a:buNone/>
+            </a:pPr>
+            <a:r>
+              <a:rPr lang="en-US" sz="1800" kern="0" spc="144" dirty="0">
                 <a:solidFill>
                   <a:srgbClr val="2A2A2A"/>
                 </a:solidFill>
@@ -3689,14 +3440,14 @@
           </a:bodyPr>
           <a:lstStyle/>
           <a:p>
-            <a:pPr algn="l" indent="0" marL="0">
+            <a:pPr marL="0" indent="0" algn="l">
               <a:lnSpc>
                 <a:spcPct val="96000"/>
               </a:lnSpc>
               <a:buNone/>
             </a:pPr>
             <a:r>
-              <a:rPr lang="en-US" sz="7200" spc="-180" kern="0" dirty="0">
+              <a:rPr lang="en-US" sz="7200" kern="0" spc="-180" dirty="0">
                 <a:solidFill>
                   <a:srgbClr val="0E0E0E"/>
                 </a:solidFill>
@@ -3706,14 +3457,8 @@
               </a:rPr>
               <a:t>Three questions, </a:t>
             </a:r>
-            <a:pPr algn="l" indent="0" marL="0">
-              <a:lnSpc>
-                <a:spcPct val="96000"/>
-              </a:lnSpc>
-              <a:buNone/>
-            </a:pPr>
-            <a:r>
-              <a:rPr lang="en-US" sz="7200" i="1" spc="-180" kern="0" dirty="0">
+            <a:r>
+              <a:rPr lang="en-US" sz="7200" i="1" kern="0" spc="-180" dirty="0">
                 <a:solidFill>
                   <a:srgbClr val="0E0E0E"/>
                 </a:solidFill>
@@ -3772,7 +3517,7 @@
           </a:bodyPr>
           <a:lstStyle/>
           <a:p>
-            <a:pPr algn="l" indent="0" marL="0">
+            <a:pPr marL="0" indent="0" algn="l">
               <a:lnSpc>
                 <a:spcPct val="100000"/>
               </a:lnSpc>
@@ -3816,14 +3561,14 @@
           </a:bodyPr>
           <a:lstStyle/>
           <a:p>
-            <a:pPr algn="l" indent="0" marL="0">
+            <a:pPr marL="0" indent="0" algn="l">
               <a:lnSpc>
                 <a:spcPct val="100000"/>
               </a:lnSpc>
               <a:buNone/>
             </a:pPr>
             <a:r>
-              <a:rPr lang="en-US" sz="2700" spc="-54" kern="0" dirty="0">
+              <a:rPr lang="en-US" sz="2700" kern="0" spc="-54" dirty="0">
                 <a:solidFill>
                   <a:srgbClr val="0E0E0E"/>
                 </a:solidFill>
@@ -3900,7 +3645,7 @@
           </a:bodyPr>
           <a:lstStyle/>
           <a:p>
-            <a:pPr algn="l" indent="0" marL="0">
+            <a:pPr marL="0" indent="0" algn="l">
               <a:lnSpc>
                 <a:spcPct val="145000"/>
               </a:lnSpc>
@@ -3920,7 +3665,7 @@
             <a:endParaRPr lang="en-US" sz="1800" dirty="0"/>
           </a:p>
           <a:p>
-            <a:pPr algn="l" indent="0" marL="0">
+            <a:pPr marL="0" indent="0" algn="l">
               <a:lnSpc>
                 <a:spcPct val="145000"/>
               </a:lnSpc>
@@ -3940,7 +3685,7 @@
             <a:endParaRPr lang="en-US" sz="1800" dirty="0"/>
           </a:p>
           <a:p>
-            <a:pPr algn="l" indent="0" marL="0">
+            <a:pPr marL="0" indent="0" algn="l">
               <a:lnSpc>
                 <a:spcPct val="145000"/>
               </a:lnSpc>
@@ -3960,7 +3705,7 @@
             <a:endParaRPr lang="en-US" sz="1800" dirty="0"/>
           </a:p>
           <a:p>
-            <a:pPr algn="l" indent="0" marL="0">
+            <a:pPr marL="0" indent="0" algn="l">
               <a:lnSpc>
                 <a:spcPct val="145000"/>
               </a:lnSpc>
@@ -4029,7 +3774,7 @@
           </a:bodyPr>
           <a:lstStyle/>
           <a:p>
-            <a:pPr algn="l" indent="0" marL="0">
+            <a:pPr marL="0" indent="0" algn="l">
               <a:lnSpc>
                 <a:spcPct val="100000"/>
               </a:lnSpc>
@@ -4073,14 +3818,14 @@
           </a:bodyPr>
           <a:lstStyle/>
           <a:p>
-            <a:pPr algn="l" indent="0" marL="0">
+            <a:pPr marL="0" indent="0" algn="l">
               <a:lnSpc>
                 <a:spcPct val="100000"/>
               </a:lnSpc>
               <a:buNone/>
             </a:pPr>
             <a:r>
-              <a:rPr lang="en-US" sz="2700" spc="-54" kern="0" dirty="0">
+              <a:rPr lang="en-US" sz="2700" kern="0" spc="-54" dirty="0">
                 <a:solidFill>
                   <a:srgbClr val="F2EFE8"/>
                 </a:solidFill>
@@ -4157,7 +3902,7 @@
           </a:bodyPr>
           <a:lstStyle/>
           <a:p>
-            <a:pPr algn="l" indent="0" marL="0">
+            <a:pPr marL="0" indent="0" algn="l">
               <a:lnSpc>
                 <a:spcPct val="145000"/>
               </a:lnSpc>
@@ -4177,7 +3922,7 @@
             <a:endParaRPr lang="en-US" sz="1800" dirty="0"/>
           </a:p>
           <a:p>
-            <a:pPr algn="l" indent="0" marL="0">
+            <a:pPr marL="0" indent="0" algn="l">
               <a:lnSpc>
                 <a:spcPct val="145000"/>
               </a:lnSpc>
@@ -4197,7 +3942,7 @@
             <a:endParaRPr lang="en-US" sz="1800" dirty="0"/>
           </a:p>
           <a:p>
-            <a:pPr algn="l" indent="0" marL="0">
+            <a:pPr marL="0" indent="0" algn="l">
               <a:lnSpc>
                 <a:spcPct val="145000"/>
               </a:lnSpc>
@@ -4217,7 +3962,7 @@
             <a:endParaRPr lang="en-US" sz="1800" dirty="0"/>
           </a:p>
           <a:p>
-            <a:pPr algn="l" indent="0" marL="0">
+            <a:pPr marL="0" indent="0" algn="l">
               <a:lnSpc>
                 <a:spcPct val="145000"/>
               </a:lnSpc>
@@ -4283,7 +4028,7 @@
           </a:bodyPr>
           <a:lstStyle/>
           <a:p>
-            <a:pPr algn="l" indent="0" marL="0">
+            <a:pPr marL="0" indent="0" algn="l">
               <a:lnSpc>
                 <a:spcPct val="100000"/>
               </a:lnSpc>
@@ -4327,14 +4072,14 @@
           </a:bodyPr>
           <a:lstStyle/>
           <a:p>
-            <a:pPr algn="l" indent="0" marL="0">
+            <a:pPr marL="0" indent="0" algn="l">
               <a:lnSpc>
                 <a:spcPct val="100000"/>
               </a:lnSpc>
               <a:buNone/>
             </a:pPr>
             <a:r>
-              <a:rPr lang="en-US" sz="2700" spc="-54" kern="0" dirty="0">
+              <a:rPr lang="en-US" sz="2700" kern="0" spc="-54" dirty="0">
                 <a:solidFill>
                   <a:srgbClr val="0E0E0E"/>
                 </a:solidFill>
@@ -4411,7 +4156,7 @@
           </a:bodyPr>
           <a:lstStyle/>
           <a:p>
-            <a:pPr algn="l" indent="0" marL="0">
+            <a:pPr marL="0" indent="0" algn="l">
               <a:lnSpc>
                 <a:spcPct val="145000"/>
               </a:lnSpc>
@@ -4431,7 +4176,7 @@
             <a:endParaRPr lang="en-US" sz="1800" dirty="0"/>
           </a:p>
           <a:p>
-            <a:pPr algn="l" indent="0" marL="0">
+            <a:pPr marL="0" indent="0" algn="l">
               <a:lnSpc>
                 <a:spcPct val="145000"/>
               </a:lnSpc>
@@ -4451,7 +4196,7 @@
             <a:endParaRPr lang="en-US" sz="1800" dirty="0"/>
           </a:p>
           <a:p>
-            <a:pPr algn="l" indent="0" marL="0">
+            <a:pPr marL="0" indent="0" algn="l">
               <a:lnSpc>
                 <a:spcPct val="145000"/>
               </a:lnSpc>
@@ -4471,7 +4216,7 @@
             <a:endParaRPr lang="en-US" sz="1800" dirty="0"/>
           </a:p>
           <a:p>
-            <a:pPr algn="l" indent="0" marL="0">
+            <a:pPr marL="0" indent="0" algn="l">
               <a:lnSpc>
                 <a:spcPct val="145000"/>
               </a:lnSpc>
@@ -4515,14 +4260,14 @@
           </a:bodyPr>
           <a:lstStyle/>
           <a:p>
-            <a:pPr algn="l" indent="0" marL="0">
+            <a:pPr marL="0" indent="0" algn="l">
               <a:lnSpc>
                 <a:spcPct val="110000"/>
               </a:lnSpc>
               <a:buNone/>
             </a:pPr>
             <a:r>
-              <a:rPr lang="en-US" sz="2550" i="1" spc="-25" kern="0" dirty="0">
+              <a:rPr lang="en-US" sz="2550" i="1" kern="0" spc="-25" dirty="0">
                 <a:solidFill>
                   <a:srgbClr val="0E0E0E"/>
                 </a:solidFill>
@@ -4584,11 +4329,11 @@
           </a:bodyPr>
           <a:lstStyle/>
           <a:p>
-            <a:pPr algn="l" indent="0" marL="0">
-              <a:buNone/>
-            </a:pPr>
-            <a:r>
-              <a:rPr lang="en-US" sz="1500" spc="120" kern="0" dirty="0">
+            <a:pPr marL="0" indent="0" algn="l">
+              <a:buNone/>
+            </a:pPr>
+            <a:r>
+              <a:rPr lang="en-US" sz="1500" kern="0" spc="120" dirty="0">
                 <a:solidFill>
                   <a:srgbClr val="F2EFE8"/>
                 </a:solidFill>
@@ -4625,11 +4370,11 @@
           </a:bodyPr>
           <a:lstStyle/>
           <a:p>
-            <a:pPr algn="l" indent="0" marL="0">
-              <a:buNone/>
-            </a:pPr>
-            <a:r>
-              <a:rPr lang="en-US" sz="1800" spc="108" kern="0" dirty="0">
+            <a:pPr marL="0" indent="0" algn="l">
+              <a:buNone/>
+            </a:pPr>
+            <a:r>
+              <a:rPr lang="en-US" sz="1800" kern="0" spc="108" dirty="0">
                 <a:solidFill>
                   <a:srgbClr val="888076"/>
                 </a:solidFill>
@@ -4666,11 +4411,11 @@
           </a:bodyPr>
           <a:lstStyle/>
           <a:p>
-            <a:pPr algn="l" indent="0" marL="0">
-              <a:buNone/>
-            </a:pPr>
-            <a:r>
-              <a:rPr lang="en-US" sz="2700" i="1" spc="-54" kern="0" dirty="0">
+            <a:pPr marL="0" indent="0" algn="l">
+              <a:buNone/>
+            </a:pPr>
+            <a:r>
+              <a:rPr lang="en-US" sz="2700" i="1" kern="0" spc="-54" dirty="0">
                 <a:solidFill>
                   <a:srgbClr val="888076"/>
                 </a:solidFill>
@@ -4700,6 +4445,7 @@
         <a:solidFill>
           <a:srgbClr val="E8E3D6"/>
         </a:solidFill>
+        <a:effectLst/>
       </p:bgPr>
     </p:bg>
     <p:spTree>
@@ -4759,11 +4505,11 @@
           </a:bodyPr>
           <a:lstStyle/>
           <a:p>
-            <a:pPr algn="l" indent="0" marL="0">
-              <a:buNone/>
-            </a:pPr>
-            <a:r>
-              <a:rPr lang="en-US" sz="1800" spc="108" kern="0" dirty="0">
+            <a:pPr marL="0" indent="0" algn="l">
+              <a:buNone/>
+            </a:pPr>
+            <a:r>
+              <a:rPr lang="en-US" sz="1800" kern="0" spc="108" dirty="0">
                 <a:solidFill>
                   <a:srgbClr val="888076"/>
                 </a:solidFill>
@@ -4800,11 +4546,11 @@
           </a:bodyPr>
           <a:lstStyle/>
           <a:p>
-            <a:pPr algn="l" indent="0" marL="0">
-              <a:buNone/>
-            </a:pPr>
-            <a:r>
-              <a:rPr lang="en-US" sz="1800" spc="108" kern="0" dirty="0">
+            <a:pPr marL="0" indent="0" algn="l">
+              <a:buNone/>
+            </a:pPr>
+            <a:r>
+              <a:rPr lang="en-US" sz="1800" kern="0" spc="108" dirty="0">
                 <a:solidFill>
                   <a:srgbClr val="888076"/>
                 </a:solidFill>
@@ -4861,11 +4607,11 @@
           </a:bodyPr>
           <a:lstStyle/>
           <a:p>
-            <a:pPr algn="l" indent="0" marL="0">
-              <a:buNone/>
-            </a:pPr>
-            <a:r>
-              <a:rPr lang="en-US" sz="1800" spc="144" kern="0" dirty="0">
+            <a:pPr marL="0" indent="0" algn="l">
+              <a:buNone/>
+            </a:pPr>
+            <a:r>
+              <a:rPr lang="en-US" sz="1800" kern="0" spc="144" dirty="0">
                 <a:solidFill>
                   <a:srgbClr val="FF5B1F"/>
                 </a:solidFill>
@@ -4902,11 +4648,11 @@
           </a:bodyPr>
           <a:lstStyle/>
           <a:p>
-            <a:pPr algn="l" indent="0" marL="0">
-              <a:buNone/>
-            </a:pPr>
-            <a:r>
-              <a:rPr lang="en-US" sz="1800" spc="144" kern="0" dirty="0">
+            <a:pPr marL="0" indent="0" algn="l">
+              <a:buNone/>
+            </a:pPr>
+            <a:r>
+              <a:rPr lang="en-US" sz="1800" kern="0" spc="144" dirty="0">
                 <a:solidFill>
                   <a:srgbClr val="2A2A2A"/>
                 </a:solidFill>
@@ -4943,14 +4689,14 @@
           </a:bodyPr>
           <a:lstStyle/>
           <a:p>
-            <a:pPr algn="l" indent="0" marL="0">
+            <a:pPr marL="0" indent="0" algn="l">
               <a:lnSpc>
                 <a:spcPct val="96000"/>
               </a:lnSpc>
               <a:buNone/>
             </a:pPr>
             <a:r>
-              <a:rPr lang="en-US" sz="7200" spc="-180" kern="0" dirty="0">
+              <a:rPr lang="en-US" sz="7200" kern="0" spc="-180" dirty="0">
                 <a:solidFill>
                   <a:srgbClr val="0E0E0E"/>
                 </a:solidFill>
@@ -4960,14 +4706,8 @@
               </a:rPr>
               <a:t>Free academic </a:t>
             </a:r>
-            <a:pPr algn="l" indent="0" marL="0">
-              <a:lnSpc>
-                <a:spcPct val="96000"/>
-              </a:lnSpc>
-              <a:buNone/>
-            </a:pPr>
-            <a:r>
-              <a:rPr lang="en-US" sz="7200" i="1" spc="-180" kern="0" dirty="0">
+            <a:r>
+              <a:rPr lang="en-US" sz="7200" i="1" kern="0" spc="-180" dirty="0">
                 <a:solidFill>
                   <a:srgbClr val="0E0E0E"/>
                 </a:solidFill>
@@ -5029,11 +4769,11 @@
           </a:bodyPr>
           <a:lstStyle/>
           <a:p>
-            <a:pPr algn="l" indent="0" marL="0">
-              <a:buNone/>
-            </a:pPr>
-            <a:r>
-              <a:rPr lang="en-US" sz="1800" spc="144" kern="0" dirty="0">
+            <a:pPr marL="0" indent="0" algn="l">
+              <a:buNone/>
+            </a:pPr>
+            <a:r>
+              <a:rPr lang="en-US" sz="1800" kern="0" spc="144" dirty="0">
                 <a:solidFill>
                   <a:srgbClr val="888076"/>
                 </a:solidFill>
@@ -5070,14 +4810,14 @@
           </a:bodyPr>
           <a:lstStyle/>
           <a:p>
-            <a:pPr algn="l" indent="0" marL="0">
+            <a:pPr marL="0" indent="0" algn="l">
               <a:lnSpc>
                 <a:spcPct val="95000"/>
               </a:lnSpc>
               <a:buNone/>
             </a:pPr>
             <a:r>
-              <a:rPr lang="en-US" sz="3300" spc="-66" kern="0" dirty="0">
+              <a:rPr lang="en-US" sz="3300" kern="0" spc="-66" dirty="0">
                 <a:solidFill>
                   <a:srgbClr val="0E0E0E"/>
                 </a:solidFill>
@@ -5114,7 +4854,7 @@
           </a:bodyPr>
           <a:lstStyle/>
           <a:p>
-            <a:pPr algn="l" indent="0" marL="0">
+            <a:pPr marL="0" indent="0" algn="l">
               <a:lnSpc>
                 <a:spcPct val="140000"/>
               </a:lnSpc>
@@ -5183,11 +4923,11 @@
           </a:bodyPr>
           <a:lstStyle/>
           <a:p>
-            <a:pPr algn="l" indent="0" marL="0">
-              <a:buNone/>
-            </a:pPr>
-            <a:r>
-              <a:rPr lang="en-US" sz="1800" spc="144" kern="0" dirty="0">
+            <a:pPr marL="0" indent="0" algn="l">
+              <a:buNone/>
+            </a:pPr>
+            <a:r>
+              <a:rPr lang="en-US" sz="1800" kern="0" spc="144" dirty="0">
                 <a:solidFill>
                   <a:srgbClr val="888076"/>
                 </a:solidFill>
@@ -5224,14 +4964,14 @@
           </a:bodyPr>
           <a:lstStyle/>
           <a:p>
-            <a:pPr algn="l" indent="0" marL="0">
+            <a:pPr marL="0" indent="0" algn="l">
               <a:lnSpc>
                 <a:spcPct val="95000"/>
               </a:lnSpc>
               <a:buNone/>
             </a:pPr>
             <a:r>
-              <a:rPr lang="en-US" sz="3300" spc="-66" kern="0" dirty="0">
+              <a:rPr lang="en-US" sz="3300" kern="0" spc="-66" dirty="0">
                 <a:solidFill>
                   <a:srgbClr val="0E0E0E"/>
                 </a:solidFill>
@@ -5268,7 +5008,7 @@
           </a:bodyPr>
           <a:lstStyle/>
           <a:p>
-            <a:pPr algn="l" indent="0" marL="0">
+            <a:pPr marL="0" indent="0" algn="l">
               <a:lnSpc>
                 <a:spcPct val="140000"/>
               </a:lnSpc>
@@ -5337,11 +5077,11 @@
           </a:bodyPr>
           <a:lstStyle/>
           <a:p>
-            <a:pPr algn="l" indent="0" marL="0">
-              <a:buNone/>
-            </a:pPr>
-            <a:r>
-              <a:rPr lang="en-US" sz="1800" spc="144" kern="0" dirty="0">
+            <a:pPr marL="0" indent="0" algn="l">
+              <a:buNone/>
+            </a:pPr>
+            <a:r>
+              <a:rPr lang="en-US" sz="1800" kern="0" spc="144" dirty="0">
                 <a:solidFill>
                   <a:srgbClr val="888076"/>
                 </a:solidFill>
@@ -5378,14 +5118,14 @@
           </a:bodyPr>
           <a:lstStyle/>
           <a:p>
-            <a:pPr algn="l" indent="0" marL="0">
+            <a:pPr marL="0" indent="0" algn="l">
               <a:lnSpc>
                 <a:spcPct val="95000"/>
               </a:lnSpc>
               <a:buNone/>
             </a:pPr>
             <a:r>
-              <a:rPr lang="en-US" sz="3300" spc="-66" kern="0" dirty="0">
+              <a:rPr lang="en-US" sz="3300" kern="0" spc="-66" dirty="0">
                 <a:solidFill>
                   <a:srgbClr val="0E0E0E"/>
                 </a:solidFill>
@@ -5422,7 +5162,7 @@
           </a:bodyPr>
           <a:lstStyle/>
           <a:p>
-            <a:pPr algn="l" indent="0" marL="0">
+            <a:pPr marL="0" indent="0" algn="l">
               <a:lnSpc>
                 <a:spcPct val="140000"/>
               </a:lnSpc>
@@ -5491,11 +5231,11 @@
           </a:bodyPr>
           <a:lstStyle/>
           <a:p>
-            <a:pPr algn="l" indent="0" marL="0">
-              <a:buNone/>
-            </a:pPr>
-            <a:r>
-              <a:rPr lang="en-US" sz="1800" spc="144" kern="0" dirty="0">
+            <a:pPr marL="0" indent="0" algn="l">
+              <a:buNone/>
+            </a:pPr>
+            <a:r>
+              <a:rPr lang="en-US" sz="1800" kern="0" spc="144" dirty="0">
                 <a:solidFill>
                   <a:srgbClr val="888076"/>
                 </a:solidFill>
@@ -5532,14 +5272,14 @@
           </a:bodyPr>
           <a:lstStyle/>
           <a:p>
-            <a:pPr algn="l" indent="0" marL="0">
+            <a:pPr marL="0" indent="0" algn="l">
               <a:lnSpc>
                 <a:spcPct val="95000"/>
               </a:lnSpc>
               <a:buNone/>
             </a:pPr>
             <a:r>
-              <a:rPr lang="en-US" sz="3300" spc="-66" kern="0" dirty="0">
+              <a:rPr lang="en-US" sz="3300" kern="0" spc="-66" dirty="0">
                 <a:solidFill>
                   <a:srgbClr val="0E0E0E"/>
                 </a:solidFill>
@@ -5576,7 +5316,7 @@
           </a:bodyPr>
           <a:lstStyle/>
           <a:p>
-            <a:pPr algn="l" indent="0" marL="0">
+            <a:pPr marL="0" indent="0" algn="l">
               <a:lnSpc>
                 <a:spcPct val="140000"/>
               </a:lnSpc>
@@ -5645,11 +5385,11 @@
           </a:bodyPr>
           <a:lstStyle/>
           <a:p>
-            <a:pPr algn="l" indent="0" marL="0">
-              <a:buNone/>
-            </a:pPr>
-            <a:r>
-              <a:rPr lang="en-US" sz="1800" spc="144" kern="0" dirty="0">
+            <a:pPr marL="0" indent="0" algn="l">
+              <a:buNone/>
+            </a:pPr>
+            <a:r>
+              <a:rPr lang="en-US" sz="1800" kern="0" spc="144" dirty="0">
                 <a:solidFill>
                   <a:srgbClr val="888076"/>
                 </a:solidFill>
@@ -5686,14 +5426,14 @@
           </a:bodyPr>
           <a:lstStyle/>
           <a:p>
-            <a:pPr algn="l" indent="0" marL="0">
+            <a:pPr marL="0" indent="0" algn="l">
               <a:lnSpc>
                 <a:spcPct val="95000"/>
               </a:lnSpc>
               <a:buNone/>
             </a:pPr>
             <a:r>
-              <a:rPr lang="en-US" sz="3300" spc="-66" kern="0" dirty="0">
+              <a:rPr lang="en-US" sz="3300" kern="0" spc="-66" dirty="0">
                 <a:solidFill>
                   <a:srgbClr val="0E0E0E"/>
                 </a:solidFill>
@@ -5730,7 +5470,7 @@
           </a:bodyPr>
           <a:lstStyle/>
           <a:p>
-            <a:pPr algn="l" indent="0" marL="0">
+            <a:pPr marL="0" indent="0" algn="l">
               <a:lnSpc>
                 <a:spcPct val="140000"/>
               </a:lnSpc>
@@ -5799,11 +5539,11 @@
           </a:bodyPr>
           <a:lstStyle/>
           <a:p>
-            <a:pPr algn="l" indent="0" marL="0">
-              <a:buNone/>
-            </a:pPr>
-            <a:r>
-              <a:rPr lang="en-US" sz="1800" b="1" spc="144" kern="0" dirty="0">
+            <a:pPr marL="0" indent="0" algn="l">
+              <a:buNone/>
+            </a:pPr>
+            <a:r>
+              <a:rPr lang="en-US" sz="1800" b="1" kern="0" spc="144" dirty="0">
                 <a:solidFill>
                   <a:srgbClr val="0E0E0E"/>
                 </a:solidFill>
@@ -5840,14 +5580,14 @@
           </a:bodyPr>
           <a:lstStyle/>
           <a:p>
-            <a:pPr algn="l" indent="0" marL="0">
+            <a:pPr marL="0" indent="0" algn="l">
               <a:lnSpc>
                 <a:spcPct val="105000"/>
               </a:lnSpc>
               <a:buNone/>
             </a:pPr>
             <a:r>
-              <a:rPr lang="en-US" sz="2250" spc="-45" kern="0" dirty="0">
+              <a:rPr lang="en-US" sz="2250" kern="0" spc="-45" dirty="0">
                 <a:solidFill>
                   <a:srgbClr val="0E0E0E"/>
                 </a:solidFill>
@@ -5857,14 +5597,8 @@
               </a:rPr>
               <a:t>No citation appears in your work that you have </a:t>
             </a:r>
-            <a:pPr algn="l" indent="0" marL="0">
-              <a:lnSpc>
-                <a:spcPct val="105000"/>
-              </a:lnSpc>
-              <a:buNone/>
-            </a:pPr>
-            <a:r>
-              <a:rPr lang="en-US" sz="2250" i="1" spc="-45" kern="0" dirty="0">
+            <a:r>
+              <a:rPr lang="en-US" sz="2250" i="1" kern="0" spc="-45" dirty="0">
                 <a:solidFill>
                   <a:srgbClr val="0E0E0E"/>
                 </a:solidFill>
@@ -5901,7 +5635,7 @@
           </a:bodyPr>
           <a:lstStyle/>
           <a:p>
-            <a:pPr algn="l" indent="0" marL="0">
+            <a:pPr marL="0" indent="0" algn="l">
               <a:lnSpc>
                 <a:spcPct val="140000"/>
               </a:lnSpc>
@@ -5945,11 +5679,11 @@
           </a:bodyPr>
           <a:lstStyle/>
           <a:p>
-            <a:pPr algn="l" indent="0" marL="0">
-              <a:buNone/>
-            </a:pPr>
-            <a:r>
-              <a:rPr lang="en-US" sz="1800" spc="108" kern="0" dirty="0">
+            <a:pPr marL="0" indent="0" algn="l">
+              <a:buNone/>
+            </a:pPr>
+            <a:r>
+              <a:rPr lang="en-US" sz="1800" kern="0" spc="108" dirty="0">
                 <a:solidFill>
                   <a:srgbClr val="888076"/>
                 </a:solidFill>
@@ -5986,11 +5720,11 @@
           </a:bodyPr>
           <a:lstStyle/>
           <a:p>
-            <a:pPr algn="l" indent="0" marL="0">
-              <a:buNone/>
-            </a:pPr>
-            <a:r>
-              <a:rPr lang="en-US" sz="2700" i="1" spc="-54" kern="0" dirty="0">
+            <a:pPr marL="0" indent="0" algn="l">
+              <a:buNone/>
+            </a:pPr>
+            <a:r>
+              <a:rPr lang="en-US" sz="2700" i="1" kern="0" spc="-54" dirty="0">
                 <a:solidFill>
                   <a:srgbClr val="888076"/>
                 </a:solidFill>
@@ -6020,6 +5754,7 @@
         <a:solidFill>
           <a:srgbClr val="1A4DFF"/>
         </a:solidFill>
+        <a:effectLst/>
       </p:bgPr>
     </p:bg>
     <p:spTree>
@@ -6079,11 +5814,11 @@
           </a:bodyPr>
           <a:lstStyle/>
           <a:p>
-            <a:pPr algn="l" indent="0" marL="0">
-              <a:buNone/>
-            </a:pPr>
-            <a:r>
-              <a:rPr lang="en-US" sz="1800" spc="108" kern="0" dirty="0">
+            <a:pPr marL="0" indent="0" algn="l">
+              <a:buNone/>
+            </a:pPr>
+            <a:r>
+              <a:rPr lang="en-US" sz="1800" kern="0" spc="108" dirty="0">
                 <a:solidFill>
                   <a:srgbClr val="F2EFE8">
                     <a:alpha val="70000"/>
@@ -6122,11 +5857,11 @@
           </a:bodyPr>
           <a:lstStyle/>
           <a:p>
-            <a:pPr algn="l" indent="0" marL="0">
-              <a:buNone/>
-            </a:pPr>
-            <a:r>
-              <a:rPr lang="en-US" sz="1800" spc="108" kern="0" dirty="0">
+            <a:pPr marL="0" indent="0" algn="l">
+              <a:buNone/>
+            </a:pPr>
+            <a:r>
+              <a:rPr lang="en-US" sz="1800" kern="0" spc="108" dirty="0">
                 <a:solidFill>
                   <a:srgbClr val="F2EFE8">
                     <a:alpha val="70000"/>
@@ -6185,11 +5920,11 @@
           </a:bodyPr>
           <a:lstStyle/>
           <a:p>
-            <a:pPr algn="l" indent="0" marL="0">
-              <a:buNone/>
-            </a:pPr>
-            <a:r>
-              <a:rPr lang="en-US" sz="1800" spc="144" kern="0" dirty="0">
+            <a:pPr marL="0" indent="0" algn="l">
+              <a:buNone/>
+            </a:pPr>
+            <a:r>
+              <a:rPr lang="en-US" sz="1800" kern="0" spc="144" dirty="0">
                 <a:solidFill>
                   <a:srgbClr val="D6FF3D"/>
                 </a:solidFill>
@@ -6226,11 +5961,11 @@
           </a:bodyPr>
           <a:lstStyle/>
           <a:p>
-            <a:pPr algn="l" indent="0" marL="0">
-              <a:buNone/>
-            </a:pPr>
-            <a:r>
-              <a:rPr lang="en-US" sz="1800" spc="144" kern="0" dirty="0">
+            <a:pPr marL="0" indent="0" algn="l">
+              <a:buNone/>
+            </a:pPr>
+            <a:r>
+              <a:rPr lang="en-US" sz="1800" kern="0" spc="144" dirty="0">
                 <a:solidFill>
                   <a:srgbClr val="F2EFE8">
                     <a:alpha val="85000"/>
@@ -6269,14 +6004,14 @@
           </a:bodyPr>
           <a:lstStyle/>
           <a:p>
-            <a:pPr algn="l" indent="0" marL="0">
+            <a:pPr marL="0" indent="0" algn="l">
               <a:lnSpc>
                 <a:spcPct val="92000"/>
               </a:lnSpc>
               <a:buNone/>
             </a:pPr>
             <a:r>
-              <a:rPr lang="en-US" sz="10500" spc="-367" kern="0" dirty="0">
+              <a:rPr lang="en-US" sz="10500" kern="0" spc="-367" dirty="0">
                 <a:solidFill>
                   <a:srgbClr val="F2EFE8"/>
                 </a:solidFill>
@@ -6286,14 +6021,8 @@
               </a:rPr>
               <a:t>Design training is </a:t>
             </a:r>
-            <a:pPr algn="l" indent="0" marL="0">
-              <a:lnSpc>
-                <a:spcPct val="92000"/>
-              </a:lnSpc>
-              <a:buNone/>
-            </a:pPr>
-            <a:r>
-              <a:rPr lang="en-US" sz="10500" i="1" spc="-367" kern="0" dirty="0">
+            <a:r>
+              <a:rPr lang="en-US" sz="10500" i="1" kern="0" spc="-367" dirty="0">
                 <a:solidFill>
                   <a:srgbClr val="D6FF3D"/>
                 </a:solidFill>
@@ -6303,14 +6032,8 @@
               </a:rPr>
               <a:t>no longer </a:t>
             </a:r>
-            <a:pPr algn="l" indent="0" marL="0">
-              <a:lnSpc>
-                <a:spcPct val="92000"/>
-              </a:lnSpc>
-              <a:buNone/>
-            </a:pPr>
-            <a:r>
-              <a:rPr lang="en-US" sz="10500" spc="-367" kern="0" dirty="0">
+            <a:r>
+              <a:rPr lang="en-US" sz="10500" kern="0" spc="-367" dirty="0">
                 <a:solidFill>
                   <a:srgbClr val="F2EFE8"/>
                 </a:solidFill>
@@ -6369,11 +6092,11 @@
           </a:bodyPr>
           <a:lstStyle/>
           <a:p>
-            <a:pPr algn="l" indent="0" marL="0">
-              <a:buNone/>
-            </a:pPr>
-            <a:r>
-              <a:rPr lang="en-US" sz="1800" b="1" spc="72" kern="0" dirty="0">
+            <a:pPr marL="0" indent="0" algn="l">
+              <a:buNone/>
+            </a:pPr>
+            <a:r>
+              <a:rPr lang="en-US" sz="1800" b="1" kern="0" spc="72" dirty="0">
                 <a:solidFill>
                   <a:srgbClr val="D6FF3D"/>
                 </a:solidFill>
@@ -6410,7 +6133,7 @@
           </a:bodyPr>
           <a:lstStyle/>
           <a:p>
-            <a:pPr algn="l" indent="0" marL="0">
+            <a:pPr marL="0" indent="0" algn="l">
               <a:lnSpc>
                 <a:spcPct val="145000"/>
               </a:lnSpc>
@@ -6454,11 +6177,11 @@
           </a:bodyPr>
           <a:lstStyle/>
           <a:p>
-            <a:pPr algn="l" indent="0" marL="0">
-              <a:buNone/>
-            </a:pPr>
-            <a:r>
-              <a:rPr lang="en-US" sz="1800" b="1" spc="72" kern="0" dirty="0">
+            <a:pPr marL="0" indent="0" algn="l">
+              <a:buNone/>
+            </a:pPr>
+            <a:r>
+              <a:rPr lang="en-US" sz="1800" b="1" kern="0" spc="72" dirty="0">
                 <a:solidFill>
                   <a:srgbClr val="D6FF3D"/>
                 </a:solidFill>
@@ -6495,7 +6218,7 @@
           </a:bodyPr>
           <a:lstStyle/>
           <a:p>
-            <a:pPr algn="l" indent="0" marL="0">
+            <a:pPr marL="0" indent="0" algn="l">
               <a:lnSpc>
                 <a:spcPct val="145000"/>
               </a:lnSpc>
@@ -6539,11 +6262,11 @@
           </a:bodyPr>
           <a:lstStyle/>
           <a:p>
-            <a:pPr algn="l" indent="0" marL="0">
-              <a:buNone/>
-            </a:pPr>
-            <a:r>
-              <a:rPr lang="en-US" sz="1800" b="1" spc="72" kern="0" dirty="0">
+            <a:pPr marL="0" indent="0" algn="l">
+              <a:buNone/>
+            </a:pPr>
+            <a:r>
+              <a:rPr lang="en-US" sz="1800" b="1" kern="0" spc="72" dirty="0">
                 <a:solidFill>
                   <a:srgbClr val="D6FF3D"/>
                 </a:solidFill>
@@ -6580,7 +6303,7 @@
           </a:bodyPr>
           <a:lstStyle/>
           <a:p>
-            <a:pPr algn="l" indent="0" marL="0">
+            <a:pPr marL="0" indent="0" algn="l">
               <a:lnSpc>
                 <a:spcPct val="145000"/>
               </a:lnSpc>
@@ -6624,11 +6347,11 @@
           </a:bodyPr>
           <a:lstStyle/>
           <a:p>
-            <a:pPr algn="l" indent="0" marL="0">
-              <a:buNone/>
-            </a:pPr>
-            <a:r>
-              <a:rPr lang="en-US" sz="1800" spc="108" kern="0" dirty="0">
+            <a:pPr marL="0" indent="0" algn="l">
+              <a:buNone/>
+            </a:pPr>
+            <a:r>
+              <a:rPr lang="en-US" sz="1800" kern="0" spc="108" dirty="0">
                 <a:solidFill>
                   <a:srgbClr val="F2EFE8">
                     <a:alpha val="65000"/>
@@ -6667,11 +6390,11 @@
           </a:bodyPr>
           <a:lstStyle/>
           <a:p>
-            <a:pPr algn="l" indent="0" marL="0">
-              <a:buNone/>
-            </a:pPr>
-            <a:r>
-              <a:rPr lang="en-US" sz="2700" i="1" spc="-54" kern="0" dirty="0">
+            <a:pPr marL="0" indent="0" algn="l">
+              <a:buNone/>
+            </a:pPr>
+            <a:r>
+              <a:rPr lang="en-US" sz="2700" i="1" kern="0" spc="-54" dirty="0">
                 <a:solidFill>
                   <a:srgbClr val="F2EFE8">
                     <a:alpha val="65000"/>
@@ -6703,6 +6426,7 @@
         <a:solidFill>
           <a:srgbClr val="F2EFE8"/>
         </a:solidFill>
+        <a:effectLst/>
       </p:bgPr>
     </p:bg>
     <p:spTree>
@@ -6762,11 +6486,11 @@
           </a:bodyPr>
           <a:lstStyle/>
           <a:p>
-            <a:pPr algn="l" indent="0" marL="0">
-              <a:buNone/>
-            </a:pPr>
-            <a:r>
-              <a:rPr lang="en-US" sz="1800" spc="108" kern="0" dirty="0">
+            <a:pPr marL="0" indent="0" algn="l">
+              <a:buNone/>
+            </a:pPr>
+            <a:r>
+              <a:rPr lang="en-US" sz="1800" kern="0" spc="108" dirty="0">
                 <a:solidFill>
                   <a:srgbClr val="888076"/>
                 </a:solidFill>
@@ -6803,11 +6527,11 @@
           </a:bodyPr>
           <a:lstStyle/>
           <a:p>
-            <a:pPr algn="l" indent="0" marL="0">
-              <a:buNone/>
-            </a:pPr>
-            <a:r>
-              <a:rPr lang="en-US" sz="1800" spc="108" kern="0" dirty="0">
+            <a:pPr marL="0" indent="0" algn="l">
+              <a:buNone/>
+            </a:pPr>
+            <a:r>
+              <a:rPr lang="en-US" sz="1800" kern="0" spc="108" dirty="0">
                 <a:solidFill>
                   <a:srgbClr val="888076"/>
                 </a:solidFill>
@@ -6864,11 +6588,11 @@
           </a:bodyPr>
           <a:lstStyle/>
           <a:p>
-            <a:pPr algn="l" indent="0" marL="0">
-              <a:buNone/>
-            </a:pPr>
-            <a:r>
-              <a:rPr lang="en-US" sz="1800" spc="144" kern="0" dirty="0">
+            <a:pPr marL="0" indent="0" algn="l">
+              <a:buNone/>
+            </a:pPr>
+            <a:r>
+              <a:rPr lang="en-US" sz="1800" kern="0" spc="144" dirty="0">
                 <a:solidFill>
                   <a:srgbClr val="FF5B1F"/>
                 </a:solidFill>
@@ -6905,11 +6629,11 @@
           </a:bodyPr>
           <a:lstStyle/>
           <a:p>
-            <a:pPr algn="l" indent="0" marL="0">
-              <a:buNone/>
-            </a:pPr>
-            <a:r>
-              <a:rPr lang="en-US" sz="1800" spc="144" kern="0" dirty="0">
+            <a:pPr marL="0" indent="0" algn="l">
+              <a:buNone/>
+            </a:pPr>
+            <a:r>
+              <a:rPr lang="en-US" sz="1800" kern="0" spc="144" dirty="0">
                 <a:solidFill>
                   <a:srgbClr val="2A2A2A"/>
                 </a:solidFill>
@@ -6946,14 +6670,14 @@
           </a:bodyPr>
           <a:lstStyle/>
           <a:p>
-            <a:pPr algn="l" indent="0" marL="0">
+            <a:pPr marL="0" indent="0" algn="l">
               <a:lnSpc>
                 <a:spcPct val="96000"/>
               </a:lnSpc>
               <a:buNone/>
             </a:pPr>
             <a:r>
-              <a:rPr lang="en-US" sz="7200" spc="-180" kern="0" dirty="0">
+              <a:rPr lang="en-US" sz="7200" kern="0" spc="-180" dirty="0">
                 <a:solidFill>
                   <a:srgbClr val="0E0E0E"/>
                 </a:solidFill>
@@ -6963,14 +6687,8 @@
               </a:rPr>
               <a:t>Text-to-diagram. </a:t>
             </a:r>
-            <a:pPr algn="l" indent="0" marL="0">
-              <a:lnSpc>
-                <a:spcPct val="96000"/>
-              </a:lnSpc>
-              <a:buNone/>
-            </a:pPr>
-            <a:r>
-              <a:rPr lang="en-US" sz="7200" i="1" spc="-180" kern="0" dirty="0">
+            <a:r>
+              <a:rPr lang="en-US" sz="7200" i="1" kern="0" spc="-180" dirty="0">
                 <a:solidFill>
                   <a:srgbClr val="0E0E0E"/>
                 </a:solidFill>
@@ -7007,11 +6725,11 @@
           </a:bodyPr>
           <a:lstStyle/>
           <a:p>
-            <a:pPr algn="l" indent="0" marL="0">
-              <a:buNone/>
-            </a:pPr>
-            <a:r>
-              <a:rPr lang="en-US" sz="1800" spc="180" kern="0" dirty="0">
+            <a:pPr marL="0" indent="0" algn="l">
+              <a:buNone/>
+            </a:pPr>
+            <a:r>
+              <a:rPr lang="en-US" sz="1800" kern="0" spc="180" dirty="0">
                 <a:solidFill>
                   <a:srgbClr val="FF5B1F"/>
                 </a:solidFill>
@@ -7088,7 +6806,7 @@
           </a:bodyPr>
           <a:lstStyle/>
           <a:p>
-            <a:pPr algn="l" indent="0" marL="0">
+            <a:pPr marL="0" indent="0" algn="l">
               <a:lnSpc>
                 <a:spcPct val="140000"/>
               </a:lnSpc>
@@ -7108,7 +6826,7 @@
             <a:endParaRPr lang="en-US" sz="1650" dirty="0"/>
           </a:p>
           <a:p>
-            <a:pPr algn="l" indent="0" marL="0">
+            <a:pPr marL="0" indent="0" algn="l">
               <a:lnSpc>
                 <a:spcPct val="140000"/>
               </a:lnSpc>
@@ -7128,7 +6846,7 @@
             <a:endParaRPr lang="en-US" sz="1650" dirty="0"/>
           </a:p>
           <a:p>
-            <a:pPr algn="l" indent="0" marL="0">
+            <a:pPr marL="0" indent="0" algn="l">
               <a:lnSpc>
                 <a:spcPct val="140000"/>
               </a:lnSpc>
@@ -7148,7 +6866,7 @@
             <a:endParaRPr lang="en-US" sz="1650" dirty="0"/>
           </a:p>
           <a:p>
-            <a:pPr algn="l" indent="0" marL="0">
+            <a:pPr marL="0" indent="0" algn="l">
               <a:lnSpc>
                 <a:spcPct val="140000"/>
               </a:lnSpc>
@@ -7157,7 +6875,7 @@
             <a:endParaRPr lang="en-US" sz="1650" dirty="0"/>
           </a:p>
           <a:p>
-            <a:pPr algn="l" indent="0" marL="0">
+            <a:pPr marL="0" indent="0" algn="l">
               <a:lnSpc>
                 <a:spcPct val="140000"/>
               </a:lnSpc>
@@ -7177,7 +6895,7 @@
             <a:endParaRPr lang="en-US" sz="1650" dirty="0"/>
           </a:p>
           <a:p>
-            <a:pPr algn="l" indent="0" marL="0">
+            <a:pPr marL="0" indent="0" algn="l">
               <a:lnSpc>
                 <a:spcPct val="140000"/>
               </a:lnSpc>
@@ -7197,7 +6915,7 @@
             <a:endParaRPr lang="en-US" sz="1650" dirty="0"/>
           </a:p>
           <a:p>
-            <a:pPr algn="l" indent="0" marL="0">
+            <a:pPr marL="0" indent="0" algn="l">
               <a:lnSpc>
                 <a:spcPct val="140000"/>
               </a:lnSpc>
@@ -7217,7 +6935,7 @@
             <a:endParaRPr lang="en-US" sz="1650" dirty="0"/>
           </a:p>
           <a:p>
-            <a:pPr algn="l" indent="0" marL="0">
+            <a:pPr marL="0" indent="0" algn="l">
               <a:lnSpc>
                 <a:spcPct val="140000"/>
               </a:lnSpc>
@@ -7237,7 +6955,7 @@
             <a:endParaRPr lang="en-US" sz="1650" dirty="0"/>
           </a:p>
           <a:p>
-            <a:pPr algn="l" indent="0" marL="0">
+            <a:pPr marL="0" indent="0" algn="l">
               <a:lnSpc>
                 <a:spcPct val="140000"/>
               </a:lnSpc>
@@ -7257,7 +6975,7 @@
             <a:endParaRPr lang="en-US" sz="1650" dirty="0"/>
           </a:p>
           <a:p>
-            <a:pPr algn="l" indent="0" marL="0">
+            <a:pPr marL="0" indent="0" algn="l">
               <a:lnSpc>
                 <a:spcPct val="140000"/>
               </a:lnSpc>
@@ -7277,7 +6995,7 @@
             <a:endParaRPr lang="en-US" sz="1650" dirty="0"/>
           </a:p>
           <a:p>
-            <a:pPr algn="l" indent="0" marL="0">
+            <a:pPr marL="0" indent="0" algn="l">
               <a:lnSpc>
                 <a:spcPct val="140000"/>
               </a:lnSpc>
@@ -7297,7 +7015,7 @@
             <a:endParaRPr lang="en-US" sz="1650" dirty="0"/>
           </a:p>
           <a:p>
-            <a:pPr algn="l" indent="0" marL="0">
+            <a:pPr marL="0" indent="0" algn="l">
               <a:lnSpc>
                 <a:spcPct val="140000"/>
               </a:lnSpc>
@@ -7306,7 +7024,7 @@
             <a:endParaRPr lang="en-US" sz="1650" dirty="0"/>
           </a:p>
           <a:p>
-            <a:pPr algn="l" indent="0" marL="0">
+            <a:pPr marL="0" indent="0" algn="l">
               <a:lnSpc>
                 <a:spcPct val="140000"/>
               </a:lnSpc>
@@ -7326,7 +7044,7 @@
             <a:endParaRPr lang="en-US" sz="1650" dirty="0"/>
           </a:p>
           <a:p>
-            <a:pPr algn="l" indent="0" marL="0">
+            <a:pPr marL="0" indent="0" algn="l">
               <a:lnSpc>
                 <a:spcPct val="140000"/>
               </a:lnSpc>
@@ -7346,7 +7064,7 @@
             <a:endParaRPr lang="en-US" sz="1650" dirty="0"/>
           </a:p>
           <a:p>
-            <a:pPr algn="l" indent="0" marL="0">
+            <a:pPr marL="0" indent="0" algn="l">
               <a:lnSpc>
                 <a:spcPct val="140000"/>
               </a:lnSpc>
@@ -7366,7 +7084,7 @@
             <a:endParaRPr lang="en-US" sz="1650" dirty="0"/>
           </a:p>
           <a:p>
-            <a:pPr algn="l" indent="0" marL="0">
+            <a:pPr marL="0" indent="0" algn="l">
               <a:lnSpc>
                 <a:spcPct val="140000"/>
               </a:lnSpc>
@@ -7386,7 +7104,7 @@
             <a:endParaRPr lang="en-US" sz="1650" dirty="0"/>
           </a:p>
           <a:p>
-            <a:pPr algn="l" indent="0" marL="0">
+            <a:pPr marL="0" indent="0" algn="l">
               <a:lnSpc>
                 <a:spcPct val="140000"/>
               </a:lnSpc>
@@ -7406,7 +7124,7 @@
             <a:endParaRPr lang="en-US" sz="1650" dirty="0"/>
           </a:p>
           <a:p>
-            <a:pPr algn="l" indent="0" marL="0">
+            <a:pPr marL="0" indent="0" algn="l">
               <a:lnSpc>
                 <a:spcPct val="140000"/>
               </a:lnSpc>
@@ -7426,7 +7144,7 @@
             <a:endParaRPr lang="en-US" sz="1650" dirty="0"/>
           </a:p>
           <a:p>
-            <a:pPr algn="l" indent="0" marL="0">
+            <a:pPr marL="0" indent="0" algn="l">
               <a:lnSpc>
                 <a:spcPct val="140000"/>
               </a:lnSpc>
@@ -7470,7 +7188,7 @@
           </a:bodyPr>
           <a:lstStyle/>
           <a:p>
-            <a:pPr algn="l" indent="0" marL="0">
+            <a:pPr marL="0" indent="0" algn="l">
               <a:lnSpc>
                 <a:spcPct val="140000"/>
               </a:lnSpc>
@@ -7487,12 +7205,6 @@
               </a:rPr>
               <a:t>Render at </a:t>
             </a:r>
-            <a:pPr algn="l" indent="0" marL="0">
-              <a:lnSpc>
-                <a:spcPct val="140000"/>
-              </a:lnSpc>
-              <a:buNone/>
-            </a:pPr>
             <a:r>
               <a:rPr lang="en-US" sz="1800" b="1" dirty="0">
                 <a:solidFill>
@@ -7504,12 +7216,6 @@
               </a:rPr>
               <a:t>mermaid.live </a:t>
             </a:r>
-            <a:pPr algn="l" indent="0" marL="0">
-              <a:lnSpc>
-                <a:spcPct val="140000"/>
-              </a:lnSpc>
-              <a:buNone/>
-            </a:pPr>
             <a:r>
               <a:rPr lang="en-US" sz="1800" dirty="0">
                 <a:solidFill>
@@ -7548,11 +7254,11 @@
           </a:bodyPr>
           <a:lstStyle/>
           <a:p>
-            <a:pPr algn="l" indent="0" marL="0">
-              <a:buNone/>
-            </a:pPr>
-            <a:r>
-              <a:rPr lang="en-US" sz="1800" spc="180" kern="0" dirty="0">
+            <a:pPr marL="0" indent="0" algn="l">
+              <a:buNone/>
+            </a:pPr>
+            <a:r>
+              <a:rPr lang="en-US" sz="1800" kern="0" spc="180" dirty="0">
                 <a:solidFill>
                   <a:srgbClr val="888076"/>
                 </a:solidFill>
@@ -7609,7 +7315,7 @@
           </a:bodyPr>
           <a:lstStyle/>
           <a:p>
-            <a:pPr algn="l" indent="0" marL="0">
+            <a:pPr marL="0" indent="0" algn="l">
               <a:lnSpc>
                 <a:spcPct val="145000"/>
               </a:lnSpc>
@@ -7629,7 +7335,7 @@
             <a:endParaRPr lang="en-US" sz="1650" dirty="0"/>
           </a:p>
           <a:p>
-            <a:pPr algn="l" indent="0" marL="0">
+            <a:pPr marL="0" indent="0" algn="l">
               <a:lnSpc>
                 <a:spcPct val="145000"/>
               </a:lnSpc>
@@ -7649,7 +7355,7 @@
             <a:endParaRPr lang="en-US" sz="1650" dirty="0"/>
           </a:p>
           <a:p>
-            <a:pPr algn="l" indent="0" marL="0">
+            <a:pPr marL="0" indent="0" algn="l">
               <a:lnSpc>
                 <a:spcPct val="145000"/>
               </a:lnSpc>
@@ -7669,7 +7375,7 @@
             <a:endParaRPr lang="en-US" sz="1650" dirty="0"/>
           </a:p>
           <a:p>
-            <a:pPr algn="l" indent="0" marL="0">
+            <a:pPr marL="0" indent="0" algn="l">
               <a:lnSpc>
                 <a:spcPct val="145000"/>
               </a:lnSpc>
@@ -7689,7 +7395,7 @@
             <a:endParaRPr lang="en-US" sz="1650" dirty="0"/>
           </a:p>
           <a:p>
-            <a:pPr algn="l" indent="0" marL="0">
+            <a:pPr marL="0" indent="0" algn="l">
               <a:lnSpc>
                 <a:spcPct val="145000"/>
               </a:lnSpc>
@@ -7709,7 +7415,7 @@
             <a:endParaRPr lang="en-US" sz="1650" dirty="0"/>
           </a:p>
           <a:p>
-            <a:pPr algn="l" indent="0" marL="0">
+            <a:pPr marL="0" indent="0" algn="l">
               <a:lnSpc>
                 <a:spcPct val="145000"/>
               </a:lnSpc>
@@ -7729,7 +7435,7 @@
             <a:endParaRPr lang="en-US" sz="1650" dirty="0"/>
           </a:p>
           <a:p>
-            <a:pPr algn="l" indent="0" marL="0">
+            <a:pPr marL="0" indent="0" algn="l">
               <a:lnSpc>
                 <a:spcPct val="145000"/>
               </a:lnSpc>
@@ -7749,7 +7455,7 @@
             <a:endParaRPr lang="en-US" sz="1650" dirty="0"/>
           </a:p>
           <a:p>
-            <a:pPr algn="l" indent="0" marL="0">
+            <a:pPr marL="0" indent="0" algn="l">
               <a:lnSpc>
                 <a:spcPct val="145000"/>
               </a:lnSpc>
@@ -7793,7 +7499,7 @@
           </a:bodyPr>
           <a:lstStyle/>
           <a:p>
-            <a:pPr algn="l" indent="0" marL="0">
+            <a:pPr marL="0" indent="0" algn="l">
               <a:lnSpc>
                 <a:spcPct val="140000"/>
               </a:lnSpc>
@@ -7810,12 +7516,6 @@
               </a:rPr>
               <a:t>Renders identically across </a:t>
             </a:r>
-            <a:pPr algn="l" indent="0" marL="0">
-              <a:lnSpc>
-                <a:spcPct val="140000"/>
-              </a:lnSpc>
-              <a:buNone/>
-            </a:pPr>
             <a:r>
               <a:rPr lang="en-US" sz="1800" b="1" dirty="0">
                 <a:solidFill>
@@ -7827,12 +7527,6 @@
               </a:rPr>
               <a:t>Notion · GitHub · Obsidian </a:t>
             </a:r>
-            <a:pPr algn="l" indent="0" marL="0">
-              <a:lnSpc>
-                <a:spcPct val="140000"/>
-              </a:lnSpc>
-              <a:buNone/>
-            </a:pPr>
             <a:r>
               <a:rPr lang="en-US" sz="1800" dirty="0">
                 <a:solidFill>
@@ -7891,11 +7585,11 @@
           </a:bodyPr>
           <a:lstStyle/>
           <a:p>
-            <a:pPr algn="l" indent="0" marL="0">
-              <a:buNone/>
-            </a:pPr>
-            <a:r>
-              <a:rPr lang="en-US" sz="1350" spc="54" kern="0" dirty="0">
+            <a:pPr marL="0" indent="0" algn="l">
+              <a:buNone/>
+            </a:pPr>
+            <a:r>
+              <a:rPr lang="en-US" sz="1350" kern="0" spc="54" dirty="0">
                 <a:solidFill>
                   <a:srgbClr val="D6FF3D"/>
                 </a:solidFill>
@@ -7932,14 +7626,14 @@
           </a:bodyPr>
           <a:lstStyle/>
           <a:p>
-            <a:pPr algn="l" indent="0" marL="0">
+            <a:pPr marL="0" indent="0" algn="l">
               <a:lnSpc>
                 <a:spcPct val="145000"/>
               </a:lnSpc>
               <a:buNone/>
             </a:pPr>
             <a:r>
-              <a:rPr lang="en-US" sz="1200" spc="48" kern="0" dirty="0">
+              <a:rPr lang="en-US" sz="1200" kern="0" spc="48" dirty="0">
                 <a:solidFill>
                   <a:srgbClr val="F2EFE8">
                     <a:alpha val="85000"/>
@@ -7978,11 +7672,11 @@
           </a:bodyPr>
           <a:lstStyle/>
           <a:p>
-            <a:pPr algn="l" indent="0" marL="0">
-              <a:buNone/>
-            </a:pPr>
-            <a:r>
-              <a:rPr lang="en-US" sz="1800" spc="108" kern="0" dirty="0">
+            <a:pPr marL="0" indent="0" algn="l">
+              <a:buNone/>
+            </a:pPr>
+            <a:r>
+              <a:rPr lang="en-US" sz="1800" kern="0" spc="108" dirty="0">
                 <a:solidFill>
                   <a:srgbClr val="888076"/>
                 </a:solidFill>
@@ -8019,11 +7713,11 @@
           </a:bodyPr>
           <a:lstStyle/>
           <a:p>
-            <a:pPr algn="l" indent="0" marL="0">
-              <a:buNone/>
-            </a:pPr>
-            <a:r>
-              <a:rPr lang="en-US" sz="2700" i="1" spc="-54" kern="0" dirty="0">
+            <a:pPr marL="0" indent="0" algn="l">
+              <a:buNone/>
+            </a:pPr>
+            <a:r>
+              <a:rPr lang="en-US" sz="2700" i="1" kern="0" spc="-54" dirty="0">
                 <a:solidFill>
                   <a:srgbClr val="888076"/>
                 </a:solidFill>
@@ -8053,6 +7747,7 @@
         <a:solidFill>
           <a:srgbClr val="F2EFE8"/>
         </a:solidFill>
+        <a:effectLst/>
       </p:bgPr>
     </p:bg>
     <p:spTree>
@@ -8112,11 +7807,11 @@
           </a:bodyPr>
           <a:lstStyle/>
           <a:p>
-            <a:pPr algn="l" indent="0" marL="0">
-              <a:buNone/>
-            </a:pPr>
-            <a:r>
-              <a:rPr lang="en-US" sz="1800" spc="108" kern="0" dirty="0">
+            <a:pPr marL="0" indent="0" algn="l">
+              <a:buNone/>
+            </a:pPr>
+            <a:r>
+              <a:rPr lang="en-US" sz="1800" kern="0" spc="108" dirty="0">
                 <a:solidFill>
                   <a:srgbClr val="888076"/>
                 </a:solidFill>
@@ -8153,11 +7848,11 @@
           </a:bodyPr>
           <a:lstStyle/>
           <a:p>
-            <a:pPr algn="l" indent="0" marL="0">
-              <a:buNone/>
-            </a:pPr>
-            <a:r>
-              <a:rPr lang="en-US" sz="1800" spc="108" kern="0" dirty="0">
+            <a:pPr marL="0" indent="0" algn="l">
+              <a:buNone/>
+            </a:pPr>
+            <a:r>
+              <a:rPr lang="en-US" sz="1800" kern="0" spc="108" dirty="0">
                 <a:solidFill>
                   <a:srgbClr val="888076"/>
                 </a:solidFill>
@@ -8214,11 +7909,11 @@
           </a:bodyPr>
           <a:lstStyle/>
           <a:p>
-            <a:pPr algn="l" indent="0" marL="0">
-              <a:buNone/>
-            </a:pPr>
-            <a:r>
-              <a:rPr lang="en-US" sz="1800" spc="144" kern="0" dirty="0">
+            <a:pPr marL="0" indent="0" algn="l">
+              <a:buNone/>
+            </a:pPr>
+            <a:r>
+              <a:rPr lang="en-US" sz="1800" kern="0" spc="144" dirty="0">
                 <a:solidFill>
                   <a:srgbClr val="FF5B1F"/>
                 </a:solidFill>
@@ -8255,11 +7950,11 @@
           </a:bodyPr>
           <a:lstStyle/>
           <a:p>
-            <a:pPr algn="l" indent="0" marL="0">
-              <a:buNone/>
-            </a:pPr>
-            <a:r>
-              <a:rPr lang="en-US" sz="1800" spc="144" kern="0" dirty="0">
+            <a:pPr marL="0" indent="0" algn="l">
+              <a:buNone/>
+            </a:pPr>
+            <a:r>
+              <a:rPr lang="en-US" sz="1800" kern="0" spc="144" dirty="0">
                 <a:solidFill>
                   <a:srgbClr val="2A2A2A"/>
                 </a:solidFill>
@@ -8296,14 +7991,14 @@
           </a:bodyPr>
           <a:lstStyle/>
           <a:p>
-            <a:pPr algn="l" indent="0" marL="0">
+            <a:pPr marL="0" indent="0" algn="l">
               <a:lnSpc>
                 <a:spcPct val="96000"/>
               </a:lnSpc>
               <a:buNone/>
             </a:pPr>
             <a:r>
-              <a:rPr lang="en-US" sz="7200" spc="-180" kern="0" dirty="0">
+              <a:rPr lang="en-US" sz="7200" kern="0" spc="-180" dirty="0">
                 <a:solidFill>
                   <a:srgbClr val="0E0E0E"/>
                 </a:solidFill>
@@ -8313,14 +8008,8 @@
               </a:rPr>
               <a:t>A studio of one. </a:t>
             </a:r>
-            <a:pPr algn="l" indent="0" marL="0">
-              <a:lnSpc>
-                <a:spcPct val="96000"/>
-              </a:lnSpc>
-              <a:buNone/>
-            </a:pPr>
-            <a:r>
-              <a:rPr lang="en-US" sz="7200" i="1" spc="-180" kern="0" dirty="0">
+            <a:r>
+              <a:rPr lang="en-US" sz="7200" i="1" kern="0" spc="-180" dirty="0">
                 <a:solidFill>
                   <a:srgbClr val="0E0E0E"/>
                 </a:solidFill>
@@ -8382,11 +8071,11 @@
           </a:bodyPr>
           <a:lstStyle/>
           <a:p>
-            <a:pPr algn="l" indent="0" marL="0">
-              <a:buNone/>
-            </a:pPr>
-            <a:r>
-              <a:rPr lang="en-US" sz="1800" spc="144" kern="0" dirty="0">
+            <a:pPr marL="0" indent="0" algn="l">
+              <a:buNone/>
+            </a:pPr>
+            <a:r>
+              <a:rPr lang="en-US" sz="1800" kern="0" spc="144" dirty="0">
                 <a:solidFill>
                   <a:srgbClr val="888076"/>
                 </a:solidFill>
@@ -8423,14 +8112,14 @@
           </a:bodyPr>
           <a:lstStyle/>
           <a:p>
-            <a:pPr algn="l" indent="0" marL="0">
+            <a:pPr marL="0" indent="0" algn="l">
               <a:lnSpc>
                 <a:spcPct val="95000"/>
               </a:lnSpc>
               <a:buNone/>
             </a:pPr>
             <a:r>
-              <a:rPr lang="en-US" sz="3300" spc="-66" kern="0" dirty="0">
+              <a:rPr lang="en-US" sz="3300" kern="0" spc="-66" dirty="0">
                 <a:solidFill>
                   <a:srgbClr val="0E0E0E"/>
                 </a:solidFill>
@@ -8467,7 +8156,7 @@
           </a:bodyPr>
           <a:lstStyle/>
           <a:p>
-            <a:pPr algn="l" indent="0" marL="0">
+            <a:pPr marL="0" indent="0" algn="l">
               <a:lnSpc>
                 <a:spcPct val="140000"/>
               </a:lnSpc>
@@ -8536,11 +8225,11 @@
           </a:bodyPr>
           <a:lstStyle/>
           <a:p>
-            <a:pPr algn="l" indent="0" marL="0">
-              <a:buNone/>
-            </a:pPr>
-            <a:r>
-              <a:rPr lang="en-US" sz="1800" spc="144" kern="0" dirty="0">
+            <a:pPr marL="0" indent="0" algn="l">
+              <a:buNone/>
+            </a:pPr>
+            <a:r>
+              <a:rPr lang="en-US" sz="1800" kern="0" spc="144" dirty="0">
                 <a:solidFill>
                   <a:srgbClr val="888076"/>
                 </a:solidFill>
@@ -8577,14 +8266,14 @@
           </a:bodyPr>
           <a:lstStyle/>
           <a:p>
-            <a:pPr algn="l" indent="0" marL="0">
+            <a:pPr marL="0" indent="0" algn="l">
               <a:lnSpc>
                 <a:spcPct val="95000"/>
               </a:lnSpc>
               <a:buNone/>
             </a:pPr>
             <a:r>
-              <a:rPr lang="en-US" sz="3300" spc="-66" kern="0" dirty="0">
+              <a:rPr lang="en-US" sz="3300" kern="0" spc="-66" dirty="0">
                 <a:solidFill>
                   <a:srgbClr val="0E0E0E"/>
                 </a:solidFill>
@@ -8621,7 +8310,7 @@
           </a:bodyPr>
           <a:lstStyle/>
           <a:p>
-            <a:pPr algn="l" indent="0" marL="0">
+            <a:pPr marL="0" indent="0" algn="l">
               <a:lnSpc>
                 <a:spcPct val="140000"/>
               </a:lnSpc>
@@ -8690,11 +8379,11 @@
           </a:bodyPr>
           <a:lstStyle/>
           <a:p>
-            <a:pPr algn="l" indent="0" marL="0">
-              <a:buNone/>
-            </a:pPr>
-            <a:r>
-              <a:rPr lang="en-US" sz="1800" b="1" spc="144" kern="0" dirty="0">
+            <a:pPr marL="0" indent="0" algn="l">
+              <a:buNone/>
+            </a:pPr>
+            <a:r>
+              <a:rPr lang="en-US" sz="1800" b="1" kern="0" spc="144" dirty="0">
                 <a:solidFill>
                   <a:srgbClr val="0E0E0E"/>
                 </a:solidFill>
@@ -8731,14 +8420,14 @@
           </a:bodyPr>
           <a:lstStyle/>
           <a:p>
-            <a:pPr algn="l" indent="0" marL="0">
+            <a:pPr marL="0" indent="0" algn="l">
               <a:lnSpc>
                 <a:spcPct val="95000"/>
               </a:lnSpc>
               <a:buNone/>
             </a:pPr>
             <a:r>
-              <a:rPr lang="en-US" sz="3300" spc="-66" kern="0" dirty="0">
+              <a:rPr lang="en-US" sz="3300" kern="0" spc="-66" dirty="0">
                 <a:solidFill>
                   <a:srgbClr val="0E0E0E"/>
                 </a:solidFill>
@@ -8775,7 +8464,7 @@
           </a:bodyPr>
           <a:lstStyle/>
           <a:p>
-            <a:pPr algn="l" indent="0" marL="0">
+            <a:pPr marL="0" indent="0" algn="l">
               <a:lnSpc>
                 <a:spcPct val="140000"/>
               </a:lnSpc>
@@ -8844,11 +8533,11 @@
           </a:bodyPr>
           <a:lstStyle/>
           <a:p>
-            <a:pPr algn="l" indent="0" marL="0">
-              <a:buNone/>
-            </a:pPr>
-            <a:r>
-              <a:rPr lang="en-US" sz="1800" spc="144" kern="0" dirty="0">
+            <a:pPr marL="0" indent="0" algn="l">
+              <a:buNone/>
+            </a:pPr>
+            <a:r>
+              <a:rPr lang="en-US" sz="1800" kern="0" spc="144" dirty="0">
                 <a:solidFill>
                   <a:srgbClr val="888076"/>
                 </a:solidFill>
@@ -8885,14 +8574,14 @@
           </a:bodyPr>
           <a:lstStyle/>
           <a:p>
-            <a:pPr algn="l" indent="0" marL="0">
+            <a:pPr marL="0" indent="0" algn="l">
               <a:lnSpc>
                 <a:spcPct val="95000"/>
               </a:lnSpc>
               <a:buNone/>
             </a:pPr>
             <a:r>
-              <a:rPr lang="en-US" sz="3300" spc="-66" kern="0" dirty="0">
+              <a:rPr lang="en-US" sz="3300" kern="0" spc="-66" dirty="0">
                 <a:solidFill>
                   <a:srgbClr val="0E0E0E"/>
                 </a:solidFill>
@@ -8929,7 +8618,7 @@
           </a:bodyPr>
           <a:lstStyle/>
           <a:p>
-            <a:pPr algn="l" indent="0" marL="0">
+            <a:pPr marL="0" indent="0" algn="l">
               <a:lnSpc>
                 <a:spcPct val="140000"/>
               </a:lnSpc>
@@ -8998,11 +8687,11 @@
           </a:bodyPr>
           <a:lstStyle/>
           <a:p>
-            <a:pPr algn="l" indent="0" marL="0">
-              <a:buNone/>
-            </a:pPr>
-            <a:r>
-              <a:rPr lang="en-US" sz="1800" spc="144" kern="0" dirty="0">
+            <a:pPr marL="0" indent="0" algn="l">
+              <a:buNone/>
+            </a:pPr>
+            <a:r>
+              <a:rPr lang="en-US" sz="1800" kern="0" spc="144" dirty="0">
                 <a:solidFill>
                   <a:srgbClr val="888076"/>
                 </a:solidFill>
@@ -9039,14 +8728,14 @@
           </a:bodyPr>
           <a:lstStyle/>
           <a:p>
-            <a:pPr algn="l" indent="0" marL="0">
+            <a:pPr marL="0" indent="0" algn="l">
               <a:lnSpc>
                 <a:spcPct val="95000"/>
               </a:lnSpc>
               <a:buNone/>
             </a:pPr>
             <a:r>
-              <a:rPr lang="en-US" sz="3300" spc="-66" kern="0" dirty="0">
+              <a:rPr lang="en-US" sz="3300" kern="0" spc="-66" dirty="0">
                 <a:solidFill>
                   <a:srgbClr val="0E0E0E"/>
                 </a:solidFill>
@@ -9083,7 +8772,7 @@
           </a:bodyPr>
           <a:lstStyle/>
           <a:p>
-            <a:pPr algn="l" indent="0" marL="0">
+            <a:pPr marL="0" indent="0" algn="l">
               <a:lnSpc>
                 <a:spcPct val="140000"/>
               </a:lnSpc>
@@ -9152,11 +8841,11 @@
           </a:bodyPr>
           <a:lstStyle/>
           <a:p>
-            <a:pPr algn="l" indent="0" marL="0">
-              <a:buNone/>
-            </a:pPr>
-            <a:r>
-              <a:rPr lang="en-US" sz="1800" spc="144" kern="0" dirty="0">
+            <a:pPr marL="0" indent="0" algn="l">
+              <a:buNone/>
+            </a:pPr>
+            <a:r>
+              <a:rPr lang="en-US" sz="1800" kern="0" spc="144" dirty="0">
                 <a:solidFill>
                   <a:srgbClr val="FF5B1F"/>
                 </a:solidFill>
@@ -9193,14 +8882,14 @@
           </a:bodyPr>
           <a:lstStyle/>
           <a:p>
-            <a:pPr algn="l" indent="0" marL="0">
+            <a:pPr marL="0" indent="0" algn="l">
               <a:lnSpc>
                 <a:spcPct val="105000"/>
               </a:lnSpc>
               <a:buNone/>
             </a:pPr>
             <a:r>
-              <a:rPr lang="en-US" sz="2550" spc="-51" kern="0" dirty="0">
+              <a:rPr lang="en-US" sz="2550" kern="0" spc="-51" dirty="0">
                 <a:solidFill>
                   <a:srgbClr val="F2EFE8"/>
                 </a:solidFill>
@@ -9237,7 +8926,7 @@
           </a:bodyPr>
           <a:lstStyle/>
           <a:p>
-            <a:pPr algn="l" indent="0" marL="0">
+            <a:pPr marL="0" indent="0" algn="l">
               <a:lnSpc>
                 <a:spcPct val="140000"/>
               </a:lnSpc>
@@ -9256,12 +8945,6 @@
               </a:rPr>
               <a:t>The model produces ten options. The operator selects the one that </a:t>
             </a:r>
-            <a:pPr algn="l" indent="0" marL="0">
-              <a:lnSpc>
-                <a:spcPct val="140000"/>
-              </a:lnSpc>
-              <a:buNone/>
-            </a:pPr>
             <a:r>
               <a:rPr lang="en-US" sz="1800" i="1" dirty="0">
                 <a:solidFill>
@@ -9275,12 +8958,6 @@
               </a:rPr>
               <a:t>does not appear generic. </a:t>
             </a:r>
-            <a:pPr algn="l" indent="0" marL="0">
-              <a:lnSpc>
-                <a:spcPct val="140000"/>
-              </a:lnSpc>
-              <a:buNone/>
-            </a:pPr>
             <a:r>
               <a:rPr lang="en-US" sz="1800" dirty="0">
                 <a:solidFill>
@@ -9321,11 +8998,11 @@
           </a:bodyPr>
           <a:lstStyle/>
           <a:p>
-            <a:pPr algn="l" indent="0" marL="0">
-              <a:buNone/>
-            </a:pPr>
-            <a:r>
-              <a:rPr lang="en-US" sz="1800" spc="108" kern="0" dirty="0">
+            <a:pPr marL="0" indent="0" algn="l">
+              <a:buNone/>
+            </a:pPr>
+            <a:r>
+              <a:rPr lang="en-US" sz="1800" kern="0" spc="108" dirty="0">
                 <a:solidFill>
                   <a:srgbClr val="888076"/>
                 </a:solidFill>
@@ -9362,11 +9039,11 @@
           </a:bodyPr>
           <a:lstStyle/>
           <a:p>
-            <a:pPr algn="l" indent="0" marL="0">
-              <a:buNone/>
-            </a:pPr>
-            <a:r>
-              <a:rPr lang="en-US" sz="2700" i="1" spc="-54" kern="0" dirty="0">
+            <a:pPr marL="0" indent="0" algn="l">
+              <a:buNone/>
+            </a:pPr>
+            <a:r>
+              <a:rPr lang="en-US" sz="2700" i="1" kern="0" spc="-54" dirty="0">
                 <a:solidFill>
                   <a:srgbClr val="888076"/>
                 </a:solidFill>
@@ -9396,6 +9073,7 @@
         <a:solidFill>
           <a:srgbClr val="F2EFE8"/>
         </a:solidFill>
+        <a:effectLst/>
       </p:bgPr>
     </p:bg>
     <p:spTree>
@@ -9455,11 +9133,11 @@
           </a:bodyPr>
           <a:lstStyle/>
           <a:p>
-            <a:pPr algn="l" indent="0" marL="0">
-              <a:buNone/>
-            </a:pPr>
-            <a:r>
-              <a:rPr lang="en-US" sz="1800" spc="108" kern="0" dirty="0">
+            <a:pPr marL="0" indent="0" algn="l">
+              <a:buNone/>
+            </a:pPr>
+            <a:r>
+              <a:rPr lang="en-US" sz="1800" kern="0" spc="108" dirty="0">
                 <a:solidFill>
                   <a:srgbClr val="888076"/>
                 </a:solidFill>
@@ -9496,11 +9174,11 @@
           </a:bodyPr>
           <a:lstStyle/>
           <a:p>
-            <a:pPr algn="l" indent="0" marL="0">
-              <a:buNone/>
-            </a:pPr>
-            <a:r>
-              <a:rPr lang="en-US" sz="1800" spc="108" kern="0" dirty="0">
+            <a:pPr marL="0" indent="0" algn="l">
+              <a:buNone/>
+            </a:pPr>
+            <a:r>
+              <a:rPr lang="en-US" sz="1800" kern="0" spc="108" dirty="0">
                 <a:solidFill>
                   <a:srgbClr val="888076"/>
                 </a:solidFill>
@@ -9557,11 +9235,11 @@
           </a:bodyPr>
           <a:lstStyle/>
           <a:p>
-            <a:pPr algn="l" indent="0" marL="0">
-              <a:buNone/>
-            </a:pPr>
-            <a:r>
-              <a:rPr lang="en-US" sz="1800" spc="144" kern="0" dirty="0">
+            <a:pPr marL="0" indent="0" algn="l">
+              <a:buNone/>
+            </a:pPr>
+            <a:r>
+              <a:rPr lang="en-US" sz="1800" kern="0" spc="144" dirty="0">
                 <a:solidFill>
                   <a:srgbClr val="FF5B1F"/>
                 </a:solidFill>
@@ -9598,11 +9276,11 @@
           </a:bodyPr>
           <a:lstStyle/>
           <a:p>
-            <a:pPr algn="l" indent="0" marL="0">
-              <a:buNone/>
-            </a:pPr>
-            <a:r>
-              <a:rPr lang="en-US" sz="1800" spc="144" kern="0" dirty="0">
+            <a:pPr marL="0" indent="0" algn="l">
+              <a:buNone/>
+            </a:pPr>
+            <a:r>
+              <a:rPr lang="en-US" sz="1800" kern="0" spc="144" dirty="0">
                 <a:solidFill>
                   <a:srgbClr val="2A2A2A"/>
                 </a:solidFill>
@@ -9639,14 +9317,14 @@
           </a:bodyPr>
           <a:lstStyle/>
           <a:p>
-            <a:pPr algn="l" indent="0" marL="0">
+            <a:pPr marL="0" indent="0" algn="l">
               <a:lnSpc>
                 <a:spcPct val="92000"/>
               </a:lnSpc>
               <a:buNone/>
             </a:pPr>
             <a:r>
-              <a:rPr lang="en-US" sz="10500" spc="-315" kern="0" dirty="0">
+              <a:rPr lang="en-US" sz="10500" kern="0" spc="-315" dirty="0">
                 <a:solidFill>
                   <a:srgbClr val="0E0E0E"/>
                 </a:solidFill>
@@ -9656,14 +9334,8 @@
               </a:rPr>
               <a:t>One programming course of </a:t>
             </a:r>
-            <a:pPr algn="l" indent="0" marL="0">
-              <a:lnSpc>
-                <a:spcPct val="92000"/>
-              </a:lnSpc>
-              <a:buNone/>
-            </a:pPr>
-            <a:r>
-              <a:rPr lang="en-US" sz="10500" i="1" spc="-315" kern="0" dirty="0">
+            <a:r>
+              <a:rPr lang="en-US" sz="10500" i="1" kern="0" spc="-315" dirty="0">
                 <a:solidFill>
                   <a:srgbClr val="0E0E0E"/>
                 </a:solidFill>
@@ -9673,14 +9345,8 @@
               </a:rPr>
               <a:t>prior </a:t>
             </a:r>
-            <a:pPr algn="l" indent="0" marL="0">
-              <a:lnSpc>
-                <a:spcPct val="92000"/>
-              </a:lnSpc>
-              <a:buNone/>
-            </a:pPr>
-            <a:r>
-              <a:rPr lang="en-US" sz="10500" spc="-315" kern="0" dirty="0">
+            <a:r>
+              <a:rPr lang="en-US" sz="10500" kern="0" spc="-315" dirty="0">
                 <a:solidFill>
                   <a:srgbClr val="0E0E0E"/>
                 </a:solidFill>
@@ -9717,14 +9383,14 @@
           </a:bodyPr>
           <a:lstStyle/>
           <a:p>
-            <a:pPr algn="l" indent="0" marL="0">
+            <a:pPr marL="0" indent="0" algn="l">
               <a:lnSpc>
                 <a:spcPct val="110000"/>
               </a:lnSpc>
               <a:buNone/>
             </a:pPr>
             <a:r>
-              <a:rPr lang="en-US" sz="3150" i="1" spc="-31" kern="0" dirty="0">
+              <a:rPr lang="en-US" sz="3150" i="1" kern="0" spc="-31" dirty="0">
                 <a:solidFill>
                   <a:srgbClr val="0E0E0E"/>
                 </a:solidFill>
@@ -9761,7 +9427,7 @@
           </a:bodyPr>
           <a:lstStyle/>
           <a:p>
-            <a:pPr algn="l" indent="0" marL="0">
+            <a:pPr marL="0" indent="0" algn="l">
               <a:lnSpc>
                 <a:spcPct val="145000"/>
               </a:lnSpc>
@@ -9825,11 +9491,11 @@
           </a:bodyPr>
           <a:lstStyle/>
           <a:p>
-            <a:pPr algn="l" indent="0" marL="0">
-              <a:buNone/>
-            </a:pPr>
-            <a:r>
-              <a:rPr lang="en-US" sz="2100" b="1" i="1" spc="216" kern="0" dirty="0">
+            <a:pPr marL="0" indent="0" algn="l">
+              <a:buNone/>
+            </a:pPr>
+            <a:r>
+              <a:rPr lang="en-US" sz="2100" b="1" i="1" kern="0" spc="216" dirty="0">
                 <a:solidFill>
                   <a:srgbClr val="F2EFE8"/>
                 </a:solidFill>
@@ -9866,11 +9532,11 @@
           </a:bodyPr>
           <a:lstStyle/>
           <a:p>
-            <a:pPr algn="l" indent="0" marL="0">
-              <a:buNone/>
-            </a:pPr>
-            <a:r>
-              <a:rPr lang="en-US" sz="1800" b="1" spc="216" kern="0" dirty="0">
+            <a:pPr marL="0" indent="0" algn="l">
+              <a:buNone/>
+            </a:pPr>
+            <a:r>
+              <a:rPr lang="en-US" sz="1800" b="1" kern="0" spc="216" dirty="0">
                 <a:solidFill>
                   <a:srgbClr val="F2EFE8"/>
                 </a:solidFill>
@@ -9907,7 +9573,7 @@
           </a:bodyPr>
           <a:lstStyle/>
           <a:p>
-            <a:pPr algn="l" indent="0" marL="0">
+            <a:pPr marL="0" indent="0" algn="l">
               <a:lnSpc>
                 <a:spcPct val="145000"/>
               </a:lnSpc>
@@ -9924,12 +9590,6 @@
               </a:rPr>
               <a:t>The risk surface has shifted from the build to the understanding of what was built. </a:t>
             </a:r>
-            <a:pPr algn="l" indent="0" marL="0">
-              <a:lnSpc>
-                <a:spcPct val="145000"/>
-              </a:lnSpc>
-              <a:buNone/>
-            </a:pPr>
             <a:r>
               <a:rPr lang="en-US" sz="1650" b="1" dirty="0">
                 <a:solidFill>
@@ -9941,12 +9601,6 @@
               </a:rPr>
               <a:t>A peer using the same stack shipped equivalent functionality and was subsequently unable to reason about the codebase in a technical assessment. </a:t>
             </a:r>
-            <a:pPr algn="l" indent="0" marL="0">
-              <a:lnSpc>
-                <a:spcPct val="145000"/>
-              </a:lnSpc>
-              <a:buNone/>
-            </a:pPr>
             <a:r>
               <a:rPr lang="en-US" sz="1650" dirty="0">
                 <a:solidFill>
@@ -9985,7 +9639,7 @@
           </a:bodyPr>
           <a:lstStyle/>
           <a:p>
-            <a:pPr algn="l" indent="0" marL="0">
+            <a:pPr marL="0" indent="0" algn="l">
               <a:lnSpc>
                 <a:spcPct val="140000"/>
               </a:lnSpc>
@@ -10029,11 +9683,11 @@
           </a:bodyPr>
           <a:lstStyle/>
           <a:p>
-            <a:pPr algn="l" indent="0" marL="0">
-              <a:buNone/>
-            </a:pPr>
-            <a:r>
-              <a:rPr lang="en-US" sz="1800" spc="108" kern="0" dirty="0">
+            <a:pPr marL="0" indent="0" algn="l">
+              <a:buNone/>
+            </a:pPr>
+            <a:r>
+              <a:rPr lang="en-US" sz="1800" kern="0" spc="108" dirty="0">
                 <a:solidFill>
                   <a:srgbClr val="888076"/>
                 </a:solidFill>
@@ -10070,11 +9724,11 @@
           </a:bodyPr>
           <a:lstStyle/>
           <a:p>
-            <a:pPr algn="l" indent="0" marL="0">
-              <a:buNone/>
-            </a:pPr>
-            <a:r>
-              <a:rPr lang="en-US" sz="2700" i="1" spc="-54" kern="0" dirty="0">
+            <a:pPr marL="0" indent="0" algn="l">
+              <a:buNone/>
+            </a:pPr>
+            <a:r>
+              <a:rPr lang="en-US" sz="2700" i="1" kern="0" spc="-54" dirty="0">
                 <a:solidFill>
                   <a:srgbClr val="888076"/>
                 </a:solidFill>
@@ -10104,6 +9758,7 @@
         <a:solidFill>
           <a:srgbClr val="E8E3D6"/>
         </a:solidFill>
+        <a:effectLst/>
       </p:bgPr>
     </p:bg>
     <p:spTree>
@@ -10163,11 +9818,11 @@
           </a:bodyPr>
           <a:lstStyle/>
           <a:p>
-            <a:pPr algn="l" indent="0" marL="0">
-              <a:buNone/>
-            </a:pPr>
-            <a:r>
-              <a:rPr lang="en-US" sz="1800" spc="108" kern="0" dirty="0">
+            <a:pPr marL="0" indent="0" algn="l">
+              <a:buNone/>
+            </a:pPr>
+            <a:r>
+              <a:rPr lang="en-US" sz="1800" kern="0" spc="108" dirty="0">
                 <a:solidFill>
                   <a:srgbClr val="888076"/>
                 </a:solidFill>
@@ -10204,11 +9859,11 @@
           </a:bodyPr>
           <a:lstStyle/>
           <a:p>
-            <a:pPr algn="l" indent="0" marL="0">
-              <a:buNone/>
-            </a:pPr>
-            <a:r>
-              <a:rPr lang="en-US" sz="1800" spc="108" kern="0" dirty="0">
+            <a:pPr marL="0" indent="0" algn="l">
+              <a:buNone/>
+            </a:pPr>
+            <a:r>
+              <a:rPr lang="en-US" sz="1800" kern="0" spc="108" dirty="0">
                 <a:solidFill>
                   <a:srgbClr val="888076"/>
                 </a:solidFill>
@@ -10265,11 +9920,11 @@
           </a:bodyPr>
           <a:lstStyle/>
           <a:p>
-            <a:pPr algn="l" indent="0" marL="0">
-              <a:buNone/>
-            </a:pPr>
-            <a:r>
-              <a:rPr lang="en-US" sz="1800" spc="144" kern="0" dirty="0">
+            <a:pPr marL="0" indent="0" algn="l">
+              <a:buNone/>
+            </a:pPr>
+            <a:r>
+              <a:rPr lang="en-US" sz="1800" kern="0" spc="144" dirty="0">
                 <a:solidFill>
                   <a:srgbClr val="FF5B1F"/>
                 </a:solidFill>
@@ -10306,11 +9961,11 @@
           </a:bodyPr>
           <a:lstStyle/>
           <a:p>
-            <a:pPr algn="l" indent="0" marL="0">
-              <a:buNone/>
-            </a:pPr>
-            <a:r>
-              <a:rPr lang="en-US" sz="1800" spc="144" kern="0" dirty="0">
+            <a:pPr marL="0" indent="0" algn="l">
+              <a:buNone/>
+            </a:pPr>
+            <a:r>
+              <a:rPr lang="en-US" sz="1800" kern="0" spc="144" dirty="0">
                 <a:solidFill>
                   <a:srgbClr val="2A2A2A"/>
                 </a:solidFill>
@@ -10347,14 +10002,14 @@
           </a:bodyPr>
           <a:lstStyle/>
           <a:p>
-            <a:pPr algn="l" indent="0" marL="0">
+            <a:pPr marL="0" indent="0" algn="l">
               <a:lnSpc>
                 <a:spcPct val="96000"/>
               </a:lnSpc>
               <a:buNone/>
             </a:pPr>
             <a:r>
-              <a:rPr lang="en-US" sz="7200" spc="-180" kern="0" dirty="0">
+              <a:rPr lang="en-US" sz="7200" kern="0" spc="-180" dirty="0">
                 <a:solidFill>
                   <a:srgbClr val="0E0E0E"/>
                 </a:solidFill>
@@ -10364,14 +10019,8 @@
               </a:rPr>
               <a:t>A first shipped product. </a:t>
             </a:r>
-            <a:pPr algn="l" indent="0" marL="0">
-              <a:lnSpc>
-                <a:spcPct val="96000"/>
-              </a:lnSpc>
-              <a:buNone/>
-            </a:pPr>
-            <a:r>
-              <a:rPr lang="en-US" sz="7200" i="1" spc="-180" kern="0" dirty="0">
+            <a:r>
+              <a:rPr lang="en-US" sz="7200" i="1" kern="0" spc="-180" dirty="0">
                 <a:solidFill>
                   <a:srgbClr val="0E0E0E"/>
                 </a:solidFill>
@@ -10433,11 +10082,11 @@
           </a:bodyPr>
           <a:lstStyle/>
           <a:p>
-            <a:pPr algn="l" indent="0" marL="0">
-              <a:buNone/>
-            </a:pPr>
-            <a:r>
-              <a:rPr lang="en-US" sz="1800" spc="144" kern="0" dirty="0">
+            <a:pPr marL="0" indent="0" algn="l">
+              <a:buNone/>
+            </a:pPr>
+            <a:r>
+              <a:rPr lang="en-US" sz="1800" kern="0" spc="144" dirty="0">
                 <a:solidFill>
                   <a:srgbClr val="888076"/>
                 </a:solidFill>
@@ -10474,14 +10123,14 @@
           </a:bodyPr>
           <a:lstStyle/>
           <a:p>
-            <a:pPr algn="l" indent="0" marL="0">
+            <a:pPr marL="0" indent="0" algn="l">
               <a:lnSpc>
                 <a:spcPct val="95000"/>
               </a:lnSpc>
               <a:buNone/>
             </a:pPr>
             <a:r>
-              <a:rPr lang="en-US" sz="3300" spc="-66" kern="0" dirty="0">
+              <a:rPr lang="en-US" sz="3300" kern="0" spc="-66" dirty="0">
                 <a:solidFill>
                   <a:srgbClr val="0E0E0E"/>
                 </a:solidFill>
@@ -10518,7 +10167,7 @@
           </a:bodyPr>
           <a:lstStyle/>
           <a:p>
-            <a:pPr algn="l" indent="0" marL="0">
+            <a:pPr marL="0" indent="0" algn="l">
               <a:lnSpc>
                 <a:spcPct val="140000"/>
               </a:lnSpc>
@@ -10587,11 +10236,11 @@
           </a:bodyPr>
           <a:lstStyle/>
           <a:p>
-            <a:pPr algn="l" indent="0" marL="0">
-              <a:buNone/>
-            </a:pPr>
-            <a:r>
-              <a:rPr lang="en-US" sz="1800" b="1" spc="144" kern="0" dirty="0">
+            <a:pPr marL="0" indent="0" algn="l">
+              <a:buNone/>
+            </a:pPr>
+            <a:r>
+              <a:rPr lang="en-US" sz="1800" b="1" kern="0" spc="144" dirty="0">
                 <a:solidFill>
                   <a:srgbClr val="0E0E0E"/>
                 </a:solidFill>
@@ -10628,14 +10277,14 @@
           </a:bodyPr>
           <a:lstStyle/>
           <a:p>
-            <a:pPr algn="l" indent="0" marL="0">
+            <a:pPr marL="0" indent="0" algn="l">
               <a:lnSpc>
                 <a:spcPct val="95000"/>
               </a:lnSpc>
               <a:buNone/>
             </a:pPr>
             <a:r>
-              <a:rPr lang="en-US" sz="3300" spc="-66" kern="0" dirty="0">
+              <a:rPr lang="en-US" sz="3300" kern="0" spc="-66" dirty="0">
                 <a:solidFill>
                   <a:srgbClr val="0E0E0E"/>
                 </a:solidFill>
@@ -10672,7 +10321,7 @@
           </a:bodyPr>
           <a:lstStyle/>
           <a:p>
-            <a:pPr algn="l" indent="0" marL="0">
+            <a:pPr marL="0" indent="0" algn="l">
               <a:lnSpc>
                 <a:spcPct val="140000"/>
               </a:lnSpc>
@@ -10689,12 +10338,6 @@
               </a:rPr>
               <a:t>Verify institutional email at </a:t>
             </a:r>
-            <a:pPr algn="l" indent="0" marL="0">
-              <a:lnSpc>
-                <a:spcPct val="140000"/>
-              </a:lnSpc>
-              <a:buNone/>
-            </a:pPr>
             <a:r>
               <a:rPr lang="en-US" sz="1800" b="1" dirty="0">
                 <a:solidFill>
@@ -10706,12 +10349,6 @@
               </a:rPr>
               <a:t>education.github.com </a:t>
             </a:r>
-            <a:pPr algn="l" indent="0" marL="0">
-              <a:lnSpc>
-                <a:spcPct val="140000"/>
-              </a:lnSpc>
-              <a:buNone/>
-            </a:pPr>
             <a:r>
               <a:rPr lang="en-US" sz="1800" dirty="0">
                 <a:solidFill>
@@ -10723,12 +10360,6 @@
               </a:rPr>
               <a:t>. Professional-grade code completion. </a:t>
             </a:r>
-            <a:pPr algn="l" indent="0" marL="0">
-              <a:lnSpc>
-                <a:spcPct val="140000"/>
-              </a:lnSpc>
-              <a:buNone/>
-            </a:pPr>
             <a:r>
               <a:rPr lang="en-US" sz="1800" i="1" dirty="0">
                 <a:solidFill>
@@ -10792,11 +10423,11 @@
           </a:bodyPr>
           <a:lstStyle/>
           <a:p>
-            <a:pPr algn="l" indent="0" marL="0">
-              <a:buNone/>
-            </a:pPr>
-            <a:r>
-              <a:rPr lang="en-US" sz="1800" spc="144" kern="0" dirty="0">
+            <a:pPr marL="0" indent="0" algn="l">
+              <a:buNone/>
+            </a:pPr>
+            <a:r>
+              <a:rPr lang="en-US" sz="1800" kern="0" spc="144" dirty="0">
                 <a:solidFill>
                   <a:srgbClr val="888076"/>
                 </a:solidFill>
@@ -10833,14 +10464,14 @@
           </a:bodyPr>
           <a:lstStyle/>
           <a:p>
-            <a:pPr algn="l" indent="0" marL="0">
+            <a:pPr marL="0" indent="0" algn="l">
               <a:lnSpc>
                 <a:spcPct val="95000"/>
               </a:lnSpc>
               <a:buNone/>
             </a:pPr>
             <a:r>
-              <a:rPr lang="en-US" sz="3300" spc="-66" kern="0" dirty="0">
+              <a:rPr lang="en-US" sz="3300" kern="0" spc="-66" dirty="0">
                 <a:solidFill>
                   <a:srgbClr val="0E0E0E"/>
                 </a:solidFill>
@@ -10877,7 +10508,7 @@
           </a:bodyPr>
           <a:lstStyle/>
           <a:p>
-            <a:pPr algn="l" indent="0" marL="0">
+            <a:pPr marL="0" indent="0" algn="l">
               <a:lnSpc>
                 <a:spcPct val="140000"/>
               </a:lnSpc>
@@ -10946,11 +10577,11 @@
           </a:bodyPr>
           <a:lstStyle/>
           <a:p>
-            <a:pPr algn="l" indent="0" marL="0">
-              <a:buNone/>
-            </a:pPr>
-            <a:r>
-              <a:rPr lang="en-US" sz="1800" spc="144" kern="0" dirty="0">
+            <a:pPr marL="0" indent="0" algn="l">
+              <a:buNone/>
+            </a:pPr>
+            <a:r>
+              <a:rPr lang="en-US" sz="1800" kern="0" spc="144" dirty="0">
                 <a:solidFill>
                   <a:srgbClr val="888076"/>
                 </a:solidFill>
@@ -10987,14 +10618,14 @@
           </a:bodyPr>
           <a:lstStyle/>
           <a:p>
-            <a:pPr algn="l" indent="0" marL="0">
+            <a:pPr marL="0" indent="0" algn="l">
               <a:lnSpc>
                 <a:spcPct val="95000"/>
               </a:lnSpc>
               <a:buNone/>
             </a:pPr>
             <a:r>
-              <a:rPr lang="en-US" sz="3300" spc="-66" kern="0" dirty="0">
+              <a:rPr lang="en-US" sz="3300" kern="0" spc="-66" dirty="0">
                 <a:solidFill>
                   <a:srgbClr val="0E0E0E"/>
                 </a:solidFill>
@@ -11031,7 +10662,7 @@
           </a:bodyPr>
           <a:lstStyle/>
           <a:p>
-            <a:pPr algn="l" indent="0" marL="0">
+            <a:pPr marL="0" indent="0" algn="l">
               <a:lnSpc>
                 <a:spcPct val="140000"/>
               </a:lnSpc>
@@ -11100,11 +10731,11 @@
           </a:bodyPr>
           <a:lstStyle/>
           <a:p>
-            <a:pPr algn="l" indent="0" marL="0">
-              <a:buNone/>
-            </a:pPr>
-            <a:r>
-              <a:rPr lang="en-US" sz="1800" spc="144" kern="0" dirty="0">
+            <a:pPr marL="0" indent="0" algn="l">
+              <a:buNone/>
+            </a:pPr>
+            <a:r>
+              <a:rPr lang="en-US" sz="1800" kern="0" spc="144" dirty="0">
                 <a:solidFill>
                   <a:srgbClr val="888076"/>
                 </a:solidFill>
@@ -11141,14 +10772,14 @@
           </a:bodyPr>
           <a:lstStyle/>
           <a:p>
-            <a:pPr algn="l" indent="0" marL="0">
+            <a:pPr marL="0" indent="0" algn="l">
               <a:lnSpc>
                 <a:spcPct val="95000"/>
               </a:lnSpc>
               <a:buNone/>
             </a:pPr>
             <a:r>
-              <a:rPr lang="en-US" sz="3300" spc="-66" kern="0" dirty="0">
+              <a:rPr lang="en-US" sz="3300" kern="0" spc="-66" dirty="0">
                 <a:solidFill>
                   <a:srgbClr val="0E0E0E"/>
                 </a:solidFill>
@@ -11185,7 +10816,7 @@
           </a:bodyPr>
           <a:lstStyle/>
           <a:p>
-            <a:pPr algn="l" indent="0" marL="0">
+            <a:pPr marL="0" indent="0" algn="l">
               <a:lnSpc>
                 <a:spcPct val="140000"/>
               </a:lnSpc>
@@ -11254,11 +10885,11 @@
           </a:bodyPr>
           <a:lstStyle/>
           <a:p>
-            <a:pPr algn="l" indent="0" marL="0">
-              <a:buNone/>
-            </a:pPr>
-            <a:r>
-              <a:rPr lang="en-US" sz="1800" spc="144" kern="0" dirty="0">
+            <a:pPr marL="0" indent="0" algn="l">
+              <a:buNone/>
+            </a:pPr>
+            <a:r>
+              <a:rPr lang="en-US" sz="1800" kern="0" spc="144" dirty="0">
                 <a:solidFill>
                   <a:srgbClr val="FF5B1F"/>
                 </a:solidFill>
@@ -11295,14 +10926,14 @@
           </a:bodyPr>
           <a:lstStyle/>
           <a:p>
-            <a:pPr algn="l" indent="0" marL="0">
+            <a:pPr marL="0" indent="0" algn="l">
               <a:lnSpc>
                 <a:spcPct val="105000"/>
               </a:lnSpc>
               <a:buNone/>
             </a:pPr>
             <a:r>
-              <a:rPr lang="en-US" sz="2250" spc="-45" kern="0" dirty="0">
+              <a:rPr lang="en-US" sz="2250" kern="0" spc="-45" dirty="0">
                 <a:solidFill>
                   <a:srgbClr val="F2EFE8"/>
                 </a:solidFill>
@@ -11312,14 +10943,8 @@
               </a:rPr>
               <a:t>Identify a system you require </a:t>
             </a:r>
-            <a:pPr algn="l" indent="0" marL="0">
-              <a:lnSpc>
-                <a:spcPct val="105000"/>
-              </a:lnSpc>
-              <a:buNone/>
-            </a:pPr>
-            <a:r>
-              <a:rPr lang="en-US" sz="2250" i="1" spc="-45" kern="0" dirty="0">
+            <a:r>
+              <a:rPr lang="en-US" sz="2250" i="1" kern="0" spc="-45" dirty="0">
                 <a:solidFill>
                   <a:srgbClr val="D6FF3D"/>
                 </a:solidFill>
@@ -11356,7 +10981,7 @@
           </a:bodyPr>
           <a:lstStyle/>
           <a:p>
-            <a:pPr algn="l" indent="0" marL="0">
+            <a:pPr marL="0" indent="0" algn="l">
               <a:lnSpc>
                 <a:spcPct val="140000"/>
               </a:lnSpc>
@@ -11375,12 +11000,6 @@
               </a:rPr>
               <a:t>Build it. Deploy it. </a:t>
             </a:r>
-            <a:pPr algn="l" indent="0" marL="0">
-              <a:lnSpc>
-                <a:spcPct val="140000"/>
-              </a:lnSpc>
-              <a:buNone/>
-            </a:pPr>
             <a:r>
               <a:rPr lang="en-US" sz="1800" b="1" dirty="0">
                 <a:solidFill>
@@ -11421,11 +11040,11 @@
           </a:bodyPr>
           <a:lstStyle/>
           <a:p>
-            <a:pPr algn="l" indent="0" marL="0">
-              <a:buNone/>
-            </a:pPr>
-            <a:r>
-              <a:rPr lang="en-US" sz="1800" spc="108" kern="0" dirty="0">
+            <a:pPr marL="0" indent="0" algn="l">
+              <a:buNone/>
+            </a:pPr>
+            <a:r>
+              <a:rPr lang="en-US" sz="1800" kern="0" spc="108" dirty="0">
                 <a:solidFill>
                   <a:srgbClr val="888076"/>
                 </a:solidFill>
@@ -11462,11 +11081,11 @@
           </a:bodyPr>
           <a:lstStyle/>
           <a:p>
-            <a:pPr algn="l" indent="0" marL="0">
-              <a:buNone/>
-            </a:pPr>
-            <a:r>
-              <a:rPr lang="en-US" sz="2700" i="1" spc="-54" kern="0" dirty="0">
+            <a:pPr marL="0" indent="0" algn="l">
+              <a:buNone/>
+            </a:pPr>
+            <a:r>
+              <a:rPr lang="en-US" sz="2700" i="1" kern="0" spc="-54" dirty="0">
                 <a:solidFill>
                   <a:srgbClr val="888076"/>
                 </a:solidFill>
@@ -11496,6 +11115,7 @@
         <a:solidFill>
           <a:srgbClr val="0E0E0E"/>
         </a:solidFill>
+        <a:effectLst/>
       </p:bgPr>
     </p:bg>
     <p:spTree>
@@ -11555,11 +11175,11 @@
           </a:bodyPr>
           <a:lstStyle/>
           <a:p>
-            <a:pPr algn="l" indent="0" marL="0">
-              <a:buNone/>
-            </a:pPr>
-            <a:r>
-              <a:rPr lang="en-US" sz="1800" spc="108" kern="0" dirty="0">
+            <a:pPr marL="0" indent="0" algn="l">
+              <a:buNone/>
+            </a:pPr>
+            <a:r>
+              <a:rPr lang="en-US" sz="1800" kern="0" spc="108" dirty="0">
                 <a:solidFill>
                   <a:srgbClr val="F2EFE8">
                     <a:alpha val="55000"/>
@@ -11598,11 +11218,11 @@
           </a:bodyPr>
           <a:lstStyle/>
           <a:p>
-            <a:pPr algn="l" indent="0" marL="0">
-              <a:buNone/>
-            </a:pPr>
-            <a:r>
-              <a:rPr lang="en-US" sz="1800" spc="108" kern="0" dirty="0">
+            <a:pPr marL="0" indent="0" algn="l">
+              <a:buNone/>
+            </a:pPr>
+            <a:r>
+              <a:rPr lang="en-US" sz="1800" kern="0" spc="108" dirty="0">
                 <a:solidFill>
                   <a:srgbClr val="F2EFE8">
                     <a:alpha val="55000"/>
@@ -11661,11 +11281,11 @@
           </a:bodyPr>
           <a:lstStyle/>
           <a:p>
-            <a:pPr algn="l" indent="0" marL="0">
-              <a:buNone/>
-            </a:pPr>
-            <a:r>
-              <a:rPr lang="en-US" sz="1800" spc="144" kern="0" dirty="0">
+            <a:pPr marL="0" indent="0" algn="l">
+              <a:buNone/>
+            </a:pPr>
+            <a:r>
+              <a:rPr lang="en-US" sz="1800" kern="0" spc="144" dirty="0">
                 <a:solidFill>
                   <a:srgbClr val="FF5B1F"/>
                 </a:solidFill>
@@ -11702,11 +11322,11 @@
           </a:bodyPr>
           <a:lstStyle/>
           <a:p>
-            <a:pPr algn="l" indent="0" marL="0">
-              <a:buNone/>
-            </a:pPr>
-            <a:r>
-              <a:rPr lang="en-US" sz="1800" spc="144" kern="0" dirty="0">
+            <a:pPr marL="0" indent="0" algn="l">
+              <a:buNone/>
+            </a:pPr>
+            <a:r>
+              <a:rPr lang="en-US" sz="1800" kern="0" spc="144" dirty="0">
                 <a:solidFill>
                   <a:srgbClr val="F2EFE8">
                     <a:alpha val="70000"/>
@@ -11745,14 +11365,14 @@
           </a:bodyPr>
           <a:lstStyle/>
           <a:p>
-            <a:pPr algn="l" indent="0" marL="0">
+            <a:pPr marL="0" indent="0" algn="l">
               <a:lnSpc>
                 <a:spcPct val="96000"/>
               </a:lnSpc>
               <a:buNone/>
             </a:pPr>
             <a:r>
-              <a:rPr lang="en-US" sz="7200" spc="-180" kern="0" dirty="0">
+              <a:rPr lang="en-US" sz="7200" kern="0" spc="-180" dirty="0">
                 <a:solidFill>
                   <a:srgbClr val="F2EFE8"/>
                 </a:solidFill>
@@ -11762,14 +11382,8 @@
               </a:rPr>
               <a:t>Request a diagnosis, </a:t>
             </a:r>
-            <a:pPr algn="l" indent="0" marL="0">
-              <a:lnSpc>
-                <a:spcPct val="96000"/>
-              </a:lnSpc>
-              <a:buNone/>
-            </a:pPr>
-            <a:r>
-              <a:rPr lang="en-US" sz="7200" i="1" spc="-180" kern="0" dirty="0">
+            <a:r>
+              <a:rPr lang="en-US" sz="7200" i="1" kern="0" spc="-180" dirty="0">
                 <a:solidFill>
                   <a:srgbClr val="D6FF3D"/>
                 </a:solidFill>
@@ -11806,11 +11420,11 @@
           </a:bodyPr>
           <a:lstStyle/>
           <a:p>
-            <a:pPr algn="l" indent="0" marL="0">
-              <a:buNone/>
-            </a:pPr>
-            <a:r>
-              <a:rPr lang="en-US" sz="1800" spc="180" kern="0" dirty="0">
+            <a:pPr marL="0" indent="0" algn="l">
+              <a:buNone/>
+            </a:pPr>
+            <a:r>
+              <a:rPr lang="en-US" sz="1800" kern="0" spc="180" dirty="0">
                 <a:solidFill>
                   <a:srgbClr val="FF7B7F"/>
                 </a:solidFill>
@@ -11889,7 +11503,7 @@
           </a:bodyPr>
           <a:lstStyle/>
           <a:p>
-            <a:pPr algn="l" indent="0" marL="0">
+            <a:pPr marL="0" indent="0" algn="l">
               <a:buNone/>
             </a:pPr>
             <a:r>
@@ -11932,7 +11546,7 @@
           </a:bodyPr>
           <a:lstStyle/>
           <a:p>
-            <a:pPr algn="l" indent="0" marL="0">
+            <a:pPr marL="0" indent="0" algn="l">
               <a:lnSpc>
                 <a:spcPct val="140000"/>
               </a:lnSpc>
@@ -11978,11 +11592,11 @@
           </a:bodyPr>
           <a:lstStyle/>
           <a:p>
-            <a:pPr algn="l" indent="0" marL="0">
-              <a:buNone/>
-            </a:pPr>
-            <a:r>
-              <a:rPr lang="en-US" sz="1800" spc="180" kern="0" dirty="0">
+            <a:pPr marL="0" indent="0" algn="l">
+              <a:buNone/>
+            </a:pPr>
+            <a:r>
+              <a:rPr lang="en-US" sz="1800" kern="0" spc="180" dirty="0">
                 <a:solidFill>
                   <a:srgbClr val="FF5B1F"/>
                 </a:solidFill>
@@ -12059,7 +11673,7 @@
           </a:bodyPr>
           <a:lstStyle/>
           <a:p>
-            <a:pPr algn="l" indent="0" marL="0">
+            <a:pPr marL="0" indent="0" algn="l">
               <a:lnSpc>
                 <a:spcPct val="128000"/>
               </a:lnSpc>
@@ -12079,7 +11693,7 @@
             <a:endParaRPr lang="en-US" sz="1350" dirty="0"/>
           </a:p>
           <a:p>
-            <a:pPr algn="l" indent="0" marL="0">
+            <a:pPr marL="0" indent="0" algn="l">
               <a:lnSpc>
                 <a:spcPct val="128000"/>
               </a:lnSpc>
@@ -12099,7 +11713,7 @@
             <a:endParaRPr lang="en-US" sz="1350" dirty="0"/>
           </a:p>
           <a:p>
-            <a:pPr algn="l" indent="0" marL="0">
+            <a:pPr marL="0" indent="0" algn="l">
               <a:lnSpc>
                 <a:spcPct val="128000"/>
               </a:lnSpc>
@@ -12119,7 +11733,7 @@
             <a:endParaRPr lang="en-US" sz="1350" dirty="0"/>
           </a:p>
           <a:p>
-            <a:pPr algn="l" indent="0" marL="0">
+            <a:pPr marL="0" indent="0" algn="l">
               <a:lnSpc>
                 <a:spcPct val="128000"/>
               </a:lnSpc>
@@ -12128,7 +11742,7 @@
             <a:endParaRPr lang="en-US" sz="1350" dirty="0"/>
           </a:p>
           <a:p>
-            <a:pPr algn="l" indent="0" marL="0">
+            <a:pPr marL="0" indent="0" algn="l">
               <a:lnSpc>
                 <a:spcPct val="128000"/>
               </a:lnSpc>
@@ -12148,7 +11762,7 @@
             <a:endParaRPr lang="en-US" sz="1350" dirty="0"/>
           </a:p>
           <a:p>
-            <a:pPr algn="l" indent="0" marL="0">
+            <a:pPr marL="0" indent="0" algn="l">
               <a:lnSpc>
                 <a:spcPct val="128000"/>
               </a:lnSpc>
@@ -12168,7 +11782,7 @@
             <a:endParaRPr lang="en-US" sz="1350" dirty="0"/>
           </a:p>
           <a:p>
-            <a:pPr algn="l" indent="0" marL="0">
+            <a:pPr marL="0" indent="0" algn="l">
               <a:lnSpc>
                 <a:spcPct val="128000"/>
               </a:lnSpc>
@@ -12188,7 +11802,7 @@
             <a:endParaRPr lang="en-US" sz="1350" dirty="0"/>
           </a:p>
           <a:p>
-            <a:pPr algn="l" indent="0" marL="0">
+            <a:pPr marL="0" indent="0" algn="l">
               <a:lnSpc>
                 <a:spcPct val="128000"/>
               </a:lnSpc>
@@ -12208,7 +11822,7 @@
             <a:endParaRPr lang="en-US" sz="1350" dirty="0"/>
           </a:p>
           <a:p>
-            <a:pPr algn="l" indent="0" marL="0">
+            <a:pPr marL="0" indent="0" algn="l">
               <a:lnSpc>
                 <a:spcPct val="128000"/>
               </a:lnSpc>
@@ -12228,7 +11842,7 @@
             <a:endParaRPr lang="en-US" sz="1350" dirty="0"/>
           </a:p>
           <a:p>
-            <a:pPr algn="l" indent="0" marL="0">
+            <a:pPr marL="0" indent="0" algn="l">
               <a:lnSpc>
                 <a:spcPct val="128000"/>
               </a:lnSpc>
@@ -12248,7 +11862,7 @@
             <a:endParaRPr lang="en-US" sz="1350" dirty="0"/>
           </a:p>
           <a:p>
-            <a:pPr algn="l" indent="0" marL="0">
+            <a:pPr marL="0" indent="0" algn="l">
               <a:lnSpc>
                 <a:spcPct val="128000"/>
               </a:lnSpc>
@@ -12268,7 +11882,7 @@
             <a:endParaRPr lang="en-US" sz="1350" dirty="0"/>
           </a:p>
           <a:p>
-            <a:pPr algn="l" indent="0" marL="0">
+            <a:pPr marL="0" indent="0" algn="l">
               <a:lnSpc>
                 <a:spcPct val="128000"/>
               </a:lnSpc>
@@ -12288,7 +11902,7 @@
             <a:endParaRPr lang="en-US" sz="1350" dirty="0"/>
           </a:p>
           <a:p>
-            <a:pPr algn="l" indent="0" marL="0">
+            <a:pPr marL="0" indent="0" algn="l">
               <a:lnSpc>
                 <a:spcPct val="128000"/>
               </a:lnSpc>
@@ -12308,7 +11922,7 @@
             <a:endParaRPr lang="en-US" sz="1350" dirty="0"/>
           </a:p>
           <a:p>
-            <a:pPr algn="l" indent="0" marL="0">
+            <a:pPr marL="0" indent="0" algn="l">
               <a:lnSpc>
                 <a:spcPct val="128000"/>
               </a:lnSpc>
@@ -12328,7 +11942,7 @@
             <a:endParaRPr lang="en-US" sz="1350" dirty="0"/>
           </a:p>
           <a:p>
-            <a:pPr algn="l" indent="0" marL="0">
+            <a:pPr marL="0" indent="0" algn="l">
               <a:lnSpc>
                 <a:spcPct val="128000"/>
               </a:lnSpc>
@@ -12337,7 +11951,7 @@
             <a:endParaRPr lang="en-US" sz="1350" dirty="0"/>
           </a:p>
           <a:p>
-            <a:pPr algn="l" indent="0" marL="0">
+            <a:pPr marL="0" indent="0" algn="l">
               <a:lnSpc>
                 <a:spcPct val="128000"/>
               </a:lnSpc>
@@ -12357,7 +11971,7 @@
             <a:endParaRPr lang="en-US" sz="1350" dirty="0"/>
           </a:p>
           <a:p>
-            <a:pPr algn="l" indent="0" marL="0">
+            <a:pPr marL="0" indent="0" algn="l">
               <a:lnSpc>
                 <a:spcPct val="128000"/>
               </a:lnSpc>
@@ -12377,7 +11991,7 @@
             <a:endParaRPr lang="en-US" sz="1350" dirty="0"/>
           </a:p>
           <a:p>
-            <a:pPr algn="l" indent="0" marL="0">
+            <a:pPr marL="0" indent="0" algn="l">
               <a:lnSpc>
                 <a:spcPct val="128000"/>
               </a:lnSpc>
@@ -12386,7 +12000,7 @@
             <a:endParaRPr lang="en-US" sz="1350" dirty="0"/>
           </a:p>
           <a:p>
-            <a:pPr algn="l" indent="0" marL="0">
+            <a:pPr marL="0" indent="0" algn="l">
               <a:lnSpc>
                 <a:spcPct val="128000"/>
               </a:lnSpc>
@@ -12430,14 +12044,14 @@
           </a:bodyPr>
           <a:lstStyle/>
           <a:p>
-            <a:pPr algn="l" indent="0" marL="0">
+            <a:pPr marL="0" indent="0" algn="l">
               <a:lnSpc>
                 <a:spcPct val="110000"/>
               </a:lnSpc>
               <a:buNone/>
             </a:pPr>
             <a:r>
-              <a:rPr lang="en-US" sz="2250" i="1" spc="-22" kern="0" dirty="0">
+              <a:rPr lang="en-US" sz="2250" i="1" kern="0" spc="-22" dirty="0">
                 <a:solidFill>
                   <a:srgbClr val="F2EFE8"/>
                 </a:solidFill>
@@ -12447,14 +12061,8 @@
               </a:rPr>
               <a:t>The first prompt produces </a:t>
             </a:r>
-            <a:pPr algn="l" indent="0" marL="0">
-              <a:lnSpc>
-                <a:spcPct val="110000"/>
-              </a:lnSpc>
-              <a:buNone/>
-            </a:pPr>
-            <a:r>
-              <a:rPr lang="en-US" sz="2250" i="1" spc="-22" kern="0" dirty="0">
+            <a:r>
+              <a:rPr lang="en-US" sz="2250" i="1" kern="0" spc="-22" dirty="0">
                 <a:solidFill>
                   <a:srgbClr val="FF3355"/>
                 </a:solidFill>
@@ -12491,14 +12099,14 @@
           </a:bodyPr>
           <a:lstStyle/>
           <a:p>
-            <a:pPr algn="l" indent="0" marL="0">
+            <a:pPr marL="0" indent="0" algn="l">
               <a:lnSpc>
                 <a:spcPct val="110000"/>
               </a:lnSpc>
               <a:buNone/>
             </a:pPr>
             <a:r>
-              <a:rPr lang="en-US" sz="2250" i="1" spc="-22" kern="0" dirty="0">
+              <a:rPr lang="en-US" sz="2250" i="1" kern="0" spc="-22" dirty="0">
                 <a:solidFill>
                   <a:srgbClr val="D6FF3D"/>
                 </a:solidFill>
@@ -12557,7 +12165,7 @@
           </a:bodyPr>
           <a:lstStyle/>
           <a:p>
-            <a:pPr algn="l" indent="0" marL="0">
+            <a:pPr marL="0" indent="0" algn="l">
               <a:lnSpc>
                 <a:spcPct val="145000"/>
               </a:lnSpc>
@@ -12576,12 +12184,6 @@
               </a:rPr>
               <a:t>Cumulative effect over a semester is observable in performance assessments. </a:t>
             </a:r>
-            <a:pPr algn="l" indent="0" marL="0">
-              <a:lnSpc>
-                <a:spcPct val="145000"/>
-              </a:lnSpc>
-              <a:buNone/>
-            </a:pPr>
             <a:r>
               <a:rPr lang="en-US" sz="1650" b="1" dirty="0">
                 <a:solidFill>
@@ -12620,7 +12222,7 @@
           </a:bodyPr>
           <a:lstStyle/>
           <a:p>
-            <a:pPr algn="l" indent="0" marL="0">
+            <a:pPr marL="0" indent="0" algn="l">
               <a:lnSpc>
                 <a:spcPct val="140000"/>
               </a:lnSpc>
@@ -12666,11 +12268,11 @@
           </a:bodyPr>
           <a:lstStyle/>
           <a:p>
-            <a:pPr algn="l" indent="0" marL="0">
-              <a:buNone/>
-            </a:pPr>
-            <a:r>
-              <a:rPr lang="en-US" sz="1800" spc="108" kern="0" dirty="0">
+            <a:pPr marL="0" indent="0" algn="l">
+              <a:buNone/>
+            </a:pPr>
+            <a:r>
+              <a:rPr lang="en-US" sz="1800" kern="0" spc="108" dirty="0">
                 <a:solidFill>
                   <a:srgbClr val="F2EFE8">
                     <a:alpha val="50000"/>
@@ -12709,11 +12311,11 @@
           </a:bodyPr>
           <a:lstStyle/>
           <a:p>
-            <a:pPr algn="l" indent="0" marL="0">
-              <a:buNone/>
-            </a:pPr>
-            <a:r>
-              <a:rPr lang="en-US" sz="2700" i="1" spc="-54" kern="0" dirty="0">
+            <a:pPr marL="0" indent="0" algn="l">
+              <a:buNone/>
+            </a:pPr>
+            <a:r>
+              <a:rPr lang="en-US" sz="2700" i="1" kern="0" spc="-54" dirty="0">
                 <a:solidFill>
                   <a:srgbClr val="F2EFE8">
                     <a:alpha val="50000"/>
@@ -12745,6 +12347,7 @@
         <a:solidFill>
           <a:srgbClr val="F2EFE8"/>
         </a:solidFill>
+        <a:effectLst/>
       </p:bgPr>
     </p:bg>
     <p:spTree>
@@ -12804,11 +12407,11 @@
           </a:bodyPr>
           <a:lstStyle/>
           <a:p>
-            <a:pPr algn="l" indent="0" marL="0">
-              <a:buNone/>
-            </a:pPr>
-            <a:r>
-              <a:rPr lang="en-US" sz="1800" spc="108" kern="0" dirty="0">
+            <a:pPr marL="0" indent="0" algn="l">
+              <a:buNone/>
+            </a:pPr>
+            <a:r>
+              <a:rPr lang="en-US" sz="1800" kern="0" spc="108" dirty="0">
                 <a:solidFill>
                   <a:srgbClr val="888076"/>
                 </a:solidFill>
@@ -12845,11 +12448,11 @@
           </a:bodyPr>
           <a:lstStyle/>
           <a:p>
-            <a:pPr algn="l" indent="0" marL="0">
-              <a:buNone/>
-            </a:pPr>
-            <a:r>
-              <a:rPr lang="en-US" sz="1800" spc="108" kern="0" dirty="0">
+            <a:pPr marL="0" indent="0" algn="l">
+              <a:buNone/>
+            </a:pPr>
+            <a:r>
+              <a:rPr lang="en-US" sz="1800" kern="0" spc="108" dirty="0">
                 <a:solidFill>
                   <a:srgbClr val="888076"/>
                 </a:solidFill>
@@ -12906,11 +12509,11 @@
           </a:bodyPr>
           <a:lstStyle/>
           <a:p>
-            <a:pPr algn="l" indent="0" marL="0">
-              <a:buNone/>
-            </a:pPr>
-            <a:r>
-              <a:rPr lang="en-US" sz="1800" spc="144" kern="0" dirty="0">
+            <a:pPr marL="0" indent="0" algn="l">
+              <a:buNone/>
+            </a:pPr>
+            <a:r>
+              <a:rPr lang="en-US" sz="1800" kern="0" spc="144" dirty="0">
                 <a:solidFill>
                   <a:srgbClr val="FF5B1F"/>
                 </a:solidFill>
@@ -12947,11 +12550,11 @@
           </a:bodyPr>
           <a:lstStyle/>
           <a:p>
-            <a:pPr algn="l" indent="0" marL="0">
-              <a:buNone/>
-            </a:pPr>
-            <a:r>
-              <a:rPr lang="en-US" sz="1800" spc="144" kern="0" dirty="0">
+            <a:pPr marL="0" indent="0" algn="l">
+              <a:buNone/>
+            </a:pPr>
+            <a:r>
+              <a:rPr lang="en-US" sz="1800" kern="0" spc="144" dirty="0">
                 <a:solidFill>
                   <a:srgbClr val="2A2A2A"/>
                 </a:solidFill>
@@ -12988,14 +12591,14 @@
           </a:bodyPr>
           <a:lstStyle/>
           <a:p>
-            <a:pPr algn="l" indent="0" marL="0">
+            <a:pPr marL="0" indent="0" algn="l">
               <a:lnSpc>
                 <a:spcPct val="92000"/>
               </a:lnSpc>
               <a:buNone/>
             </a:pPr>
             <a:r>
-              <a:rPr lang="en-US" sz="10500" spc="-315" kern="0" dirty="0">
+              <a:rPr lang="en-US" sz="10500" kern="0" spc="-315" dirty="0">
                 <a:solidFill>
                   <a:srgbClr val="0E0E0E"/>
                 </a:solidFill>
@@ -13005,14 +12608,8 @@
               </a:rPr>
               <a:t>When a project shows </a:t>
             </a:r>
-            <a:pPr algn="l" indent="0" marL="0">
-              <a:lnSpc>
-                <a:spcPct val="92000"/>
-              </a:lnSpc>
-              <a:buNone/>
-            </a:pPr>
-            <a:r>
-              <a:rPr lang="en-US" sz="10500" i="1" spc="-315" kern="0" dirty="0">
+            <a:r>
+              <a:rPr lang="en-US" sz="10500" i="1" kern="0" spc="-315" dirty="0">
                 <a:solidFill>
                   <a:srgbClr val="0E0E0E"/>
                 </a:solidFill>
@@ -13049,14 +12646,14 @@
           </a:bodyPr>
           <a:lstStyle/>
           <a:p>
-            <a:pPr algn="l" indent="0" marL="0">
+            <a:pPr marL="0" indent="0" algn="l">
               <a:lnSpc>
                 <a:spcPct val="110000"/>
               </a:lnSpc>
               <a:buNone/>
             </a:pPr>
             <a:r>
-              <a:rPr lang="en-US" sz="2850" i="1" spc="-29" kern="0" dirty="0">
+              <a:rPr lang="en-US" sz="2850" i="1" kern="0" spc="-29" dirty="0">
                 <a:solidFill>
                   <a:srgbClr val="0E0E0E"/>
                 </a:solidFill>
@@ -13113,11 +12710,11 @@
           </a:bodyPr>
           <a:lstStyle/>
           <a:p>
-            <a:pPr algn="l" indent="0" marL="0">
-              <a:buNone/>
-            </a:pPr>
-            <a:r>
-              <a:rPr lang="en-US" sz="2100" b="1" i="1" spc="216" kern="0" dirty="0">
+            <a:pPr marL="0" indent="0" algn="l">
+              <a:buNone/>
+            </a:pPr>
+            <a:r>
+              <a:rPr lang="en-US" sz="2100" b="1" i="1" kern="0" spc="216" dirty="0">
                 <a:solidFill>
                   <a:srgbClr val="F2EFE8"/>
                 </a:solidFill>
@@ -13154,11 +12751,11 @@
           </a:bodyPr>
           <a:lstStyle/>
           <a:p>
-            <a:pPr algn="l" indent="0" marL="0">
-              <a:buNone/>
-            </a:pPr>
-            <a:r>
-              <a:rPr lang="en-US" sz="1800" b="1" spc="216" kern="0" dirty="0">
+            <a:pPr marL="0" indent="0" algn="l">
+              <a:buNone/>
+            </a:pPr>
+            <a:r>
+              <a:rPr lang="en-US" sz="1800" b="1" kern="0" spc="216" dirty="0">
                 <a:solidFill>
                   <a:srgbClr val="F2EFE8"/>
                 </a:solidFill>
@@ -13195,7 +12792,7 @@
           </a:bodyPr>
           <a:lstStyle/>
           <a:p>
-            <a:pPr algn="l" indent="0" marL="0">
+            <a:pPr marL="0" indent="0" algn="l">
               <a:lnSpc>
                 <a:spcPct val="145000"/>
               </a:lnSpc>
@@ -13239,11 +12836,11 @@
           </a:bodyPr>
           <a:lstStyle/>
           <a:p>
-            <a:pPr algn="l" indent="0" marL="0">
-              <a:buNone/>
-            </a:pPr>
-            <a:r>
-              <a:rPr lang="en-US" sz="1800" spc="108" kern="0" dirty="0">
+            <a:pPr marL="0" indent="0" algn="l">
+              <a:buNone/>
+            </a:pPr>
+            <a:r>
+              <a:rPr lang="en-US" sz="1800" kern="0" spc="108" dirty="0">
                 <a:solidFill>
                   <a:srgbClr val="888076"/>
                 </a:solidFill>
@@ -13280,11 +12877,11 @@
           </a:bodyPr>
           <a:lstStyle/>
           <a:p>
-            <a:pPr algn="l" indent="0" marL="0">
-              <a:buNone/>
-            </a:pPr>
-            <a:r>
-              <a:rPr lang="en-US" sz="2700" i="1" spc="-54" kern="0" dirty="0">
+            <a:pPr marL="0" indent="0" algn="l">
+              <a:buNone/>
+            </a:pPr>
+            <a:r>
+              <a:rPr lang="en-US" sz="2700" i="1" kern="0" spc="-54" dirty="0">
                 <a:solidFill>
                   <a:srgbClr val="888076"/>
                 </a:solidFill>
@@ -13314,6 +12911,7 @@
         <a:solidFill>
           <a:srgbClr val="F2EFE8"/>
         </a:solidFill>
+        <a:effectLst/>
       </p:bgPr>
     </p:bg>
     <p:spTree>
@@ -13373,11 +12971,11 @@
           </a:bodyPr>
           <a:lstStyle/>
           <a:p>
-            <a:pPr algn="l" indent="0" marL="0">
-              <a:buNone/>
-            </a:pPr>
-            <a:r>
-              <a:rPr lang="en-US" sz="1800" spc="108" kern="0" dirty="0">
+            <a:pPr marL="0" indent="0" algn="l">
+              <a:buNone/>
+            </a:pPr>
+            <a:r>
+              <a:rPr lang="en-US" sz="1800" kern="0" spc="108" dirty="0">
                 <a:solidFill>
                   <a:srgbClr val="888076"/>
                 </a:solidFill>
@@ -13414,11 +13012,11 @@
           </a:bodyPr>
           <a:lstStyle/>
           <a:p>
-            <a:pPr algn="l" indent="0" marL="0">
-              <a:buNone/>
-            </a:pPr>
-            <a:r>
-              <a:rPr lang="en-US" sz="1800" spc="108" kern="0" dirty="0">
+            <a:pPr marL="0" indent="0" algn="l">
+              <a:buNone/>
+            </a:pPr>
+            <a:r>
+              <a:rPr lang="en-US" sz="1800" kern="0" spc="108" dirty="0">
                 <a:solidFill>
                   <a:srgbClr val="888076"/>
                 </a:solidFill>
@@ -13475,11 +13073,11 @@
           </a:bodyPr>
           <a:lstStyle/>
           <a:p>
-            <a:pPr algn="l" indent="0" marL="0">
-              <a:buNone/>
-            </a:pPr>
-            <a:r>
-              <a:rPr lang="en-US" sz="1800" spc="144" kern="0" dirty="0">
+            <a:pPr marL="0" indent="0" algn="l">
+              <a:buNone/>
+            </a:pPr>
+            <a:r>
+              <a:rPr lang="en-US" sz="1800" kern="0" spc="144" dirty="0">
                 <a:solidFill>
                   <a:srgbClr val="FF5B1F"/>
                 </a:solidFill>
@@ -13516,11 +13114,11 @@
           </a:bodyPr>
           <a:lstStyle/>
           <a:p>
-            <a:pPr algn="l" indent="0" marL="0">
-              <a:buNone/>
-            </a:pPr>
-            <a:r>
-              <a:rPr lang="en-US" sz="1800" spc="144" kern="0" dirty="0">
+            <a:pPr marL="0" indent="0" algn="l">
+              <a:buNone/>
+            </a:pPr>
+            <a:r>
+              <a:rPr lang="en-US" sz="1800" kern="0" spc="144" dirty="0">
                 <a:solidFill>
                   <a:srgbClr val="2A2A2A"/>
                 </a:solidFill>
@@ -13557,14 +13155,14 @@
           </a:bodyPr>
           <a:lstStyle/>
           <a:p>
-            <a:pPr algn="l" indent="0" marL="0">
+            <a:pPr marL="0" indent="0" algn="l">
               <a:lnSpc>
                 <a:spcPct val="96000"/>
               </a:lnSpc>
               <a:buNone/>
             </a:pPr>
             <a:r>
-              <a:rPr lang="en-US" sz="7200" spc="-180" kern="0" dirty="0">
+              <a:rPr lang="en-US" sz="7200" kern="0" spc="-180" dirty="0">
                 <a:solidFill>
                   <a:srgbClr val="0E0E0E"/>
                 </a:solidFill>
@@ -13574,14 +13172,8 @@
               </a:rPr>
               <a:t>Your answers </a:t>
             </a:r>
-            <a:pPr algn="l" indent="0" marL="0">
-              <a:lnSpc>
-                <a:spcPct val="96000"/>
-              </a:lnSpc>
-              <a:buNone/>
-            </a:pPr>
-            <a:r>
-              <a:rPr lang="en-US" sz="7200" i="1" spc="-180" kern="0" dirty="0">
+            <a:r>
+              <a:rPr lang="en-US" sz="7200" i="1" kern="0" spc="-180" dirty="0">
                 <a:solidFill>
                   <a:srgbClr val="0E0E0E"/>
                 </a:solidFill>
@@ -13591,14 +13183,8 @@
               </a:rPr>
               <a:t>are </a:t>
             </a:r>
-            <a:pPr algn="l" indent="0" marL="0">
-              <a:lnSpc>
-                <a:spcPct val="96000"/>
-              </a:lnSpc>
-              <a:buNone/>
-            </a:pPr>
-            <a:r>
-              <a:rPr lang="en-US" sz="7200" spc="-180" kern="0" dirty="0">
+            <a:r>
+              <a:rPr lang="en-US" sz="7200" kern="0" spc="-180" dirty="0">
                 <a:solidFill>
                   <a:srgbClr val="0E0E0E"/>
                 </a:solidFill>
@@ -13635,11 +13221,11 @@
           </a:bodyPr>
           <a:lstStyle/>
           <a:p>
-            <a:pPr algn="l" indent="0" marL="0">
-              <a:buNone/>
-            </a:pPr>
-            <a:r>
-              <a:rPr lang="en-US" sz="1800" spc="180" kern="0" dirty="0">
+            <a:pPr marL="0" indent="0" algn="l">
+              <a:buNone/>
+            </a:pPr>
+            <a:r>
+              <a:rPr lang="en-US" sz="1800" kern="0" spc="180" dirty="0">
                 <a:solidFill>
                   <a:srgbClr val="FF5B1F"/>
                 </a:solidFill>
@@ -13716,7 +13302,7 @@
           </a:bodyPr>
           <a:lstStyle/>
           <a:p>
-            <a:pPr algn="l" indent="0" marL="0">
+            <a:pPr marL="0" indent="0" algn="l">
               <a:lnSpc>
                 <a:spcPct val="130000"/>
               </a:lnSpc>
@@ -13736,7 +13322,7 @@
             <a:endParaRPr lang="en-US" sz="1350" dirty="0"/>
           </a:p>
           <a:p>
-            <a:pPr algn="l" indent="0" marL="0">
+            <a:pPr marL="0" indent="0" algn="l">
               <a:lnSpc>
                 <a:spcPct val="130000"/>
               </a:lnSpc>
@@ -13756,7 +13342,7 @@
             <a:endParaRPr lang="en-US" sz="1350" dirty="0"/>
           </a:p>
           <a:p>
-            <a:pPr algn="l" indent="0" marL="0">
+            <a:pPr marL="0" indent="0" algn="l">
               <a:lnSpc>
                 <a:spcPct val="130000"/>
               </a:lnSpc>
@@ -13776,7 +13362,7 @@
             <a:endParaRPr lang="en-US" sz="1350" dirty="0"/>
           </a:p>
           <a:p>
-            <a:pPr algn="l" indent="0" marL="0">
+            <a:pPr marL="0" indent="0" algn="l">
               <a:lnSpc>
                 <a:spcPct val="130000"/>
               </a:lnSpc>
@@ -13796,7 +13382,7 @@
             <a:endParaRPr lang="en-US" sz="1350" dirty="0"/>
           </a:p>
           <a:p>
-            <a:pPr algn="l" indent="0" marL="0">
+            <a:pPr marL="0" indent="0" algn="l">
               <a:lnSpc>
                 <a:spcPct val="130000"/>
               </a:lnSpc>
@@ -13805,7 +13391,7 @@
             <a:endParaRPr lang="en-US" sz="1350" dirty="0"/>
           </a:p>
           <a:p>
-            <a:pPr algn="l" indent="0" marL="0">
+            <a:pPr marL="0" indent="0" algn="l">
               <a:lnSpc>
                 <a:spcPct val="130000"/>
               </a:lnSpc>
@@ -13825,7 +13411,7 @@
             <a:endParaRPr lang="en-US" sz="1350" dirty="0"/>
           </a:p>
           <a:p>
-            <a:pPr algn="l" indent="0" marL="0">
+            <a:pPr marL="0" indent="0" algn="l">
               <a:lnSpc>
                 <a:spcPct val="130000"/>
               </a:lnSpc>
@@ -13845,7 +13431,7 @@
             <a:endParaRPr lang="en-US" sz="1350" dirty="0"/>
           </a:p>
           <a:p>
-            <a:pPr algn="l" indent="0" marL="0">
+            <a:pPr marL="0" indent="0" algn="l">
               <a:lnSpc>
                 <a:spcPct val="130000"/>
               </a:lnSpc>
@@ -13854,7 +13440,7 @@
             <a:endParaRPr lang="en-US" sz="1350" dirty="0"/>
           </a:p>
           <a:p>
-            <a:pPr algn="l" indent="0" marL="0">
+            <a:pPr marL="0" indent="0" algn="l">
               <a:lnSpc>
                 <a:spcPct val="130000"/>
               </a:lnSpc>
@@ -13874,7 +13460,7 @@
             <a:endParaRPr lang="en-US" sz="1350" dirty="0"/>
           </a:p>
           <a:p>
-            <a:pPr algn="l" indent="0" marL="0">
+            <a:pPr marL="0" indent="0" algn="l">
               <a:lnSpc>
                 <a:spcPct val="130000"/>
               </a:lnSpc>
@@ -13894,7 +13480,7 @@
             <a:endParaRPr lang="en-US" sz="1350" dirty="0"/>
           </a:p>
           <a:p>
-            <a:pPr algn="l" indent="0" marL="0">
+            <a:pPr marL="0" indent="0" algn="l">
               <a:lnSpc>
                 <a:spcPct val="130000"/>
               </a:lnSpc>
@@ -13914,7 +13500,7 @@
             <a:endParaRPr lang="en-US" sz="1350" dirty="0"/>
           </a:p>
           <a:p>
-            <a:pPr algn="l" indent="0" marL="0">
+            <a:pPr marL="0" indent="0" algn="l">
               <a:lnSpc>
                 <a:spcPct val="130000"/>
               </a:lnSpc>
@@ -13934,7 +13520,7 @@
             <a:endParaRPr lang="en-US" sz="1350" dirty="0"/>
           </a:p>
           <a:p>
-            <a:pPr algn="l" indent="0" marL="0">
+            <a:pPr marL="0" indent="0" algn="l">
               <a:lnSpc>
                 <a:spcPct val="130000"/>
               </a:lnSpc>
@@ -13943,7 +13529,7 @@
             <a:endParaRPr lang="en-US" sz="1350" dirty="0"/>
           </a:p>
           <a:p>
-            <a:pPr algn="l" indent="0" marL="0">
+            <a:pPr marL="0" indent="0" algn="l">
               <a:lnSpc>
                 <a:spcPct val="130000"/>
               </a:lnSpc>
@@ -13963,7 +13549,7 @@
             <a:endParaRPr lang="en-US" sz="1350" dirty="0"/>
           </a:p>
           <a:p>
-            <a:pPr algn="l" indent="0" marL="0">
+            <a:pPr marL="0" indent="0" algn="l">
               <a:lnSpc>
                 <a:spcPct val="130000"/>
               </a:lnSpc>
@@ -13983,7 +13569,7 @@
             <a:endParaRPr lang="en-US" sz="1350" dirty="0"/>
           </a:p>
           <a:p>
-            <a:pPr algn="l" indent="0" marL="0">
+            <a:pPr marL="0" indent="0" algn="l">
               <a:lnSpc>
                 <a:spcPct val="130000"/>
               </a:lnSpc>
@@ -13992,7 +13578,7 @@
             <a:endParaRPr lang="en-US" sz="1350" dirty="0"/>
           </a:p>
           <a:p>
-            <a:pPr algn="l" indent="0" marL="0">
+            <a:pPr marL="0" indent="0" algn="l">
               <a:lnSpc>
                 <a:spcPct val="130000"/>
               </a:lnSpc>
@@ -14012,7 +13598,7 @@
             <a:endParaRPr lang="en-US" sz="1350" dirty="0"/>
           </a:p>
           <a:p>
-            <a:pPr algn="l" indent="0" marL="0">
+            <a:pPr marL="0" indent="0" algn="l">
               <a:lnSpc>
                 <a:spcPct val="130000"/>
               </a:lnSpc>
@@ -14032,7 +13618,7 @@
             <a:endParaRPr lang="en-US" sz="1350" dirty="0"/>
           </a:p>
           <a:p>
-            <a:pPr algn="l" indent="0" marL="0">
+            <a:pPr marL="0" indent="0" algn="l">
               <a:lnSpc>
                 <a:spcPct val="130000"/>
               </a:lnSpc>
@@ -14052,7 +13638,7 @@
             <a:endParaRPr lang="en-US" sz="1350" dirty="0"/>
           </a:p>
           <a:p>
-            <a:pPr algn="l" indent="0" marL="0">
+            <a:pPr marL="0" indent="0" algn="l">
               <a:lnSpc>
                 <a:spcPct val="130000"/>
               </a:lnSpc>
@@ -14072,7 +13658,7 @@
             <a:endParaRPr lang="en-US" sz="1350" dirty="0"/>
           </a:p>
           <a:p>
-            <a:pPr algn="l" indent="0" marL="0">
+            <a:pPr marL="0" indent="0" algn="l">
               <a:lnSpc>
                 <a:spcPct val="130000"/>
               </a:lnSpc>
@@ -14092,7 +13678,7 @@
             <a:endParaRPr lang="en-US" sz="1350" dirty="0"/>
           </a:p>
           <a:p>
-            <a:pPr algn="l" indent="0" marL="0">
+            <a:pPr marL="0" indent="0" algn="l">
               <a:lnSpc>
                 <a:spcPct val="130000"/>
               </a:lnSpc>
@@ -14112,7 +13698,7 @@
             <a:endParaRPr lang="en-US" sz="1350" dirty="0"/>
           </a:p>
           <a:p>
-            <a:pPr algn="l" indent="0" marL="0">
+            <a:pPr marL="0" indent="0" algn="l">
               <a:lnSpc>
                 <a:spcPct val="130000"/>
               </a:lnSpc>
@@ -14132,7 +13718,7 @@
             <a:endParaRPr lang="en-US" sz="1350" dirty="0"/>
           </a:p>
           <a:p>
-            <a:pPr algn="l" indent="0" marL="0">
+            <a:pPr marL="0" indent="0" algn="l">
               <a:lnSpc>
                 <a:spcPct val="130000"/>
               </a:lnSpc>
@@ -14152,7 +13738,7 @@
             <a:endParaRPr lang="en-US" sz="1350" dirty="0"/>
           </a:p>
           <a:p>
-            <a:pPr algn="l" indent="0" marL="0">
+            <a:pPr marL="0" indent="0" algn="l">
               <a:lnSpc>
                 <a:spcPct val="130000"/>
               </a:lnSpc>
@@ -14172,7 +13758,7 @@
             <a:endParaRPr lang="en-US" sz="1350" dirty="0"/>
           </a:p>
           <a:p>
-            <a:pPr algn="l" indent="0" marL="0">
+            <a:pPr marL="0" indent="0" algn="l">
               <a:lnSpc>
                 <a:spcPct val="130000"/>
               </a:lnSpc>
@@ -14192,7 +13778,7 @@
             <a:endParaRPr lang="en-US" sz="1350" dirty="0"/>
           </a:p>
           <a:p>
-            <a:pPr algn="l" indent="0" marL="0">
+            <a:pPr marL="0" indent="0" algn="l">
               <a:lnSpc>
                 <a:spcPct val="130000"/>
               </a:lnSpc>
@@ -14201,7 +13787,7 @@
             <a:endParaRPr lang="en-US" sz="1350" dirty="0"/>
           </a:p>
           <a:p>
-            <a:pPr algn="l" indent="0" marL="0">
+            <a:pPr marL="0" indent="0" algn="l">
               <a:lnSpc>
                 <a:spcPct val="130000"/>
               </a:lnSpc>
@@ -14221,7 +13807,7 @@
             <a:endParaRPr lang="en-US" sz="1350" dirty="0"/>
           </a:p>
           <a:p>
-            <a:pPr algn="l" indent="0" marL="0">
+            <a:pPr marL="0" indent="0" algn="l">
               <a:lnSpc>
                 <a:spcPct val="130000"/>
               </a:lnSpc>
@@ -14285,7 +13871,7 @@
           </a:bodyPr>
           <a:lstStyle/>
           <a:p>
-            <a:pPr algn="l" indent="0" marL="0">
+            <a:pPr marL="0" indent="0" algn="l">
               <a:lnSpc>
                 <a:spcPct val="100000"/>
               </a:lnSpc>
@@ -14329,7 +13915,7 @@
           </a:bodyPr>
           <a:lstStyle/>
           <a:p>
-            <a:pPr algn="l" indent="0" marL="0">
+            <a:pPr marL="0" indent="0" algn="l">
               <a:lnSpc>
                 <a:spcPct val="105000"/>
               </a:lnSpc>
@@ -14393,7 +13979,7 @@
           </a:bodyPr>
           <a:lstStyle/>
           <a:p>
-            <a:pPr algn="l" indent="0" marL="0">
+            <a:pPr marL="0" indent="0" algn="l">
               <a:lnSpc>
                 <a:spcPct val="100000"/>
               </a:lnSpc>
@@ -14437,7 +14023,7 @@
           </a:bodyPr>
           <a:lstStyle/>
           <a:p>
-            <a:pPr algn="l" indent="0" marL="0">
+            <a:pPr marL="0" indent="0" algn="l">
               <a:lnSpc>
                 <a:spcPct val="105000"/>
               </a:lnSpc>
@@ -14501,7 +14087,7 @@
           </a:bodyPr>
           <a:lstStyle/>
           <a:p>
-            <a:pPr algn="l" indent="0" marL="0">
+            <a:pPr marL="0" indent="0" algn="l">
               <a:lnSpc>
                 <a:spcPct val="100000"/>
               </a:lnSpc>
@@ -14545,7 +14131,7 @@
           </a:bodyPr>
           <a:lstStyle/>
           <a:p>
-            <a:pPr algn="l" indent="0" marL="0">
+            <a:pPr marL="0" indent="0" algn="l">
               <a:lnSpc>
                 <a:spcPct val="105000"/>
               </a:lnSpc>
@@ -14609,7 +14195,7 @@
           </a:bodyPr>
           <a:lstStyle/>
           <a:p>
-            <a:pPr algn="l" indent="0" marL="0">
+            <a:pPr marL="0" indent="0" algn="l">
               <a:lnSpc>
                 <a:spcPct val="100000"/>
               </a:lnSpc>
@@ -14653,7 +14239,7 @@
           </a:bodyPr>
           <a:lstStyle/>
           <a:p>
-            <a:pPr algn="l" indent="0" marL="0">
+            <a:pPr marL="0" indent="0" algn="l">
               <a:lnSpc>
                 <a:spcPct val="105000"/>
               </a:lnSpc>
@@ -14737,7 +14323,7 @@
           </a:bodyPr>
           <a:lstStyle/>
           <a:p>
-            <a:pPr algn="l" indent="0" marL="0">
+            <a:pPr marL="0" indent="0" algn="l">
               <a:lnSpc>
                 <a:spcPct val="100000"/>
               </a:lnSpc>
@@ -14781,7 +14367,7 @@
           </a:bodyPr>
           <a:lstStyle/>
           <a:p>
-            <a:pPr algn="l" indent="0" marL="0">
+            <a:pPr marL="0" indent="0" algn="l">
               <a:lnSpc>
                 <a:spcPct val="105000"/>
               </a:lnSpc>
@@ -14825,11 +14411,11 @@
           </a:bodyPr>
           <a:lstStyle/>
           <a:p>
-            <a:pPr algn="l" indent="0" marL="0">
-              <a:buNone/>
-            </a:pPr>
-            <a:r>
-              <a:rPr lang="en-US" sz="1800" spc="108" kern="0" dirty="0">
+            <a:pPr marL="0" indent="0" algn="l">
+              <a:buNone/>
+            </a:pPr>
+            <a:r>
+              <a:rPr lang="en-US" sz="1800" kern="0" spc="108" dirty="0">
                 <a:solidFill>
                   <a:srgbClr val="888076"/>
                 </a:solidFill>
@@ -14866,11 +14452,11 @@
           </a:bodyPr>
           <a:lstStyle/>
           <a:p>
-            <a:pPr algn="l" indent="0" marL="0">
-              <a:buNone/>
-            </a:pPr>
-            <a:r>
-              <a:rPr lang="en-US" sz="2700" i="1" spc="-54" kern="0" dirty="0">
+            <a:pPr marL="0" indent="0" algn="l">
+              <a:buNone/>
+            </a:pPr>
+            <a:r>
+              <a:rPr lang="en-US" sz="2700" i="1" kern="0" spc="-54" dirty="0">
                 <a:solidFill>
                   <a:srgbClr val="888076"/>
                 </a:solidFill>
@@ -14900,6 +14486,7 @@
         <a:solidFill>
           <a:srgbClr val="F2EFE8"/>
         </a:solidFill>
+        <a:effectLst/>
       </p:bgPr>
     </p:bg>
     <p:spTree>
@@ -14959,11 +14546,11 @@
           </a:bodyPr>
           <a:lstStyle/>
           <a:p>
-            <a:pPr algn="l" indent="0" marL="0">
-              <a:buNone/>
-            </a:pPr>
-            <a:r>
-              <a:rPr lang="en-US" sz="1800" spc="108" kern="0" dirty="0">
+            <a:pPr marL="0" indent="0" algn="l">
+              <a:buNone/>
+            </a:pPr>
+            <a:r>
+              <a:rPr lang="en-US" sz="1800" kern="0" spc="108" dirty="0">
                 <a:solidFill>
                   <a:srgbClr val="888076"/>
                 </a:solidFill>
@@ -15000,11 +14587,11 @@
           </a:bodyPr>
           <a:lstStyle/>
           <a:p>
-            <a:pPr algn="l" indent="0" marL="0">
-              <a:buNone/>
-            </a:pPr>
-            <a:r>
-              <a:rPr lang="en-US" sz="1800" spc="108" kern="0" dirty="0">
+            <a:pPr marL="0" indent="0" algn="l">
+              <a:buNone/>
+            </a:pPr>
+            <a:r>
+              <a:rPr lang="en-US" sz="1800" kern="0" spc="108" dirty="0">
                 <a:solidFill>
                   <a:srgbClr val="888076"/>
                 </a:solidFill>
@@ -15061,11 +14648,11 @@
           </a:bodyPr>
           <a:lstStyle/>
           <a:p>
-            <a:pPr algn="l" indent="0" marL="0">
-              <a:buNone/>
-            </a:pPr>
-            <a:r>
-              <a:rPr lang="en-US" sz="1800" spc="144" kern="0" dirty="0">
+            <a:pPr marL="0" indent="0" algn="l">
+              <a:buNone/>
+            </a:pPr>
+            <a:r>
+              <a:rPr lang="en-US" sz="1800" kern="0" spc="144" dirty="0">
                 <a:solidFill>
                   <a:srgbClr val="FF5B1F"/>
                 </a:solidFill>
@@ -15102,11 +14689,11 @@
           </a:bodyPr>
           <a:lstStyle/>
           <a:p>
-            <a:pPr algn="l" indent="0" marL="0">
-              <a:buNone/>
-            </a:pPr>
-            <a:r>
-              <a:rPr lang="en-US" sz="1800" spc="144" kern="0" dirty="0">
+            <a:pPr marL="0" indent="0" algn="l">
+              <a:buNone/>
+            </a:pPr>
+            <a:r>
+              <a:rPr lang="en-US" sz="1800" kern="0" spc="144" dirty="0">
                 <a:solidFill>
                   <a:srgbClr val="2A2A2A"/>
                 </a:solidFill>
@@ -15143,14 +14730,14 @@
           </a:bodyPr>
           <a:lstStyle/>
           <a:p>
-            <a:pPr algn="l" indent="0" marL="0">
+            <a:pPr marL="0" indent="0" algn="l">
               <a:lnSpc>
                 <a:spcPct val="92000"/>
               </a:lnSpc>
               <a:buNone/>
             </a:pPr>
             <a:r>
-              <a:rPr lang="en-US" sz="10500" spc="-315" kern="0" dirty="0">
+              <a:rPr lang="en-US" sz="10500" kern="0" spc="-315" dirty="0">
                 <a:solidFill>
                   <a:srgbClr val="0E0E0E"/>
                 </a:solidFill>
@@ -15160,14 +14747,8 @@
               </a:rPr>
               <a:t>The case </a:t>
             </a:r>
-            <a:pPr algn="l" indent="0" marL="0">
-              <a:lnSpc>
-                <a:spcPct val="92000"/>
-              </a:lnSpc>
-              <a:buNone/>
-            </a:pPr>
-            <a:r>
-              <a:rPr lang="en-US" sz="10500" i="1" spc="-315" kern="0" dirty="0">
+            <a:r>
+              <a:rPr lang="en-US" sz="10500" i="1" kern="0" spc="-315" dirty="0">
                 <a:solidFill>
                   <a:srgbClr val="0E0E0E"/>
                 </a:solidFill>
@@ -15204,14 +14785,14 @@
           </a:bodyPr>
           <a:lstStyle/>
           <a:p>
-            <a:pPr algn="l" indent="0" marL="0">
+            <a:pPr marL="0" indent="0" algn="l">
               <a:lnSpc>
                 <a:spcPct val="110000"/>
               </a:lnSpc>
               <a:buNone/>
             </a:pPr>
             <a:r>
-              <a:rPr lang="en-US" sz="3150" i="1" spc="-31" kern="0" dirty="0">
+              <a:rPr lang="en-US" sz="3150" i="1" kern="0" spc="-31" dirty="0">
                 <a:solidFill>
                   <a:srgbClr val="0E0E0E"/>
                 </a:solidFill>
@@ -15248,7 +14829,7 @@
           </a:bodyPr>
           <a:lstStyle/>
           <a:p>
-            <a:pPr algn="l" indent="0" marL="0">
+            <a:pPr marL="0" indent="0" algn="l">
               <a:lnSpc>
                 <a:spcPct val="145000"/>
               </a:lnSpc>
@@ -15265,12 +14846,6 @@
               </a:rPr>
               <a:t>Four courses · capstone project · part-time professional commitments. Baseline GPA in the lower second class. No prior structured exposure to generative AI. He adopted AI as a primary work tool and almost </a:t>
             </a:r>
-            <a:pPr algn="l" indent="0" marL="0">
-              <a:lnSpc>
-                <a:spcPct val="145000"/>
-              </a:lnSpc>
-              <a:buNone/>
-            </a:pPr>
             <a:r>
               <a:rPr lang="en-US" sz="2250" b="1" dirty="0">
                 <a:solidFill>
@@ -15329,11 +14904,11 @@
           </a:bodyPr>
           <a:lstStyle/>
           <a:p>
-            <a:pPr algn="l" indent="0" marL="0">
-              <a:buNone/>
-            </a:pPr>
-            <a:r>
-              <a:rPr lang="en-US" sz="2100" b="1" i="1" spc="216" kern="0" dirty="0">
+            <a:pPr marL="0" indent="0" algn="l">
+              <a:buNone/>
+            </a:pPr>
+            <a:r>
+              <a:rPr lang="en-US" sz="2100" b="1" i="1" kern="0" spc="216" dirty="0">
                 <a:solidFill>
                   <a:srgbClr val="F2EFE8"/>
                 </a:solidFill>
@@ -15370,11 +14945,11 @@
           </a:bodyPr>
           <a:lstStyle/>
           <a:p>
-            <a:pPr algn="l" indent="0" marL="0">
-              <a:buNone/>
-            </a:pPr>
-            <a:r>
-              <a:rPr lang="en-US" sz="1800" b="1" spc="216" kern="0" dirty="0">
+            <a:pPr marL="0" indent="0" algn="l">
+              <a:buNone/>
+            </a:pPr>
+            <a:r>
+              <a:rPr lang="en-US" sz="1800" b="1" kern="0" spc="216" dirty="0">
                 <a:solidFill>
                   <a:srgbClr val="F2EFE8"/>
                 </a:solidFill>
@@ -15453,7 +15028,7 @@
           </a:bodyPr>
           <a:lstStyle/>
           <a:p>
-            <a:pPr algn="l" indent="0" marL="0">
+            <a:pPr marL="0" indent="0" algn="l">
               <a:buNone/>
             </a:pPr>
             <a:r>
@@ -15494,7 +15069,7 @@
           </a:bodyPr>
           <a:lstStyle/>
           <a:p>
-            <a:pPr algn="l" indent="0" marL="0">
+            <a:pPr marL="0" indent="0" algn="l">
               <a:lnSpc>
                 <a:spcPct val="140000"/>
               </a:lnSpc>
@@ -15538,11 +15113,11 @@
           </a:bodyPr>
           <a:lstStyle/>
           <a:p>
-            <a:pPr algn="l" indent="0" marL="0">
-              <a:buNone/>
-            </a:pPr>
-            <a:r>
-              <a:rPr lang="en-US" sz="1800" spc="108" kern="0" dirty="0">
+            <a:pPr marL="0" indent="0" algn="l">
+              <a:buNone/>
+            </a:pPr>
+            <a:r>
+              <a:rPr lang="en-US" sz="1800" kern="0" spc="108" dirty="0">
                 <a:solidFill>
                   <a:srgbClr val="888076"/>
                 </a:solidFill>
@@ -15579,11 +15154,11 @@
           </a:bodyPr>
           <a:lstStyle/>
           <a:p>
-            <a:pPr algn="l" indent="0" marL="0">
-              <a:buNone/>
-            </a:pPr>
-            <a:r>
-              <a:rPr lang="en-US" sz="2700" i="1" spc="-54" kern="0" dirty="0">
+            <a:pPr marL="0" indent="0" algn="l">
+              <a:buNone/>
+            </a:pPr>
+            <a:r>
+              <a:rPr lang="en-US" sz="2700" i="1" kern="0" spc="-54" dirty="0">
                 <a:solidFill>
                   <a:srgbClr val="888076"/>
                 </a:solidFill>
@@ -15613,6 +15188,7 @@
         <a:solidFill>
           <a:srgbClr val="E8E3D6"/>
         </a:solidFill>
+        <a:effectLst/>
       </p:bgPr>
     </p:bg>
     <p:spTree>
@@ -15672,11 +15248,11 @@
           </a:bodyPr>
           <a:lstStyle/>
           <a:p>
-            <a:pPr algn="l" indent="0" marL="0">
-              <a:buNone/>
-            </a:pPr>
-            <a:r>
-              <a:rPr lang="en-US" sz="1800" spc="108" kern="0" dirty="0">
+            <a:pPr marL="0" indent="0" algn="l">
+              <a:buNone/>
+            </a:pPr>
+            <a:r>
+              <a:rPr lang="en-US" sz="1800" kern="0" spc="108" dirty="0">
                 <a:solidFill>
                   <a:srgbClr val="888076"/>
                 </a:solidFill>
@@ -15713,11 +15289,11 @@
           </a:bodyPr>
           <a:lstStyle/>
           <a:p>
-            <a:pPr algn="l" indent="0" marL="0">
-              <a:buNone/>
-            </a:pPr>
-            <a:r>
-              <a:rPr lang="en-US" sz="1800" spc="108" kern="0" dirty="0">
+            <a:pPr marL="0" indent="0" algn="l">
+              <a:buNone/>
+            </a:pPr>
+            <a:r>
+              <a:rPr lang="en-US" sz="1800" kern="0" spc="108" dirty="0">
                 <a:solidFill>
                   <a:srgbClr val="888076"/>
                 </a:solidFill>
@@ -15774,11 +15350,11 @@
           </a:bodyPr>
           <a:lstStyle/>
           <a:p>
-            <a:pPr algn="l" indent="0" marL="0">
-              <a:buNone/>
-            </a:pPr>
-            <a:r>
-              <a:rPr lang="en-US" sz="1800" spc="144" kern="0" dirty="0">
+            <a:pPr marL="0" indent="0" algn="l">
+              <a:buNone/>
+            </a:pPr>
+            <a:r>
+              <a:rPr lang="en-US" sz="1800" kern="0" spc="144" dirty="0">
                 <a:solidFill>
                   <a:srgbClr val="FF5B1F"/>
                 </a:solidFill>
@@ -15815,11 +15391,11 @@
           </a:bodyPr>
           <a:lstStyle/>
           <a:p>
-            <a:pPr algn="l" indent="0" marL="0">
-              <a:buNone/>
-            </a:pPr>
-            <a:r>
-              <a:rPr lang="en-US" sz="1800" spc="144" kern="0" dirty="0">
+            <a:pPr marL="0" indent="0" algn="l">
+              <a:buNone/>
+            </a:pPr>
+            <a:r>
+              <a:rPr lang="en-US" sz="1800" kern="0" spc="144" dirty="0">
                 <a:solidFill>
                   <a:srgbClr val="2A2A2A"/>
                 </a:solidFill>
@@ -15856,14 +15432,14 @@
           </a:bodyPr>
           <a:lstStyle/>
           <a:p>
-            <a:pPr algn="l" indent="0" marL="0">
+            <a:pPr marL="0" indent="0" algn="l">
               <a:lnSpc>
                 <a:spcPct val="96000"/>
               </a:lnSpc>
               <a:buNone/>
             </a:pPr>
             <a:r>
-              <a:rPr lang="en-US" sz="7200" spc="-180" kern="0" dirty="0">
+              <a:rPr lang="en-US" sz="7200" kern="0" spc="-180" dirty="0">
                 <a:solidFill>
                   <a:srgbClr val="0E0E0E"/>
                 </a:solidFill>
@@ -15873,14 +15449,8 @@
               </a:rPr>
               <a:t>Five-person studio output. </a:t>
             </a:r>
-            <a:pPr algn="l" indent="0" marL="0">
-              <a:lnSpc>
-                <a:spcPct val="96000"/>
-              </a:lnSpc>
-              <a:buNone/>
-            </a:pPr>
-            <a:r>
-              <a:rPr lang="en-US" sz="7200" i="1" spc="-180" kern="0" dirty="0">
+            <a:r>
+              <a:rPr lang="en-US" sz="7200" i="1" kern="0" spc="-180" dirty="0">
                 <a:solidFill>
                   <a:srgbClr val="0E0E0E"/>
                 </a:solidFill>
@@ -15942,11 +15512,11 @@
           </a:bodyPr>
           <a:lstStyle/>
           <a:p>
-            <a:pPr algn="l" indent="0" marL="0">
-              <a:buNone/>
-            </a:pPr>
-            <a:r>
-              <a:rPr lang="en-US" sz="1800" spc="144" kern="0" dirty="0">
+            <a:pPr marL="0" indent="0" algn="l">
+              <a:buNone/>
+            </a:pPr>
+            <a:r>
+              <a:rPr lang="en-US" sz="1800" kern="0" spc="144" dirty="0">
                 <a:solidFill>
                   <a:srgbClr val="888076"/>
                 </a:solidFill>
@@ -15983,14 +15553,14 @@
           </a:bodyPr>
           <a:lstStyle/>
           <a:p>
-            <a:pPr algn="l" indent="0" marL="0">
+            <a:pPr marL="0" indent="0" algn="l">
               <a:lnSpc>
                 <a:spcPct val="95000"/>
               </a:lnSpc>
               <a:buNone/>
             </a:pPr>
             <a:r>
-              <a:rPr lang="en-US" sz="3300" spc="-66" kern="0" dirty="0">
+              <a:rPr lang="en-US" sz="3300" kern="0" spc="-66" dirty="0">
                 <a:solidFill>
                   <a:srgbClr val="0E0E0E"/>
                 </a:solidFill>
@@ -16027,7 +15597,7 @@
           </a:bodyPr>
           <a:lstStyle/>
           <a:p>
-            <a:pPr algn="l" indent="0" marL="0">
+            <a:pPr marL="0" indent="0" algn="l">
               <a:lnSpc>
                 <a:spcPct val="140000"/>
               </a:lnSpc>
@@ -16096,11 +15666,11 @@
           </a:bodyPr>
           <a:lstStyle/>
           <a:p>
-            <a:pPr algn="l" indent="0" marL="0">
-              <a:buNone/>
-            </a:pPr>
-            <a:r>
-              <a:rPr lang="en-US" sz="1800" spc="144" kern="0" dirty="0">
+            <a:pPr marL="0" indent="0" algn="l">
+              <a:buNone/>
+            </a:pPr>
+            <a:r>
+              <a:rPr lang="en-US" sz="1800" kern="0" spc="144" dirty="0">
                 <a:solidFill>
                   <a:srgbClr val="888076"/>
                 </a:solidFill>
@@ -16137,14 +15707,14 @@
           </a:bodyPr>
           <a:lstStyle/>
           <a:p>
-            <a:pPr algn="l" indent="0" marL="0">
+            <a:pPr marL="0" indent="0" algn="l">
               <a:lnSpc>
                 <a:spcPct val="95000"/>
               </a:lnSpc>
               <a:buNone/>
             </a:pPr>
             <a:r>
-              <a:rPr lang="en-US" sz="3300" spc="-66" kern="0" dirty="0">
+              <a:rPr lang="en-US" sz="3300" kern="0" spc="-66" dirty="0">
                 <a:solidFill>
                   <a:srgbClr val="0E0E0E"/>
                 </a:solidFill>
@@ -16181,7 +15751,7 @@
           </a:bodyPr>
           <a:lstStyle/>
           <a:p>
-            <a:pPr algn="l" indent="0" marL="0">
+            <a:pPr marL="0" indent="0" algn="l">
               <a:lnSpc>
                 <a:spcPct val="140000"/>
               </a:lnSpc>
@@ -16250,11 +15820,11 @@
           </a:bodyPr>
           <a:lstStyle/>
           <a:p>
-            <a:pPr algn="l" indent="0" marL="0">
-              <a:buNone/>
-            </a:pPr>
-            <a:r>
-              <a:rPr lang="en-US" sz="1800" spc="144" kern="0" dirty="0">
+            <a:pPr marL="0" indent="0" algn="l">
+              <a:buNone/>
+            </a:pPr>
+            <a:r>
+              <a:rPr lang="en-US" sz="1800" kern="0" spc="144" dirty="0">
                 <a:solidFill>
                   <a:srgbClr val="888076"/>
                 </a:solidFill>
@@ -16291,14 +15861,14 @@
           </a:bodyPr>
           <a:lstStyle/>
           <a:p>
-            <a:pPr algn="l" indent="0" marL="0">
+            <a:pPr marL="0" indent="0" algn="l">
               <a:lnSpc>
                 <a:spcPct val="95000"/>
               </a:lnSpc>
               <a:buNone/>
             </a:pPr>
             <a:r>
-              <a:rPr lang="en-US" sz="3300" spc="-66" kern="0" dirty="0">
+              <a:rPr lang="en-US" sz="3300" kern="0" spc="-66" dirty="0">
                 <a:solidFill>
                   <a:srgbClr val="0E0E0E"/>
                 </a:solidFill>
@@ -16335,7 +15905,7 @@
           </a:bodyPr>
           <a:lstStyle/>
           <a:p>
-            <a:pPr algn="l" indent="0" marL="0">
+            <a:pPr marL="0" indent="0" algn="l">
               <a:lnSpc>
                 <a:spcPct val="140000"/>
               </a:lnSpc>
@@ -16404,11 +15974,11 @@
           </a:bodyPr>
           <a:lstStyle/>
           <a:p>
-            <a:pPr algn="l" indent="0" marL="0">
-              <a:buNone/>
-            </a:pPr>
-            <a:r>
-              <a:rPr lang="en-US" sz="1800" spc="144" kern="0" dirty="0">
+            <a:pPr marL="0" indent="0" algn="l">
+              <a:buNone/>
+            </a:pPr>
+            <a:r>
+              <a:rPr lang="en-US" sz="1800" kern="0" spc="144" dirty="0">
                 <a:solidFill>
                   <a:srgbClr val="888076"/>
                 </a:solidFill>
@@ -16445,14 +16015,14 @@
           </a:bodyPr>
           <a:lstStyle/>
           <a:p>
-            <a:pPr algn="l" indent="0" marL="0">
+            <a:pPr marL="0" indent="0" algn="l">
               <a:lnSpc>
                 <a:spcPct val="95000"/>
               </a:lnSpc>
               <a:buNone/>
             </a:pPr>
             <a:r>
-              <a:rPr lang="en-US" sz="3300" spc="-66" kern="0" dirty="0">
+              <a:rPr lang="en-US" sz="3300" kern="0" spc="-66" dirty="0">
                 <a:solidFill>
                   <a:srgbClr val="0E0E0E"/>
                 </a:solidFill>
@@ -16489,7 +16059,7 @@
           </a:bodyPr>
           <a:lstStyle/>
           <a:p>
-            <a:pPr algn="l" indent="0" marL="0">
+            <a:pPr marL="0" indent="0" algn="l">
               <a:lnSpc>
                 <a:spcPct val="140000"/>
               </a:lnSpc>
@@ -16506,12 +16076,6 @@
               </a:rPr>
               <a:t>Voice synthesis with </a:t>
             </a:r>
-            <a:pPr algn="l" indent="0" marL="0">
-              <a:lnSpc>
-                <a:spcPct val="140000"/>
-              </a:lnSpc>
-              <a:buNone/>
-            </a:pPr>
             <a:r>
               <a:rPr lang="en-US" sz="1800" i="1" dirty="0">
                 <a:solidFill>
@@ -16523,12 +16087,6 @@
               </a:rPr>
               <a:t>full Arabic support. </a:t>
             </a:r>
-            <a:pPr algn="l" indent="0" marL="0">
-              <a:lnSpc>
-                <a:spcPct val="140000"/>
-              </a:lnSpc>
-              <a:buNone/>
-            </a:pPr>
             <a:r>
               <a:rPr lang="en-US" sz="1800" dirty="0">
                 <a:solidFill>
@@ -16592,11 +16150,11 @@
           </a:bodyPr>
           <a:lstStyle/>
           <a:p>
-            <a:pPr algn="l" indent="0" marL="0">
-              <a:buNone/>
-            </a:pPr>
-            <a:r>
-              <a:rPr lang="en-US" sz="1800" spc="144" kern="0" dirty="0">
+            <a:pPr marL="0" indent="0" algn="l">
+              <a:buNone/>
+            </a:pPr>
+            <a:r>
+              <a:rPr lang="en-US" sz="1800" kern="0" spc="144" dirty="0">
                 <a:solidFill>
                   <a:srgbClr val="888076"/>
                 </a:solidFill>
@@ -16633,14 +16191,14 @@
           </a:bodyPr>
           <a:lstStyle/>
           <a:p>
-            <a:pPr algn="l" indent="0" marL="0">
+            <a:pPr marL="0" indent="0" algn="l">
               <a:lnSpc>
                 <a:spcPct val="95000"/>
               </a:lnSpc>
               <a:buNone/>
             </a:pPr>
             <a:r>
-              <a:rPr lang="en-US" sz="3300" spc="-66" kern="0" dirty="0">
+              <a:rPr lang="en-US" sz="3300" kern="0" spc="-66" dirty="0">
                 <a:solidFill>
                   <a:srgbClr val="0E0E0E"/>
                 </a:solidFill>
@@ -16677,7 +16235,7 @@
           </a:bodyPr>
           <a:lstStyle/>
           <a:p>
-            <a:pPr algn="l" indent="0" marL="0">
+            <a:pPr marL="0" indent="0" algn="l">
               <a:lnSpc>
                 <a:spcPct val="140000"/>
               </a:lnSpc>
@@ -16746,11 +16304,11 @@
           </a:bodyPr>
           <a:lstStyle/>
           <a:p>
-            <a:pPr algn="l" indent="0" marL="0">
-              <a:buNone/>
-            </a:pPr>
-            <a:r>
-              <a:rPr lang="en-US" sz="1800" b="1" spc="144" kern="0" dirty="0">
+            <a:pPr marL="0" indent="0" algn="l">
+              <a:buNone/>
+            </a:pPr>
+            <a:r>
+              <a:rPr lang="en-US" sz="1800" b="1" kern="0" spc="144" dirty="0">
                 <a:solidFill>
                   <a:srgbClr val="0E0E0E"/>
                 </a:solidFill>
@@ -16787,14 +16345,14 @@
           </a:bodyPr>
           <a:lstStyle/>
           <a:p>
-            <a:pPr algn="l" indent="0" marL="0">
+            <a:pPr marL="0" indent="0" algn="l">
               <a:lnSpc>
                 <a:spcPct val="105000"/>
               </a:lnSpc>
               <a:buNone/>
             </a:pPr>
             <a:r>
-              <a:rPr lang="en-US" sz="2400" spc="-48" kern="0" dirty="0">
+              <a:rPr lang="en-US" sz="2400" kern="0" spc="-48" dirty="0">
                 <a:solidFill>
                   <a:srgbClr val="0E0E0E"/>
                 </a:solidFill>
@@ -16831,7 +16389,7 @@
           </a:bodyPr>
           <a:lstStyle/>
           <a:p>
-            <a:pPr algn="l" indent="0" marL="0">
+            <a:pPr marL="0" indent="0" algn="l">
               <a:lnSpc>
                 <a:spcPct val="140000"/>
               </a:lnSpc>
@@ -16848,12 +16406,6 @@
               </a:rPr>
               <a:t>The remaining constraints — </a:t>
             </a:r>
-            <a:pPr algn="l" indent="0" marL="0">
-              <a:lnSpc>
-                <a:spcPct val="140000"/>
-              </a:lnSpc>
-              <a:buNone/>
-            </a:pPr>
             <a:r>
               <a:rPr lang="en-US" sz="1800" b="1" dirty="0">
                 <a:solidFill>
@@ -16865,12 +16417,6 @@
               </a:rPr>
               <a:t>taste, consistency, and direct customer understanding </a:t>
             </a:r>
-            <a:pPr algn="l" indent="0" marL="0">
-              <a:lnSpc>
-                <a:spcPct val="140000"/>
-              </a:lnSpc>
-              <a:buNone/>
-            </a:pPr>
             <a:r>
               <a:rPr lang="en-US" sz="1800" dirty="0">
                 <a:solidFill>
@@ -16909,11 +16455,11 @@
           </a:bodyPr>
           <a:lstStyle/>
           <a:p>
-            <a:pPr algn="l" indent="0" marL="0">
-              <a:buNone/>
-            </a:pPr>
-            <a:r>
-              <a:rPr lang="en-US" sz="1800" spc="108" kern="0" dirty="0">
+            <a:pPr marL="0" indent="0" algn="l">
+              <a:buNone/>
+            </a:pPr>
+            <a:r>
+              <a:rPr lang="en-US" sz="1800" kern="0" spc="108" dirty="0">
                 <a:solidFill>
                   <a:srgbClr val="888076"/>
                 </a:solidFill>
@@ -16950,11 +16496,11 @@
           </a:bodyPr>
           <a:lstStyle/>
           <a:p>
-            <a:pPr algn="l" indent="0" marL="0">
-              <a:buNone/>
-            </a:pPr>
-            <a:r>
-              <a:rPr lang="en-US" sz="2700" i="1" spc="-54" kern="0" dirty="0">
+            <a:pPr marL="0" indent="0" algn="l">
+              <a:buNone/>
+            </a:pPr>
+            <a:r>
+              <a:rPr lang="en-US" sz="2700" i="1" kern="0" spc="-54" dirty="0">
                 <a:solidFill>
                   <a:srgbClr val="888076"/>
                 </a:solidFill>
@@ -16984,6 +16530,7 @@
         <a:solidFill>
           <a:srgbClr val="0E0E0E"/>
         </a:solidFill>
+        <a:effectLst/>
       </p:bgPr>
     </p:bg>
     <p:spTree>
@@ -17043,11 +16590,11 @@
           </a:bodyPr>
           <a:lstStyle/>
           <a:p>
-            <a:pPr algn="l" indent="0" marL="0">
-              <a:buNone/>
-            </a:pPr>
-            <a:r>
-              <a:rPr lang="en-US" sz="1800" spc="108" kern="0" dirty="0">
+            <a:pPr marL="0" indent="0" algn="l">
+              <a:buNone/>
+            </a:pPr>
+            <a:r>
+              <a:rPr lang="en-US" sz="1800" kern="0" spc="108" dirty="0">
                 <a:solidFill>
                   <a:srgbClr val="F2EFE8">
                     <a:alpha val="55000"/>
@@ -17086,11 +16633,11 @@
           </a:bodyPr>
           <a:lstStyle/>
           <a:p>
-            <a:pPr algn="l" indent="0" marL="0">
-              <a:buNone/>
-            </a:pPr>
-            <a:r>
-              <a:rPr lang="en-US" sz="1800" spc="108" kern="0" dirty="0">
+            <a:pPr marL="0" indent="0" algn="l">
+              <a:buNone/>
+            </a:pPr>
+            <a:r>
+              <a:rPr lang="en-US" sz="1800" kern="0" spc="108" dirty="0">
                 <a:solidFill>
                   <a:srgbClr val="F2EFE8">
                     <a:alpha val="55000"/>
@@ -17129,11 +16676,11 @@
           </a:bodyPr>
           <a:lstStyle/>
           <a:p>
-            <a:pPr algn="l" indent="0" marL="0">
-              <a:buNone/>
-            </a:pPr>
-            <a:r>
-              <a:rPr lang="en-US" sz="1800" spc="324" kern="0" dirty="0">
+            <a:pPr marL="0" indent="0" algn="l">
+              <a:buNone/>
+            </a:pPr>
+            <a:r>
+              <a:rPr lang="en-US" sz="1800" kern="0" spc="324" dirty="0">
                 <a:solidFill>
                   <a:srgbClr val="FF5B1F"/>
                 </a:solidFill>
@@ -17170,14 +16717,14 @@
           </a:bodyPr>
           <a:lstStyle/>
           <a:p>
-            <a:pPr algn="l" indent="0" marL="0">
+            <a:pPr marL="0" indent="0" algn="l">
               <a:lnSpc>
                 <a:spcPct val="96000"/>
               </a:lnSpc>
               <a:buNone/>
             </a:pPr>
             <a:r>
-              <a:rPr lang="en-US" sz="7200" spc="-180" kern="0" dirty="0">
+              <a:rPr lang="en-US" sz="7200" kern="0" spc="-180" dirty="0">
                 <a:solidFill>
                   <a:srgbClr val="F2EFE8"/>
                 </a:solidFill>
@@ -17187,14 +16734,8 @@
               </a:rPr>
               <a:t>Seven prompts. </a:t>
             </a:r>
-            <a:pPr algn="l" indent="0" marL="0">
-              <a:lnSpc>
-                <a:spcPct val="96000"/>
-              </a:lnSpc>
-              <a:buNone/>
-            </a:pPr>
-            <a:r>
-              <a:rPr lang="en-US" sz="7200" i="1" spc="-180" kern="0" dirty="0">
+            <a:r>
+              <a:rPr lang="en-US" sz="7200" i="1" kern="0" spc="-180" dirty="0">
                 <a:solidFill>
                   <a:srgbClr val="FF5B1F"/>
                 </a:solidFill>
@@ -17258,11 +16799,11 @@
           </a:bodyPr>
           <a:lstStyle/>
           <a:p>
-            <a:pPr algn="l" indent="0" marL="0">
-              <a:buNone/>
-            </a:pPr>
-            <a:r>
-              <a:rPr lang="en-US" sz="1350" b="1" spc="108" kern="0" dirty="0">
+            <a:pPr marL="0" indent="0" algn="l">
+              <a:buNone/>
+            </a:pPr>
+            <a:r>
+              <a:rPr lang="en-US" sz="1350" b="1" kern="0" spc="108" dirty="0">
                 <a:solidFill>
                   <a:srgbClr val="FF5B1F"/>
                 </a:solidFill>
@@ -17299,14 +16840,14 @@
           </a:bodyPr>
           <a:lstStyle/>
           <a:p>
-            <a:pPr algn="l" indent="0" marL="0">
+            <a:pPr marL="0" indent="0" algn="l">
               <a:lnSpc>
                 <a:spcPct val="105000"/>
               </a:lnSpc>
               <a:buNone/>
             </a:pPr>
             <a:r>
-              <a:rPr lang="en-US" sz="2250" spc="-34" kern="0" dirty="0">
+              <a:rPr lang="en-US" sz="2250" kern="0" spc="-34" dirty="0">
                 <a:solidFill>
                   <a:srgbClr val="F2EFE8"/>
                 </a:solidFill>
@@ -17383,7 +16924,7 @@
           </a:bodyPr>
           <a:lstStyle/>
           <a:p>
-            <a:pPr algn="l" indent="0" marL="0">
+            <a:pPr marL="0" indent="0" algn="l">
               <a:lnSpc>
                 <a:spcPct val="150000"/>
               </a:lnSpc>
@@ -17403,7 +16944,7 @@
             <a:endParaRPr lang="en-US" sz="1125" dirty="0"/>
           </a:p>
           <a:p>
-            <a:pPr algn="l" indent="0" marL="0">
+            <a:pPr marL="0" indent="0" algn="l">
               <a:lnSpc>
                 <a:spcPct val="150000"/>
               </a:lnSpc>
@@ -17423,7 +16964,7 @@
             <a:endParaRPr lang="en-US" sz="1125" dirty="0"/>
           </a:p>
           <a:p>
-            <a:pPr algn="l" indent="0" marL="0">
+            <a:pPr marL="0" indent="0" algn="l">
               <a:lnSpc>
                 <a:spcPct val="150000"/>
               </a:lnSpc>
@@ -17443,7 +16984,7 @@
             <a:endParaRPr lang="en-US" sz="1125" dirty="0"/>
           </a:p>
           <a:p>
-            <a:pPr algn="l" indent="0" marL="0">
+            <a:pPr marL="0" indent="0" algn="l">
               <a:lnSpc>
                 <a:spcPct val="150000"/>
               </a:lnSpc>
@@ -17514,11 +17055,11 @@
           </a:bodyPr>
           <a:lstStyle/>
           <a:p>
-            <a:pPr algn="l" indent="0" marL="0">
-              <a:buNone/>
-            </a:pPr>
-            <a:r>
-              <a:rPr lang="en-US" sz="1350" b="1" spc="108" kern="0" dirty="0">
+            <a:pPr marL="0" indent="0" algn="l">
+              <a:buNone/>
+            </a:pPr>
+            <a:r>
+              <a:rPr lang="en-US" sz="1350" b="1" kern="0" spc="108" dirty="0">
                 <a:solidFill>
                   <a:srgbClr val="FF5B1F"/>
                 </a:solidFill>
@@ -17555,14 +17096,14 @@
           </a:bodyPr>
           <a:lstStyle/>
           <a:p>
-            <a:pPr algn="l" indent="0" marL="0">
+            <a:pPr marL="0" indent="0" algn="l">
               <a:lnSpc>
                 <a:spcPct val="105000"/>
               </a:lnSpc>
               <a:buNone/>
             </a:pPr>
             <a:r>
-              <a:rPr lang="en-US" sz="2250" spc="-34" kern="0" dirty="0">
+              <a:rPr lang="en-US" sz="2250" kern="0" spc="-34" dirty="0">
                 <a:solidFill>
                   <a:srgbClr val="F2EFE8"/>
                 </a:solidFill>
@@ -17639,7 +17180,7 @@
           </a:bodyPr>
           <a:lstStyle/>
           <a:p>
-            <a:pPr algn="l" indent="0" marL="0">
+            <a:pPr marL="0" indent="0" algn="l">
               <a:lnSpc>
                 <a:spcPct val="150000"/>
               </a:lnSpc>
@@ -17659,7 +17200,7 @@
             <a:endParaRPr lang="en-US" sz="1125" dirty="0"/>
           </a:p>
           <a:p>
-            <a:pPr algn="l" indent="0" marL="0">
+            <a:pPr marL="0" indent="0" algn="l">
               <a:lnSpc>
                 <a:spcPct val="150000"/>
               </a:lnSpc>
@@ -17679,7 +17220,7 @@
             <a:endParaRPr lang="en-US" sz="1125" dirty="0"/>
           </a:p>
           <a:p>
-            <a:pPr algn="l" indent="0" marL="0">
+            <a:pPr marL="0" indent="0" algn="l">
               <a:lnSpc>
                 <a:spcPct val="150000"/>
               </a:lnSpc>
@@ -17750,11 +17291,11 @@
           </a:bodyPr>
           <a:lstStyle/>
           <a:p>
-            <a:pPr algn="l" indent="0" marL="0">
-              <a:buNone/>
-            </a:pPr>
-            <a:r>
-              <a:rPr lang="en-US" sz="1350" b="1" spc="108" kern="0" dirty="0">
+            <a:pPr marL="0" indent="0" algn="l">
+              <a:buNone/>
+            </a:pPr>
+            <a:r>
+              <a:rPr lang="en-US" sz="1350" b="1" kern="0" spc="108" dirty="0">
                 <a:solidFill>
                   <a:srgbClr val="FF5B1F"/>
                 </a:solidFill>
@@ -17791,14 +17332,14 @@
           </a:bodyPr>
           <a:lstStyle/>
           <a:p>
-            <a:pPr algn="l" indent="0" marL="0">
+            <a:pPr marL="0" indent="0" algn="l">
               <a:lnSpc>
                 <a:spcPct val="105000"/>
               </a:lnSpc>
               <a:buNone/>
             </a:pPr>
             <a:r>
-              <a:rPr lang="en-US" sz="2250" spc="-34" kern="0" dirty="0">
+              <a:rPr lang="en-US" sz="2250" kern="0" spc="-34" dirty="0">
                 <a:solidFill>
                   <a:srgbClr val="F2EFE8"/>
                 </a:solidFill>
@@ -17875,7 +17416,7 @@
           </a:bodyPr>
           <a:lstStyle/>
           <a:p>
-            <a:pPr algn="l" indent="0" marL="0">
+            <a:pPr marL="0" indent="0" algn="l">
               <a:lnSpc>
                 <a:spcPct val="150000"/>
               </a:lnSpc>
@@ -17895,7 +17436,7 @@
             <a:endParaRPr lang="en-US" sz="1125" dirty="0"/>
           </a:p>
           <a:p>
-            <a:pPr algn="l" indent="0" marL="0">
+            <a:pPr marL="0" indent="0" algn="l">
               <a:lnSpc>
                 <a:spcPct val="150000"/>
               </a:lnSpc>
@@ -17915,7 +17456,7 @@
             <a:endParaRPr lang="en-US" sz="1125" dirty="0"/>
           </a:p>
           <a:p>
-            <a:pPr algn="l" indent="0" marL="0">
+            <a:pPr marL="0" indent="0" algn="l">
               <a:lnSpc>
                 <a:spcPct val="150000"/>
               </a:lnSpc>
@@ -17986,11 +17527,11 @@
           </a:bodyPr>
           <a:lstStyle/>
           <a:p>
-            <a:pPr algn="l" indent="0" marL="0">
-              <a:buNone/>
-            </a:pPr>
-            <a:r>
-              <a:rPr lang="en-US" sz="1350" b="1" spc="108" kern="0" dirty="0">
+            <a:pPr marL="0" indent="0" algn="l">
+              <a:buNone/>
+            </a:pPr>
+            <a:r>
+              <a:rPr lang="en-US" sz="1350" b="1" kern="0" spc="108" dirty="0">
                 <a:solidFill>
                   <a:srgbClr val="FF5B1F"/>
                 </a:solidFill>
@@ -18027,14 +17568,14 @@
           </a:bodyPr>
           <a:lstStyle/>
           <a:p>
-            <a:pPr algn="l" indent="0" marL="0">
+            <a:pPr marL="0" indent="0" algn="l">
               <a:lnSpc>
                 <a:spcPct val="105000"/>
               </a:lnSpc>
               <a:buNone/>
             </a:pPr>
             <a:r>
-              <a:rPr lang="en-US" sz="2250" spc="-34" kern="0" dirty="0">
+              <a:rPr lang="en-US" sz="2250" kern="0" spc="-34" dirty="0">
                 <a:solidFill>
                   <a:srgbClr val="F2EFE8"/>
                 </a:solidFill>
@@ -18111,7 +17652,7 @@
           </a:bodyPr>
           <a:lstStyle/>
           <a:p>
-            <a:pPr algn="l" indent="0" marL="0">
+            <a:pPr marL="0" indent="0" algn="l">
               <a:lnSpc>
                 <a:spcPct val="150000"/>
               </a:lnSpc>
@@ -18131,7 +17672,7 @@
             <a:endParaRPr lang="en-US" sz="1125" dirty="0"/>
           </a:p>
           <a:p>
-            <a:pPr algn="l" indent="0" marL="0">
+            <a:pPr marL="0" indent="0" algn="l">
               <a:lnSpc>
                 <a:spcPct val="150000"/>
               </a:lnSpc>
@@ -18151,7 +17692,7 @@
             <a:endParaRPr lang="en-US" sz="1125" dirty="0"/>
           </a:p>
           <a:p>
-            <a:pPr algn="l" indent="0" marL="0">
+            <a:pPr marL="0" indent="0" algn="l">
               <a:lnSpc>
                 <a:spcPct val="150000"/>
               </a:lnSpc>
@@ -18222,11 +17763,11 @@
           </a:bodyPr>
           <a:lstStyle/>
           <a:p>
-            <a:pPr algn="l" indent="0" marL="0">
-              <a:buNone/>
-            </a:pPr>
-            <a:r>
-              <a:rPr lang="en-US" sz="1350" b="1" spc="108" kern="0" dirty="0">
+            <a:pPr marL="0" indent="0" algn="l">
+              <a:buNone/>
+            </a:pPr>
+            <a:r>
+              <a:rPr lang="en-US" sz="1350" b="1" kern="0" spc="108" dirty="0">
                 <a:solidFill>
                   <a:srgbClr val="FF5B1F"/>
                 </a:solidFill>
@@ -18263,14 +17804,14 @@
           </a:bodyPr>
           <a:lstStyle/>
           <a:p>
-            <a:pPr algn="l" indent="0" marL="0">
+            <a:pPr marL="0" indent="0" algn="l">
               <a:lnSpc>
                 <a:spcPct val="105000"/>
               </a:lnSpc>
               <a:buNone/>
             </a:pPr>
             <a:r>
-              <a:rPr lang="en-US" sz="2250" spc="-34" kern="0" dirty="0">
+              <a:rPr lang="en-US" sz="2250" kern="0" spc="-34" dirty="0">
                 <a:solidFill>
                   <a:srgbClr val="F2EFE8"/>
                 </a:solidFill>
@@ -18347,7 +17888,7 @@
           </a:bodyPr>
           <a:lstStyle/>
           <a:p>
-            <a:pPr algn="l" indent="0" marL="0">
+            <a:pPr marL="0" indent="0" algn="l">
               <a:lnSpc>
                 <a:spcPct val="150000"/>
               </a:lnSpc>
@@ -18367,7 +17908,7 @@
             <a:endParaRPr lang="en-US" sz="1125" dirty="0"/>
           </a:p>
           <a:p>
-            <a:pPr algn="l" indent="0" marL="0">
+            <a:pPr marL="0" indent="0" algn="l">
               <a:lnSpc>
                 <a:spcPct val="150000"/>
               </a:lnSpc>
@@ -18387,7 +17928,7 @@
             <a:endParaRPr lang="en-US" sz="1125" dirty="0"/>
           </a:p>
           <a:p>
-            <a:pPr algn="l" indent="0" marL="0">
+            <a:pPr marL="0" indent="0" algn="l">
               <a:lnSpc>
                 <a:spcPct val="150000"/>
               </a:lnSpc>
@@ -18458,11 +17999,11 @@
           </a:bodyPr>
           <a:lstStyle/>
           <a:p>
-            <a:pPr algn="l" indent="0" marL="0">
-              <a:buNone/>
-            </a:pPr>
-            <a:r>
-              <a:rPr lang="en-US" sz="1350" b="1" spc="108" kern="0" dirty="0">
+            <a:pPr marL="0" indent="0" algn="l">
+              <a:buNone/>
+            </a:pPr>
+            <a:r>
+              <a:rPr lang="en-US" sz="1350" b="1" kern="0" spc="108" dirty="0">
                 <a:solidFill>
                   <a:srgbClr val="FF5B1F"/>
                 </a:solidFill>
@@ -18499,14 +18040,14 @@
           </a:bodyPr>
           <a:lstStyle/>
           <a:p>
-            <a:pPr algn="l" indent="0" marL="0">
+            <a:pPr marL="0" indent="0" algn="l">
               <a:lnSpc>
                 <a:spcPct val="105000"/>
               </a:lnSpc>
               <a:buNone/>
             </a:pPr>
             <a:r>
-              <a:rPr lang="en-US" sz="2250" spc="-34" kern="0" dirty="0">
+              <a:rPr lang="en-US" sz="2250" kern="0" spc="-34" dirty="0">
                 <a:solidFill>
                   <a:srgbClr val="F2EFE8"/>
                 </a:solidFill>
@@ -18583,7 +18124,7 @@
           </a:bodyPr>
           <a:lstStyle/>
           <a:p>
-            <a:pPr algn="l" indent="0" marL="0">
+            <a:pPr marL="0" indent="0" algn="l">
               <a:lnSpc>
                 <a:spcPct val="150000"/>
               </a:lnSpc>
@@ -18603,7 +18144,7 @@
             <a:endParaRPr lang="en-US" sz="1125" dirty="0"/>
           </a:p>
           <a:p>
-            <a:pPr algn="l" indent="0" marL="0">
+            <a:pPr marL="0" indent="0" algn="l">
               <a:lnSpc>
                 <a:spcPct val="150000"/>
               </a:lnSpc>
@@ -18623,7 +18164,7 @@
             <a:endParaRPr lang="en-US" sz="1125" dirty="0"/>
           </a:p>
           <a:p>
-            <a:pPr algn="l" indent="0" marL="0">
+            <a:pPr marL="0" indent="0" algn="l">
               <a:lnSpc>
                 <a:spcPct val="150000"/>
               </a:lnSpc>
@@ -18643,7 +18184,7 @@
             <a:endParaRPr lang="en-US" sz="1125" dirty="0"/>
           </a:p>
           <a:p>
-            <a:pPr algn="l" indent="0" marL="0">
+            <a:pPr marL="0" indent="0" algn="l">
               <a:lnSpc>
                 <a:spcPct val="150000"/>
               </a:lnSpc>
@@ -18663,7 +18204,7 @@
             <a:endParaRPr lang="en-US" sz="1125" dirty="0"/>
           </a:p>
           <a:p>
-            <a:pPr algn="l" indent="0" marL="0">
+            <a:pPr marL="0" indent="0" algn="l">
               <a:lnSpc>
                 <a:spcPct val="150000"/>
               </a:lnSpc>
@@ -18683,7 +18224,7 @@
             <a:endParaRPr lang="en-US" sz="1125" dirty="0"/>
           </a:p>
           <a:p>
-            <a:pPr algn="l" indent="0" marL="0">
+            <a:pPr marL="0" indent="0" algn="l">
               <a:lnSpc>
                 <a:spcPct val="150000"/>
               </a:lnSpc>
@@ -18754,11 +18295,11 @@
           </a:bodyPr>
           <a:lstStyle/>
           <a:p>
-            <a:pPr algn="l" indent="0" marL="0">
-              <a:buNone/>
-            </a:pPr>
-            <a:r>
-              <a:rPr lang="en-US" sz="1350" b="1" spc="108" kern="0" dirty="0">
+            <a:pPr marL="0" indent="0" algn="l">
+              <a:buNone/>
+            </a:pPr>
+            <a:r>
+              <a:rPr lang="en-US" sz="1350" b="1" kern="0" spc="108" dirty="0">
                 <a:solidFill>
                   <a:srgbClr val="FF5B1F"/>
                 </a:solidFill>
@@ -18795,14 +18336,14 @@
           </a:bodyPr>
           <a:lstStyle/>
           <a:p>
-            <a:pPr algn="l" indent="0" marL="0">
+            <a:pPr marL="0" indent="0" algn="l">
               <a:lnSpc>
                 <a:spcPct val="105000"/>
               </a:lnSpc>
               <a:buNone/>
             </a:pPr>
             <a:r>
-              <a:rPr lang="en-US" sz="2250" spc="-34" kern="0" dirty="0">
+              <a:rPr lang="en-US" sz="2250" kern="0" spc="-34" dirty="0">
                 <a:solidFill>
                   <a:srgbClr val="F2EFE8"/>
                 </a:solidFill>
@@ -18879,7 +18420,7 @@
           </a:bodyPr>
           <a:lstStyle/>
           <a:p>
-            <a:pPr algn="l" indent="0" marL="0">
+            <a:pPr marL="0" indent="0" algn="l">
               <a:lnSpc>
                 <a:spcPct val="150000"/>
               </a:lnSpc>
@@ -18899,7 +18440,7 @@
             <a:endParaRPr lang="en-US" sz="1125" dirty="0"/>
           </a:p>
           <a:p>
-            <a:pPr algn="l" indent="0" marL="0">
+            <a:pPr marL="0" indent="0" algn="l">
               <a:lnSpc>
                 <a:spcPct val="150000"/>
               </a:lnSpc>
@@ -18919,7 +18460,7 @@
             <a:endParaRPr lang="en-US" sz="1125" dirty="0"/>
           </a:p>
           <a:p>
-            <a:pPr algn="l" indent="0" marL="0">
+            <a:pPr marL="0" indent="0" algn="l">
               <a:lnSpc>
                 <a:spcPct val="150000"/>
               </a:lnSpc>
@@ -18988,11 +18529,11 @@
           </a:bodyPr>
           <a:lstStyle/>
           <a:p>
-            <a:pPr algn="l" indent="0" marL="0">
-              <a:buNone/>
-            </a:pPr>
-            <a:r>
-              <a:rPr lang="en-US" sz="1350" b="1" spc="108" kern="0" dirty="0">
+            <a:pPr marL="0" indent="0" algn="l">
+              <a:buNone/>
+            </a:pPr>
+            <a:r>
+              <a:rPr lang="en-US" sz="1350" b="1" kern="0" spc="108" dirty="0">
                 <a:solidFill>
                   <a:srgbClr val="0E0E0E"/>
                 </a:solidFill>
@@ -19029,14 +18570,14 @@
           </a:bodyPr>
           <a:lstStyle/>
           <a:p>
-            <a:pPr algn="l" indent="0" marL="0">
+            <a:pPr marL="0" indent="0" algn="l">
               <a:lnSpc>
                 <a:spcPct val="105000"/>
               </a:lnSpc>
               <a:buNone/>
             </a:pPr>
             <a:r>
-              <a:rPr lang="en-US" sz="2250" spc="-34" kern="0" dirty="0">
+              <a:rPr lang="en-US" sz="2250" kern="0" spc="-34" dirty="0">
                 <a:solidFill>
                   <a:srgbClr val="0E0E0E"/>
                 </a:solidFill>
@@ -19113,7 +18654,7 @@
           </a:bodyPr>
           <a:lstStyle/>
           <a:p>
-            <a:pPr algn="l" indent="0" marL="0">
+            <a:pPr marL="0" indent="0" algn="l">
               <a:lnSpc>
                 <a:spcPct val="150000"/>
               </a:lnSpc>
@@ -19133,7 +18674,7 @@
             <a:endParaRPr lang="en-US" sz="1125" dirty="0"/>
           </a:p>
           <a:p>
-            <a:pPr algn="l" indent="0" marL="0">
+            <a:pPr marL="0" indent="0" algn="l">
               <a:lnSpc>
                 <a:spcPct val="150000"/>
               </a:lnSpc>
@@ -19153,7 +18694,7 @@
             <a:endParaRPr lang="en-US" sz="1125" dirty="0"/>
           </a:p>
           <a:p>
-            <a:pPr algn="l" indent="0" marL="0">
+            <a:pPr marL="0" indent="0" algn="l">
               <a:lnSpc>
                 <a:spcPct val="150000"/>
               </a:lnSpc>
@@ -19173,7 +18714,7 @@
             <a:endParaRPr lang="en-US" sz="1125" dirty="0"/>
           </a:p>
           <a:p>
-            <a:pPr algn="l" indent="0" marL="0">
+            <a:pPr marL="0" indent="0" algn="l">
               <a:lnSpc>
                 <a:spcPct val="150000"/>
               </a:lnSpc>
@@ -19193,7 +18734,7 @@
             <a:endParaRPr lang="en-US" sz="1125" dirty="0"/>
           </a:p>
           <a:p>
-            <a:pPr algn="l" indent="0" marL="0">
+            <a:pPr marL="0" indent="0" algn="l">
               <a:lnSpc>
                 <a:spcPct val="150000"/>
               </a:lnSpc>
@@ -19237,11 +18778,11 @@
           </a:bodyPr>
           <a:lstStyle/>
           <a:p>
-            <a:pPr algn="l" indent="0" marL="0">
-              <a:buNone/>
-            </a:pPr>
-            <a:r>
-              <a:rPr lang="en-US" sz="1800" spc="108" kern="0" dirty="0">
+            <a:pPr marL="0" indent="0" algn="l">
+              <a:buNone/>
+            </a:pPr>
+            <a:r>
+              <a:rPr lang="en-US" sz="1800" kern="0" spc="108" dirty="0">
                 <a:solidFill>
                   <a:srgbClr val="F2EFE8">
                     <a:alpha val="50000"/>
@@ -19280,11 +18821,11 @@
           </a:bodyPr>
           <a:lstStyle/>
           <a:p>
-            <a:pPr algn="l" indent="0" marL="0">
-              <a:buNone/>
-            </a:pPr>
-            <a:r>
-              <a:rPr lang="en-US" sz="2700" i="1" spc="-54" kern="0" dirty="0">
+            <a:pPr marL="0" indent="0" algn="l">
+              <a:buNone/>
+            </a:pPr>
+            <a:r>
+              <a:rPr lang="en-US" sz="2700" i="1" kern="0" spc="-54" dirty="0">
                 <a:solidFill>
                   <a:srgbClr val="F2EFE8">
                     <a:alpha val="50000"/>
@@ -19316,6 +18857,7 @@
         <a:solidFill>
           <a:srgbClr val="D6FF3D"/>
         </a:solidFill>
+        <a:effectLst/>
       </p:bgPr>
     </p:bg>
     <p:spTree>
@@ -19355,11 +18897,11 @@
           </a:bodyPr>
           <a:lstStyle/>
           <a:p>
-            <a:pPr algn="l" indent="0" marL="0">
-              <a:buNone/>
-            </a:pPr>
-            <a:r>
-              <a:rPr lang="en-US" sz="1800" spc="108" kern="0" dirty="0">
+            <a:pPr marL="0" indent="0" algn="l">
+              <a:buNone/>
+            </a:pPr>
+            <a:r>
+              <a:rPr lang="en-US" sz="1800" kern="0" spc="108" dirty="0">
                 <a:solidFill>
                   <a:srgbClr val="0E0E0E">
                     <a:alpha val="70000"/>
@@ -19398,11 +18940,11 @@
           </a:bodyPr>
           <a:lstStyle/>
           <a:p>
-            <a:pPr algn="l" indent="0" marL="0">
-              <a:buNone/>
-            </a:pPr>
-            <a:r>
-              <a:rPr lang="en-US" sz="1800" spc="108" kern="0" dirty="0">
+            <a:pPr marL="0" indent="0" algn="l">
+              <a:buNone/>
+            </a:pPr>
+            <a:r>
+              <a:rPr lang="en-US" sz="1800" kern="0" spc="108" dirty="0">
                 <a:solidFill>
                   <a:srgbClr val="0E0E0E">
                     <a:alpha val="70000"/>
@@ -19441,14 +18983,14 @@
           </a:bodyPr>
           <a:lstStyle/>
           <a:p>
-            <a:pPr algn="l" indent="0" marL="0">
+            <a:pPr marL="0" indent="0" algn="l">
               <a:lnSpc>
                 <a:spcPct val="94000"/>
               </a:lnSpc>
               <a:buNone/>
             </a:pPr>
             <a:r>
-              <a:rPr lang="en-US" sz="15000" spc="-525" kern="0" dirty="0">
+              <a:rPr lang="en-US" sz="15000" kern="0" spc="-525" dirty="0">
                 <a:solidFill>
                   <a:srgbClr val="0E0E0E"/>
                 </a:solidFill>
@@ -19458,14 +19000,8 @@
               </a:rPr>
               <a:t>Confidence is </a:t>
             </a:r>
-            <a:pPr algn="l" indent="0" marL="0">
-              <a:lnSpc>
-                <a:spcPct val="94000"/>
-              </a:lnSpc>
-              <a:buNone/>
-            </a:pPr>
-            <a:r>
-              <a:rPr lang="en-US" sz="15000" i="1" spc="-525" kern="0" dirty="0">
+            <a:r>
+              <a:rPr lang="en-US" sz="15000" i="1" kern="0" spc="-525" dirty="0">
                 <a:solidFill>
                   <a:srgbClr val="FF3355"/>
                 </a:solidFill>
@@ -19475,14 +19011,8 @@
               </a:rPr>
               <a:t>not </a:t>
             </a:r>
-            <a:pPr algn="l" indent="0" marL="0">
-              <a:lnSpc>
-                <a:spcPct val="94000"/>
-              </a:lnSpc>
-              <a:buNone/>
-            </a:pPr>
-            <a:r>
-              <a:rPr lang="en-US" sz="15000" spc="-525" kern="0" dirty="0">
+            <a:r>
+              <a:rPr lang="en-US" sz="15000" kern="0" spc="-525" dirty="0">
                 <a:solidFill>
                   <a:srgbClr val="0E0E0E"/>
                 </a:solidFill>
@@ -19539,11 +19069,11 @@
           </a:bodyPr>
           <a:lstStyle/>
           <a:p>
-            <a:pPr algn="l" indent="0" marL="0">
-              <a:buNone/>
-            </a:pPr>
-            <a:r>
-              <a:rPr lang="en-US" sz="1650" b="1" spc="66" kern="0" dirty="0">
+            <a:pPr marL="0" indent="0" algn="l">
+              <a:buNone/>
+            </a:pPr>
+            <a:r>
+              <a:rPr lang="en-US" sz="1650" b="1" kern="0" spc="66" dirty="0">
                 <a:solidFill>
                   <a:srgbClr val="FF3355"/>
                 </a:solidFill>
@@ -19580,7 +19110,7 @@
           </a:bodyPr>
           <a:lstStyle/>
           <a:p>
-            <a:pPr algn="l" indent="0" marL="0">
+            <a:pPr marL="0" indent="0" algn="l">
               <a:lnSpc>
                 <a:spcPct val="145000"/>
               </a:lnSpc>
@@ -19624,11 +19154,11 @@
           </a:bodyPr>
           <a:lstStyle/>
           <a:p>
-            <a:pPr algn="l" indent="0" marL="0">
-              <a:buNone/>
-            </a:pPr>
-            <a:r>
-              <a:rPr lang="en-US" sz="1650" b="1" spc="66" kern="0" dirty="0">
+            <a:pPr marL="0" indent="0" algn="l">
+              <a:buNone/>
+            </a:pPr>
+            <a:r>
+              <a:rPr lang="en-US" sz="1650" b="1" kern="0" spc="66" dirty="0">
                 <a:solidFill>
                   <a:srgbClr val="FF3355"/>
                 </a:solidFill>
@@ -19665,7 +19195,7 @@
           </a:bodyPr>
           <a:lstStyle/>
           <a:p>
-            <a:pPr algn="l" indent="0" marL="0">
+            <a:pPr marL="0" indent="0" algn="l">
               <a:lnSpc>
                 <a:spcPct val="145000"/>
               </a:lnSpc>
@@ -19709,11 +19239,11 @@
           </a:bodyPr>
           <a:lstStyle/>
           <a:p>
-            <a:pPr algn="l" indent="0" marL="0">
-              <a:buNone/>
-            </a:pPr>
-            <a:r>
-              <a:rPr lang="en-US" sz="1650" b="1" spc="66" kern="0" dirty="0">
+            <a:pPr marL="0" indent="0" algn="l">
+              <a:buNone/>
+            </a:pPr>
+            <a:r>
+              <a:rPr lang="en-US" sz="1650" b="1" kern="0" spc="66" dirty="0">
                 <a:solidFill>
                   <a:srgbClr val="FF3355"/>
                 </a:solidFill>
@@ -19750,7 +19280,7 @@
           </a:bodyPr>
           <a:lstStyle/>
           <a:p>
-            <a:pPr algn="l" indent="0" marL="0">
+            <a:pPr marL="0" indent="0" algn="l">
               <a:lnSpc>
                 <a:spcPct val="145000"/>
               </a:lnSpc>
@@ -19794,11 +19324,11 @@
           </a:bodyPr>
           <a:lstStyle/>
           <a:p>
-            <a:pPr algn="l" indent="0" marL="0">
-              <a:buNone/>
-            </a:pPr>
-            <a:r>
-              <a:rPr lang="en-US" sz="1800" spc="108" kern="0" dirty="0">
+            <a:pPr marL="0" indent="0" algn="l">
+              <a:buNone/>
+            </a:pPr>
+            <a:r>
+              <a:rPr lang="en-US" sz="1800" kern="0" spc="108" dirty="0">
                 <a:solidFill>
                   <a:srgbClr val="0E0E0E">
                     <a:alpha val="70000"/>
@@ -19837,11 +19367,11 @@
           </a:bodyPr>
           <a:lstStyle/>
           <a:p>
-            <a:pPr algn="l" indent="0" marL="0">
-              <a:buNone/>
-            </a:pPr>
-            <a:r>
-              <a:rPr lang="en-US" sz="2700" i="1" spc="-54" kern="0" dirty="0">
+            <a:pPr marL="0" indent="0" algn="l">
+              <a:buNone/>
+            </a:pPr>
+            <a:r>
+              <a:rPr lang="en-US" sz="2700" i="1" kern="0" spc="-54" dirty="0">
                 <a:solidFill>
                   <a:srgbClr val="0E0E0E">
                     <a:alpha val="70000"/>
@@ -19873,6 +19403,7 @@
         <a:solidFill>
           <a:srgbClr val="F2EFE8"/>
         </a:solidFill>
+        <a:effectLst/>
       </p:bgPr>
     </p:bg>
     <p:spTree>
@@ -19932,11 +19463,11 @@
           </a:bodyPr>
           <a:lstStyle/>
           <a:p>
-            <a:pPr algn="l" indent="0" marL="0">
-              <a:buNone/>
-            </a:pPr>
-            <a:r>
-              <a:rPr lang="en-US" sz="1800" spc="108" kern="0" dirty="0">
+            <a:pPr marL="0" indent="0" algn="l">
+              <a:buNone/>
+            </a:pPr>
+            <a:r>
+              <a:rPr lang="en-US" sz="1800" kern="0" spc="108" dirty="0">
                 <a:solidFill>
                   <a:srgbClr val="888076"/>
                 </a:solidFill>
@@ -19973,11 +19504,11 @@
           </a:bodyPr>
           <a:lstStyle/>
           <a:p>
-            <a:pPr algn="l" indent="0" marL="0">
-              <a:buNone/>
-            </a:pPr>
-            <a:r>
-              <a:rPr lang="en-US" sz="1800" spc="108" kern="0" dirty="0">
+            <a:pPr marL="0" indent="0" algn="l">
+              <a:buNone/>
+            </a:pPr>
+            <a:r>
+              <a:rPr lang="en-US" sz="1800" kern="0" spc="108" dirty="0">
                 <a:solidFill>
                   <a:srgbClr val="888076"/>
                 </a:solidFill>
@@ -20014,11 +19545,11 @@
           </a:bodyPr>
           <a:lstStyle/>
           <a:p>
-            <a:pPr algn="l" indent="0" marL="0">
-              <a:buNone/>
-            </a:pPr>
-            <a:r>
-              <a:rPr lang="en-US" sz="1800" spc="324" kern="0" dirty="0">
+            <a:pPr marL="0" indent="0" algn="l">
+              <a:buNone/>
+            </a:pPr>
+            <a:r>
+              <a:rPr lang="en-US" sz="1800" kern="0" spc="324" dirty="0">
                 <a:solidFill>
                   <a:srgbClr val="FF5B1F"/>
                 </a:solidFill>
@@ -20055,14 +19586,14 @@
           </a:bodyPr>
           <a:lstStyle/>
           <a:p>
-            <a:pPr algn="l" indent="0" marL="0">
+            <a:pPr marL="0" indent="0" algn="l">
               <a:lnSpc>
                 <a:spcPct val="92000"/>
               </a:lnSpc>
               <a:buNone/>
             </a:pPr>
             <a:r>
-              <a:rPr lang="en-US" sz="10500" spc="-315" kern="0" dirty="0">
+              <a:rPr lang="en-US" sz="10500" kern="0" spc="-315" dirty="0">
                 <a:solidFill>
                   <a:srgbClr val="0E0E0E"/>
                 </a:solidFill>
@@ -20072,14 +19603,8 @@
               </a:rPr>
               <a:t>AI </a:t>
             </a:r>
-            <a:pPr algn="l" indent="0" marL="0">
-              <a:lnSpc>
-                <a:spcPct val="92000"/>
-              </a:lnSpc>
-              <a:buNone/>
-            </a:pPr>
-            <a:r>
-              <a:rPr lang="en-US" sz="10500" i="1" spc="-315" kern="0" dirty="0">
+            <a:r>
+              <a:rPr lang="en-US" sz="10500" i="1" kern="0" spc="-315" dirty="0">
                 <a:solidFill>
                   <a:srgbClr val="0E0E0E"/>
                 </a:solidFill>
@@ -20089,14 +19614,8 @@
               </a:rPr>
               <a:t>does not </a:t>
             </a:r>
-            <a:pPr algn="l" indent="0" marL="0">
-              <a:lnSpc>
-                <a:spcPct val="92000"/>
-              </a:lnSpc>
-              <a:buNone/>
-            </a:pPr>
-            <a:r>
-              <a:rPr lang="en-US" sz="10500" spc="-315" kern="0" dirty="0">
+            <a:r>
+              <a:rPr lang="en-US" sz="10500" kern="0" spc="-315" dirty="0">
                 <a:solidFill>
                   <a:srgbClr val="0E0E0E"/>
                 </a:solidFill>
@@ -20155,11 +19674,11 @@
           </a:bodyPr>
           <a:lstStyle/>
           <a:p>
-            <a:pPr algn="l" indent="0" marL="0">
-              <a:buNone/>
-            </a:pPr>
-            <a:r>
-              <a:rPr lang="en-US" sz="1350" spc="243" kern="0" dirty="0">
+            <a:pPr marL="0" indent="0" algn="l">
+              <a:buNone/>
+            </a:pPr>
+            <a:r>
+              <a:rPr lang="en-US" sz="1350" kern="0" spc="243" dirty="0">
                 <a:solidFill>
                   <a:srgbClr val="FF5B1F"/>
                 </a:solidFill>
@@ -20196,7 +19715,7 @@
           </a:bodyPr>
           <a:lstStyle/>
           <a:p>
-            <a:pPr algn="l" indent="0" marL="0">
+            <a:pPr marL="0" indent="0" algn="l">
               <a:lnSpc>
                 <a:spcPct val="110000"/>
               </a:lnSpc>
@@ -20240,11 +19759,11 @@
           </a:bodyPr>
           <a:lstStyle/>
           <a:p>
-            <a:pPr algn="l" indent="0" marL="0">
-              <a:buNone/>
-            </a:pPr>
-            <a:r>
-              <a:rPr lang="en-US" sz="1350" b="1" spc="54" kern="0" dirty="0">
+            <a:pPr marL="0" indent="0" algn="l">
+              <a:buNone/>
+            </a:pPr>
+            <a:r>
+              <a:rPr lang="en-US" sz="1350" b="1" kern="0" spc="54" dirty="0">
                 <a:solidFill>
                   <a:srgbClr val="FF3355"/>
                 </a:solidFill>
@@ -20281,7 +19800,7 @@
           </a:bodyPr>
           <a:lstStyle/>
           <a:p>
-            <a:pPr algn="l" indent="0" marL="0">
+            <a:pPr marL="0" indent="0" algn="l">
               <a:lnSpc>
                 <a:spcPct val="110000"/>
               </a:lnSpc>
@@ -20347,11 +19866,11 @@
           </a:bodyPr>
           <a:lstStyle/>
           <a:p>
-            <a:pPr algn="l" indent="0" marL="0">
-              <a:buNone/>
-            </a:pPr>
-            <a:r>
-              <a:rPr lang="en-US" sz="1350" spc="243" kern="0" dirty="0">
+            <a:pPr marL="0" indent="0" algn="l">
+              <a:buNone/>
+            </a:pPr>
+            <a:r>
+              <a:rPr lang="en-US" sz="1350" kern="0" spc="243" dirty="0">
                 <a:solidFill>
                   <a:srgbClr val="FF5B1F"/>
                 </a:solidFill>
@@ -20388,7 +19907,7 @@
           </a:bodyPr>
           <a:lstStyle/>
           <a:p>
-            <a:pPr algn="l" indent="0" marL="0">
+            <a:pPr marL="0" indent="0" algn="l">
               <a:lnSpc>
                 <a:spcPct val="110000"/>
               </a:lnSpc>
@@ -20432,11 +19951,11 @@
           </a:bodyPr>
           <a:lstStyle/>
           <a:p>
-            <a:pPr algn="l" indent="0" marL="0">
-              <a:buNone/>
-            </a:pPr>
-            <a:r>
-              <a:rPr lang="en-US" sz="1350" b="1" spc="54" kern="0" dirty="0">
+            <a:pPr marL="0" indent="0" algn="l">
+              <a:buNone/>
+            </a:pPr>
+            <a:r>
+              <a:rPr lang="en-US" sz="1350" b="1" kern="0" spc="54" dirty="0">
                 <a:solidFill>
                   <a:srgbClr val="FF3355"/>
                 </a:solidFill>
@@ -20473,7 +19992,7 @@
           </a:bodyPr>
           <a:lstStyle/>
           <a:p>
-            <a:pPr algn="l" indent="0" marL="0">
+            <a:pPr marL="0" indent="0" algn="l">
               <a:lnSpc>
                 <a:spcPct val="110000"/>
               </a:lnSpc>
@@ -20539,11 +20058,11 @@
           </a:bodyPr>
           <a:lstStyle/>
           <a:p>
-            <a:pPr algn="l" indent="0" marL="0">
-              <a:buNone/>
-            </a:pPr>
-            <a:r>
-              <a:rPr lang="en-US" sz="1350" spc="243" kern="0" dirty="0">
+            <a:pPr marL="0" indent="0" algn="l">
+              <a:buNone/>
+            </a:pPr>
+            <a:r>
+              <a:rPr lang="en-US" sz="1350" kern="0" spc="243" dirty="0">
                 <a:solidFill>
                   <a:srgbClr val="FF5B1F"/>
                 </a:solidFill>
@@ -20580,7 +20099,7 @@
           </a:bodyPr>
           <a:lstStyle/>
           <a:p>
-            <a:pPr algn="l" indent="0" marL="0">
+            <a:pPr marL="0" indent="0" algn="l">
               <a:lnSpc>
                 <a:spcPct val="110000"/>
               </a:lnSpc>
@@ -20624,11 +20143,11 @@
           </a:bodyPr>
           <a:lstStyle/>
           <a:p>
-            <a:pPr algn="l" indent="0" marL="0">
-              <a:buNone/>
-            </a:pPr>
-            <a:r>
-              <a:rPr lang="en-US" sz="1350" b="1" spc="54" kern="0" dirty="0">
+            <a:pPr marL="0" indent="0" algn="l">
+              <a:buNone/>
+            </a:pPr>
+            <a:r>
+              <a:rPr lang="en-US" sz="1350" b="1" kern="0" spc="54" dirty="0">
                 <a:solidFill>
                   <a:srgbClr val="FF3355"/>
                 </a:solidFill>
@@ -20665,7 +20184,7 @@
           </a:bodyPr>
           <a:lstStyle/>
           <a:p>
-            <a:pPr algn="l" indent="0" marL="0">
+            <a:pPr marL="0" indent="0" algn="l">
               <a:lnSpc>
                 <a:spcPct val="110000"/>
               </a:lnSpc>
@@ -20709,14 +20228,14 @@
           </a:bodyPr>
           <a:lstStyle/>
           <a:p>
-            <a:pPr algn="l" indent="0" marL="0">
+            <a:pPr marL="0" indent="0" algn="l">
               <a:lnSpc>
                 <a:spcPct val="110000"/>
               </a:lnSpc>
               <a:buNone/>
             </a:pPr>
             <a:r>
-              <a:rPr lang="en-US" sz="2550" i="1" spc="-25" kern="0" dirty="0">
+              <a:rPr lang="en-US" sz="2550" i="1" kern="0" spc="-25" dirty="0">
                 <a:solidFill>
                   <a:srgbClr val="0E0E0E"/>
                 </a:solidFill>
@@ -20753,11 +20272,11 @@
           </a:bodyPr>
           <a:lstStyle/>
           <a:p>
-            <a:pPr algn="l" indent="0" marL="0">
-              <a:buNone/>
-            </a:pPr>
-            <a:r>
-              <a:rPr lang="en-US" sz="1800" spc="108" kern="0" dirty="0">
+            <a:pPr marL="0" indent="0" algn="l">
+              <a:buNone/>
+            </a:pPr>
+            <a:r>
+              <a:rPr lang="en-US" sz="1800" kern="0" spc="108" dirty="0">
                 <a:solidFill>
                   <a:srgbClr val="888076"/>
                 </a:solidFill>
@@ -20794,11 +20313,11 @@
           </a:bodyPr>
           <a:lstStyle/>
           <a:p>
-            <a:pPr algn="l" indent="0" marL="0">
-              <a:buNone/>
-            </a:pPr>
-            <a:r>
-              <a:rPr lang="en-US" sz="2700" i="1" spc="-54" kern="0" dirty="0">
+            <a:pPr marL="0" indent="0" algn="l">
+              <a:buNone/>
+            </a:pPr>
+            <a:r>
+              <a:rPr lang="en-US" sz="2700" i="1" kern="0" spc="-54" dirty="0">
                 <a:solidFill>
                   <a:srgbClr val="888076"/>
                 </a:solidFill>
@@ -20828,6 +20347,7 @@
         <a:solidFill>
           <a:srgbClr val="0E0E0E"/>
         </a:solidFill>
+        <a:effectLst/>
       </p:bgPr>
     </p:bg>
     <p:spTree>
@@ -20887,11 +20407,11 @@
           </a:bodyPr>
           <a:lstStyle/>
           <a:p>
-            <a:pPr algn="l" indent="0" marL="0">
-              <a:buNone/>
-            </a:pPr>
-            <a:r>
-              <a:rPr lang="en-US" sz="1800" spc="108" kern="0" dirty="0">
+            <a:pPr marL="0" indent="0" algn="l">
+              <a:buNone/>
+            </a:pPr>
+            <a:r>
+              <a:rPr lang="en-US" sz="1800" kern="0" spc="108" dirty="0">
                 <a:solidFill>
                   <a:srgbClr val="F2EFE8">
                     <a:alpha val="55000"/>
@@ -20930,11 +20450,11 @@
           </a:bodyPr>
           <a:lstStyle/>
           <a:p>
-            <a:pPr algn="l" indent="0" marL="0">
-              <a:buNone/>
-            </a:pPr>
-            <a:r>
-              <a:rPr lang="en-US" sz="1800" spc="108" kern="0" dirty="0">
+            <a:pPr marL="0" indent="0" algn="l">
+              <a:buNone/>
+            </a:pPr>
+            <a:r>
+              <a:rPr lang="en-US" sz="1800" kern="0" spc="108" dirty="0">
                 <a:solidFill>
                   <a:srgbClr val="F2EFE8">
                     <a:alpha val="55000"/>
@@ -20973,11 +20493,11 @@
           </a:bodyPr>
           <a:lstStyle/>
           <a:p>
-            <a:pPr algn="l" indent="0" marL="0">
-              <a:buNone/>
-            </a:pPr>
-            <a:r>
-              <a:rPr lang="en-US" sz="1800" spc="324" kern="0" dirty="0">
+            <a:pPr marL="0" indent="0" algn="l">
+              <a:buNone/>
+            </a:pPr>
+            <a:r>
+              <a:rPr lang="en-US" sz="1800" kern="0" spc="324" dirty="0">
                 <a:solidFill>
                   <a:srgbClr val="FF5B1F"/>
                 </a:solidFill>
@@ -21014,14 +20534,14 @@
           </a:bodyPr>
           <a:lstStyle/>
           <a:p>
-            <a:pPr algn="l" indent="0" marL="0">
+            <a:pPr marL="0" indent="0" algn="l">
               <a:lnSpc>
                 <a:spcPct val="92000"/>
               </a:lnSpc>
               <a:buNone/>
             </a:pPr>
             <a:r>
-              <a:rPr lang="en-US" sz="10500" spc="-315" kern="0" dirty="0">
+              <a:rPr lang="en-US" sz="10500" kern="0" spc="-315" dirty="0">
                 <a:solidFill>
                   <a:srgbClr val="F2EFE8"/>
                 </a:solidFill>
@@ -21031,14 +20551,8 @@
               </a:rPr>
               <a:t>Six months </a:t>
             </a:r>
-            <a:pPr algn="l" indent="0" marL="0">
-              <a:lnSpc>
-                <a:spcPct val="92000"/>
-              </a:lnSpc>
-              <a:buNone/>
-            </a:pPr>
-            <a:r>
-              <a:rPr lang="en-US" sz="10500" i="1" spc="-315" kern="0" dirty="0">
+            <a:r>
+              <a:rPr lang="en-US" sz="10500" i="1" kern="0" spc="-315" dirty="0">
                 <a:solidFill>
                   <a:srgbClr val="FF5B1F"/>
                 </a:solidFill>
@@ -21121,11 +20635,11 @@
           </a:bodyPr>
           <a:lstStyle/>
           <a:p>
-            <a:pPr algn="l" indent="0" marL="0">
-              <a:buNone/>
-            </a:pPr>
-            <a:r>
-              <a:rPr lang="en-US" sz="1800" spc="180" kern="0" dirty="0">
+            <a:pPr marL="0" indent="0" algn="l">
+              <a:buNone/>
+            </a:pPr>
+            <a:r>
+              <a:rPr lang="en-US" sz="1800" kern="0" spc="180" dirty="0">
                 <a:solidFill>
                   <a:srgbClr val="FF3355"/>
                 </a:solidFill>
@@ -21162,14 +20676,14 @@
           </a:bodyPr>
           <a:lstStyle/>
           <a:p>
-            <a:pPr algn="l" indent="0" marL="0">
+            <a:pPr marL="0" indent="0" algn="l">
               <a:lnSpc>
                 <a:spcPct val="105000"/>
               </a:lnSpc>
               <a:buNone/>
             </a:pPr>
             <a:r>
-              <a:rPr lang="en-US" sz="3300" spc="-66" kern="0" dirty="0">
+              <a:rPr lang="en-US" sz="3300" kern="0" spc="-66" dirty="0">
                 <a:solidFill>
                   <a:srgbClr val="F2EFE8"/>
                 </a:solidFill>
@@ -21179,14 +20693,8 @@
               </a:rPr>
               <a:t>Can prompt. </a:t>
             </a:r>
-            <a:pPr algn="l" indent="0" marL="0">
-              <a:lnSpc>
-                <a:spcPct val="105000"/>
-              </a:lnSpc>
-              <a:buNone/>
-            </a:pPr>
-            <a:r>
-              <a:rPr lang="en-US" sz="3300" i="1" spc="-66" kern="0" dirty="0">
+            <a:r>
+              <a:rPr lang="en-US" sz="3300" i="1" kern="0" spc="-66" dirty="0">
                 <a:solidFill>
                   <a:srgbClr val="F2EFE8">
                     <a:alpha val="60000"/>
@@ -21225,7 +20733,7 @@
           </a:bodyPr>
           <a:lstStyle/>
           <a:p>
-            <a:pPr algn="l" indent="0" marL="0">
+            <a:pPr marL="0" indent="0" algn="l">
               <a:lnSpc>
                 <a:spcPct val="145000"/>
               </a:lnSpc>
@@ -21244,12 +20752,6 @@
               </a:rPr>
               <a:t>Capstone defence compromised by fabricated citations. Technical assessment failure on basic debugging. Comprehension debt is invisible until performance is required without the prompt interface. </a:t>
             </a:r>
-            <a:pPr algn="l" indent="0" marL="0">
-              <a:lnSpc>
-                <a:spcPct val="145000"/>
-              </a:lnSpc>
-              <a:buNone/>
-            </a:pPr>
             <a:r>
               <a:rPr lang="en-US" sz="1650" b="1" dirty="0">
                 <a:solidFill>
@@ -21332,11 +20834,11 @@
           </a:bodyPr>
           <a:lstStyle/>
           <a:p>
-            <a:pPr algn="l" indent="0" marL="0">
-              <a:buNone/>
-            </a:pPr>
-            <a:r>
-              <a:rPr lang="en-US" sz="1800" spc="180" kern="0" dirty="0">
+            <a:pPr marL="0" indent="0" algn="l">
+              <a:buNone/>
+            </a:pPr>
+            <a:r>
+              <a:rPr lang="en-US" sz="1800" kern="0" spc="180" dirty="0">
                 <a:solidFill>
                   <a:srgbClr val="FF5B1F"/>
                 </a:solidFill>
@@ -21373,14 +20875,14 @@
           </a:bodyPr>
           <a:lstStyle/>
           <a:p>
-            <a:pPr algn="l" indent="0" marL="0">
+            <a:pPr marL="0" indent="0" algn="l">
               <a:lnSpc>
                 <a:spcPct val="105000"/>
               </a:lnSpc>
               <a:buNone/>
             </a:pPr>
             <a:r>
-              <a:rPr lang="en-US" sz="3300" spc="-66" kern="0" dirty="0">
+              <a:rPr lang="en-US" sz="3300" kern="0" spc="-66" dirty="0">
                 <a:solidFill>
                   <a:srgbClr val="F2EFE8"/>
                 </a:solidFill>
@@ -21390,14 +20892,8 @@
               </a:rPr>
               <a:t>Can prompt. </a:t>
             </a:r>
-            <a:pPr algn="l" indent="0" marL="0">
-              <a:lnSpc>
-                <a:spcPct val="105000"/>
-              </a:lnSpc>
-              <a:buNone/>
-            </a:pPr>
-            <a:r>
-              <a:rPr lang="en-US" sz="3300" i="1" spc="-66" kern="0" dirty="0">
+            <a:r>
+              <a:rPr lang="en-US" sz="3300" i="1" kern="0" spc="-66" dirty="0">
                 <a:solidFill>
                   <a:srgbClr val="D6FF3D"/>
                 </a:solidFill>
@@ -21434,7 +20930,7 @@
           </a:bodyPr>
           <a:lstStyle/>
           <a:p>
-            <a:pPr algn="l" indent="0" marL="0">
+            <a:pPr marL="0" indent="0" algn="l">
               <a:lnSpc>
                 <a:spcPct val="145000"/>
               </a:lnSpc>
@@ -21453,12 +20949,6 @@
               </a:rPr>
               <a:t>Term average 91 percent. Capstone defended on schedule. Application deployed and validated against paying users. Employment offer within three weeks of graduation. </a:t>
             </a:r>
-            <a:pPr algn="l" indent="0" marL="0">
-              <a:lnSpc>
-                <a:spcPct val="145000"/>
-              </a:lnSpc>
-              <a:buNone/>
-            </a:pPr>
             <a:r>
               <a:rPr lang="en-US" sz="1650" b="1" dirty="0">
                 <a:solidFill>
@@ -21497,14 +20987,14 @@
           </a:bodyPr>
           <a:lstStyle/>
           <a:p>
-            <a:pPr algn="l" indent="0" marL="0">
+            <a:pPr marL="0" indent="0" algn="l">
               <a:lnSpc>
                 <a:spcPct val="110000"/>
               </a:lnSpc>
               <a:buNone/>
             </a:pPr>
             <a:r>
-              <a:rPr lang="en-US" sz="2550" i="1" spc="-25" kern="0" dirty="0">
+              <a:rPr lang="en-US" sz="2550" i="1" kern="0" spc="-25" dirty="0">
                 <a:solidFill>
                   <a:srgbClr val="FF5B1F"/>
                 </a:solidFill>
@@ -21514,14 +21004,8 @@
               </a:rPr>
               <a:t>The instruments did not generate the capability. </a:t>
             </a:r>
-            <a:pPr algn="l" indent="0" marL="0">
-              <a:lnSpc>
-                <a:spcPct val="110000"/>
-              </a:lnSpc>
-              <a:buNone/>
-            </a:pPr>
-            <a:r>
-              <a:rPr lang="en-US" sz="2550" i="1" spc="-25" kern="0" dirty="0">
+            <a:r>
+              <a:rPr lang="en-US" sz="2550" i="1" kern="0" spc="-25" dirty="0">
                 <a:solidFill>
                   <a:srgbClr val="F2EFE8"/>
                 </a:solidFill>
@@ -21531,14 +21015,8 @@
               </a:rPr>
               <a:t>The discipline did. </a:t>
             </a:r>
-            <a:pPr algn="l" indent="0" marL="0">
-              <a:lnSpc>
-                <a:spcPct val="110000"/>
-              </a:lnSpc>
-              <a:buNone/>
-            </a:pPr>
-            <a:r>
-              <a:rPr lang="en-US" sz="2550" i="1" spc="-25" kern="0" dirty="0">
+            <a:r>
+              <a:rPr lang="en-US" sz="2550" i="1" kern="0" spc="-25" dirty="0">
                 <a:solidFill>
                   <a:srgbClr val="FF5B1F"/>
                 </a:solidFill>
@@ -21575,11 +21053,11 @@
           </a:bodyPr>
           <a:lstStyle/>
           <a:p>
-            <a:pPr algn="l" indent="0" marL="0">
-              <a:buNone/>
-            </a:pPr>
-            <a:r>
-              <a:rPr lang="en-US" sz="1800" spc="108" kern="0" dirty="0">
+            <a:pPr marL="0" indent="0" algn="l">
+              <a:buNone/>
+            </a:pPr>
+            <a:r>
+              <a:rPr lang="en-US" sz="1800" kern="0" spc="108" dirty="0">
                 <a:solidFill>
                   <a:srgbClr val="F2EFE8">
                     <a:alpha val="50000"/>
@@ -21618,11 +21096,11 @@
           </a:bodyPr>
           <a:lstStyle/>
           <a:p>
-            <a:pPr algn="l" indent="0" marL="0">
-              <a:buNone/>
-            </a:pPr>
-            <a:r>
-              <a:rPr lang="en-US" sz="2700" i="1" spc="-54" kern="0" dirty="0">
+            <a:pPr marL="0" indent="0" algn="l">
+              <a:buNone/>
+            </a:pPr>
+            <a:r>
+              <a:rPr lang="en-US" sz="2700" i="1" kern="0" spc="-54" dirty="0">
                 <a:solidFill>
                   <a:srgbClr val="F2EFE8">
                     <a:alpha val="50000"/>
@@ -21654,6 +21132,7 @@
         <a:solidFill>
           <a:srgbClr val="FF5B1F"/>
         </a:solidFill>
+        <a:effectLst/>
       </p:bgPr>
     </p:bg>
     <p:spTree>
@@ -21715,7 +21194,7 @@
           </a:bodyPr>
           <a:lstStyle/>
           <a:p>
-            <a:pPr algn="l" indent="0" marL="0">
+            <a:pPr marL="0" indent="0" algn="l">
               <a:buNone/>
             </a:pPr>
             <a:r>
@@ -21758,7 +21237,7 @@
           </a:bodyPr>
           <a:lstStyle/>
           <a:p>
-            <a:pPr algn="l" indent="0" marL="0">
+            <a:pPr marL="0" indent="0" algn="l">
               <a:buNone/>
             </a:pPr>
             <a:r>
@@ -21801,11 +21280,11 @@
           </a:bodyPr>
           <a:lstStyle/>
           <a:p>
-            <a:pPr algn="l" indent="0" marL="0">
-              <a:buNone/>
-            </a:pPr>
-            <a:r>
-              <a:rPr lang="en-US" sz="1800" spc="324" kern="0" dirty="0">
+            <a:pPr marL="0" indent="0" algn="l">
+              <a:buNone/>
+            </a:pPr>
+            <a:r>
+              <a:rPr lang="en-US" sz="1800" kern="0" spc="324" dirty="0">
                 <a:solidFill>
                   <a:srgbClr val="0E0E0E"/>
                 </a:solidFill>
@@ -21842,14 +21321,14 @@
           </a:bodyPr>
           <a:lstStyle/>
           <a:p>
-            <a:pPr algn="l" indent="0" marL="0">
+            <a:pPr marL="0" indent="0" algn="l">
               <a:lnSpc>
                 <a:spcPct val="92000"/>
               </a:lnSpc>
               <a:buNone/>
             </a:pPr>
             <a:r>
-              <a:rPr lang="en-US" sz="12750" spc="-446" kern="0" dirty="0">
+              <a:rPr lang="en-US" sz="12750" kern="0" spc="-446" dirty="0">
                 <a:solidFill>
                   <a:srgbClr val="0E0E0E"/>
                 </a:solidFill>
@@ -21859,14 +21338,8 @@
               </a:rPr>
               <a:t>Use the instruments. Remain the </a:t>
             </a:r>
-            <a:pPr algn="l" indent="0" marL="0">
-              <a:lnSpc>
-                <a:spcPct val="92000"/>
-              </a:lnSpc>
-              <a:buNone/>
-            </a:pPr>
-            <a:r>
-              <a:rPr lang="en-US" sz="12750" i="1" spc="-446" kern="0" dirty="0">
+            <a:r>
+              <a:rPr lang="en-US" sz="12750" i="1" kern="0" spc="-446" dirty="0">
                 <a:solidFill>
                   <a:srgbClr val="0E0E0E"/>
                 </a:solidFill>
@@ -21923,7 +21396,7 @@
           </a:bodyPr>
           <a:lstStyle/>
           <a:p>
-            <a:pPr algn="l" indent="0" marL="0">
+            <a:pPr marL="0" indent="0" algn="l">
               <a:lnSpc>
                 <a:spcPct val="100000"/>
               </a:lnSpc>
@@ -21967,7 +21440,7 @@
           </a:bodyPr>
           <a:lstStyle/>
           <a:p>
-            <a:pPr algn="l" indent="0" marL="0">
+            <a:pPr marL="0" indent="0" algn="l">
               <a:lnSpc>
                 <a:spcPct val="110000"/>
               </a:lnSpc>
@@ -21984,12 +21457,6 @@
               </a:rPr>
               <a:t>Verify access to </a:t>
             </a:r>
-            <a:pPr algn="l" indent="0" marL="0">
-              <a:lnSpc>
-                <a:spcPct val="110000"/>
-              </a:lnSpc>
-              <a:buNone/>
-            </a:pPr>
             <a:r>
               <a:rPr lang="en-US" sz="2250" i="1" dirty="0">
                 <a:solidFill>
@@ -22001,12 +21468,6 @@
               </a:rPr>
               <a:t>two </a:t>
             </a:r>
-            <a:pPr algn="l" indent="0" marL="0">
-              <a:lnSpc>
-                <a:spcPct val="110000"/>
-              </a:lnSpc>
-              <a:buNone/>
-            </a:pPr>
             <a:r>
               <a:rPr lang="en-US" sz="2250" dirty="0">
                 <a:solidFill>
@@ -22045,7 +21506,7 @@
           </a:bodyPr>
           <a:lstStyle/>
           <a:p>
-            <a:pPr algn="l" indent="0" marL="0">
+            <a:pPr marL="0" indent="0" algn="l">
               <a:lnSpc>
                 <a:spcPct val="100000"/>
               </a:lnSpc>
@@ -22089,7 +21550,7 @@
           </a:bodyPr>
           <a:lstStyle/>
           <a:p>
-            <a:pPr algn="l" indent="0" marL="0">
+            <a:pPr marL="0" indent="0" algn="l">
               <a:lnSpc>
                 <a:spcPct val="110000"/>
               </a:lnSpc>
@@ -22106,12 +21567,6 @@
               </a:rPr>
               <a:t>Execute </a:t>
             </a:r>
-            <a:pPr algn="l" indent="0" marL="0">
-              <a:lnSpc>
-                <a:spcPct val="110000"/>
-              </a:lnSpc>
-              <a:buNone/>
-            </a:pPr>
             <a:r>
               <a:rPr lang="en-US" sz="2250" i="1" dirty="0">
                 <a:solidFill>
@@ -22123,12 +21578,6 @@
               </a:rPr>
               <a:t>one </a:t>
             </a:r>
-            <a:pPr algn="l" indent="0" marL="0">
-              <a:lnSpc>
-                <a:spcPct val="110000"/>
-              </a:lnSpc>
-              <a:buNone/>
-            </a:pPr>
             <a:r>
               <a:rPr lang="en-US" sz="2250" dirty="0">
                 <a:solidFill>
@@ -22167,7 +21616,7 @@
           </a:bodyPr>
           <a:lstStyle/>
           <a:p>
-            <a:pPr algn="l" indent="0" marL="0">
+            <a:pPr marL="0" indent="0" algn="l">
               <a:lnSpc>
                 <a:spcPct val="100000"/>
               </a:lnSpc>
@@ -22211,7 +21660,7 @@
           </a:bodyPr>
           <a:lstStyle/>
           <a:p>
-            <a:pPr algn="l" indent="0" marL="0">
+            <a:pPr marL="0" indent="0" algn="l">
               <a:lnSpc>
                 <a:spcPct val="110000"/>
               </a:lnSpc>
@@ -22255,11 +21704,11 @@
           </a:bodyPr>
           <a:lstStyle/>
           <a:p>
-            <a:pPr algn="l" indent="0" marL="0">
-              <a:buNone/>
-            </a:pPr>
-            <a:r>
-              <a:rPr lang="en-US" sz="1650" b="1" spc="66" kern="0" dirty="0">
+            <a:pPr marL="0" indent="0" algn="l">
+              <a:buNone/>
+            </a:pPr>
+            <a:r>
+              <a:rPr lang="en-US" sz="1650" b="1" kern="0" spc="66" dirty="0">
                 <a:solidFill>
                   <a:srgbClr val="0E0E0E"/>
                 </a:solidFill>
@@ -22296,7 +21745,7 @@
           </a:bodyPr>
           <a:lstStyle/>
           <a:p>
-            <a:pPr algn="r" indent="0" marL="0">
+            <a:pPr marL="0" indent="0" algn="r">
               <a:lnSpc>
                 <a:spcPct val="100000"/>
               </a:lnSpc>
@@ -22340,7 +21789,7 @@
           </a:bodyPr>
           <a:lstStyle/>
           <a:p>
-            <a:pPr algn="r" indent="0" marL="0">
+            <a:pPr marL="0" indent="0" algn="r">
               <a:lnSpc>
                 <a:spcPct val="140000"/>
               </a:lnSpc>
@@ -22379,6 +21828,7 @@
         <a:solidFill>
           <a:srgbClr val="FF5B1F"/>
         </a:solidFill>
+        <a:effectLst/>
       </p:bgPr>
     </p:bg>
     <p:spTree>
@@ -22418,11 +21868,11 @@
           </a:bodyPr>
           <a:lstStyle/>
           <a:p>
-            <a:pPr algn="l" indent="0" marL="0">
-              <a:buNone/>
-            </a:pPr>
-            <a:r>
-              <a:rPr lang="en-US" sz="1800" spc="108" kern="0" dirty="0">
+            <a:pPr marL="0" indent="0" algn="l">
+              <a:buNone/>
+            </a:pPr>
+            <a:r>
+              <a:rPr lang="en-US" sz="1800" kern="0" spc="108" dirty="0">
                 <a:solidFill>
                   <a:srgbClr val="0E0E0E">
                     <a:alpha val="70000"/>
@@ -22461,11 +21911,11 @@
           </a:bodyPr>
           <a:lstStyle/>
           <a:p>
-            <a:pPr algn="l" indent="0" marL="0">
-              <a:buNone/>
-            </a:pPr>
-            <a:r>
-              <a:rPr lang="en-US" sz="1800" spc="108" kern="0" dirty="0">
+            <a:pPr marL="0" indent="0" algn="l">
+              <a:buNone/>
+            </a:pPr>
+            <a:r>
+              <a:rPr lang="en-US" sz="1800" kern="0" spc="108" dirty="0">
                 <a:solidFill>
                   <a:srgbClr val="0E0E0E">
                     <a:alpha val="70000"/>
@@ -22504,11 +21954,11 @@
           </a:bodyPr>
           <a:lstStyle/>
           <a:p>
-            <a:pPr algn="l" indent="0" marL="0">
-              <a:buNone/>
-            </a:pPr>
-            <a:r>
-              <a:rPr lang="en-US" sz="1800" spc="324" kern="0" dirty="0">
+            <a:pPr marL="0" indent="0" algn="l">
+              <a:buNone/>
+            </a:pPr>
+            <a:r>
+              <a:rPr lang="en-US" sz="1800" kern="0" spc="324" dirty="0">
                 <a:solidFill>
                   <a:srgbClr val="0E0E0E"/>
                 </a:solidFill>
@@ -22545,14 +21995,14 @@
           </a:bodyPr>
           <a:lstStyle/>
           <a:p>
-            <a:pPr algn="l" indent="0" marL="0">
+            <a:pPr marL="0" indent="0" algn="l">
               <a:lnSpc>
                 <a:spcPct val="92000"/>
               </a:lnSpc>
               <a:buNone/>
             </a:pPr>
             <a:r>
-              <a:rPr lang="en-US" sz="12750" spc="-446" kern="0" dirty="0">
+              <a:rPr lang="en-US" sz="12750" kern="0" spc="-446" dirty="0">
                 <a:solidFill>
                   <a:srgbClr val="0E0E0E"/>
                 </a:solidFill>
@@ -22562,14 +22012,8 @@
               </a:rPr>
               <a:t>Use AI. Do not let AI </a:t>
             </a:r>
-            <a:pPr algn="l" indent="0" marL="0">
-              <a:lnSpc>
-                <a:spcPct val="92000"/>
-              </a:lnSpc>
-              <a:buNone/>
-            </a:pPr>
-            <a:r>
-              <a:rPr lang="en-US" sz="12750" i="1" spc="-446" kern="0" dirty="0">
+            <a:r>
+              <a:rPr lang="en-US" sz="12750" i="1" kern="0" spc="-446" dirty="0">
                 <a:solidFill>
                   <a:srgbClr val="0E0E0E"/>
                 </a:solidFill>
@@ -22626,11 +22070,11 @@
           </a:bodyPr>
           <a:lstStyle/>
           <a:p>
-            <a:pPr algn="l" indent="0" marL="0">
-              <a:buNone/>
-            </a:pPr>
-            <a:r>
-              <a:rPr lang="en-US" sz="1800" b="1" spc="72" kern="0" dirty="0">
+            <a:pPr marL="0" indent="0" algn="l">
+              <a:buNone/>
+            </a:pPr>
+            <a:r>
+              <a:rPr lang="en-US" sz="1800" b="1" kern="0" spc="72" dirty="0">
                 <a:solidFill>
                   <a:srgbClr val="0E0E0E"/>
                 </a:solidFill>
@@ -22667,7 +22111,7 @@
           </a:bodyPr>
           <a:lstStyle/>
           <a:p>
-            <a:pPr algn="l" indent="0" marL="0">
+            <a:pPr marL="0" indent="0" algn="l">
               <a:lnSpc>
                 <a:spcPct val="145000"/>
               </a:lnSpc>
@@ -22684,12 +22128,6 @@
               </a:rPr>
               <a:t>Supplies context. Constrains output. Verifies claims. Edits in their own voice. </a:t>
             </a:r>
-            <a:pPr algn="l" indent="0" marL="0">
-              <a:lnSpc>
-                <a:spcPct val="145000"/>
-              </a:lnSpc>
-              <a:buNone/>
-            </a:pPr>
             <a:r>
               <a:rPr lang="en-US" sz="2250" b="1" dirty="0">
                 <a:solidFill>
@@ -22728,11 +22166,11 @@
           </a:bodyPr>
           <a:lstStyle/>
           <a:p>
-            <a:pPr algn="l" indent="0" marL="0">
-              <a:buNone/>
-            </a:pPr>
-            <a:r>
-              <a:rPr lang="en-US" sz="1800" b="1" spc="72" kern="0" dirty="0">
+            <a:pPr marL="0" indent="0" algn="l">
+              <a:buNone/>
+            </a:pPr>
+            <a:r>
+              <a:rPr lang="en-US" sz="1800" b="1" kern="0" spc="72" dirty="0">
                 <a:solidFill>
                   <a:srgbClr val="0E0E0E"/>
                 </a:solidFill>
@@ -22769,7 +22207,7 @@
           </a:bodyPr>
           <a:lstStyle/>
           <a:p>
-            <a:pPr algn="l" indent="0" marL="0">
+            <a:pPr marL="0" indent="0" algn="l">
               <a:lnSpc>
                 <a:spcPct val="145000"/>
               </a:lnSpc>
@@ -22786,12 +22224,6 @@
               </a:rPr>
               <a:t>Issues open queries. Accepts first output. Submits unverified. </a:t>
             </a:r>
-            <a:pPr algn="l" indent="0" marL="0">
-              <a:lnSpc>
-                <a:spcPct val="145000"/>
-              </a:lnSpc>
-              <a:buNone/>
-            </a:pPr>
             <a:r>
               <a:rPr lang="en-US" sz="2250" b="1" dirty="0">
                 <a:solidFill>
@@ -22830,11 +22262,11 @@
           </a:bodyPr>
           <a:lstStyle/>
           <a:p>
-            <a:pPr algn="l" indent="0" marL="0">
-              <a:buNone/>
-            </a:pPr>
-            <a:r>
-              <a:rPr lang="en-US" sz="1800" spc="108" kern="0" dirty="0">
+            <a:pPr marL="0" indent="0" algn="l">
+              <a:buNone/>
+            </a:pPr>
+            <a:r>
+              <a:rPr lang="en-US" sz="1800" kern="0" spc="108" dirty="0">
                 <a:solidFill>
                   <a:srgbClr val="0E0E0E">
                     <a:alpha val="70000"/>
@@ -22873,11 +22305,11 @@
           </a:bodyPr>
           <a:lstStyle/>
           <a:p>
-            <a:pPr algn="l" indent="0" marL="0">
-              <a:buNone/>
-            </a:pPr>
-            <a:r>
-              <a:rPr lang="en-US" sz="2700" i="1" spc="-54" kern="0" dirty="0">
+            <a:pPr marL="0" indent="0" algn="l">
+              <a:buNone/>
+            </a:pPr>
+            <a:r>
+              <a:rPr lang="en-US" sz="2700" i="1" kern="0" spc="-54" dirty="0">
                 <a:solidFill>
                   <a:srgbClr val="0E0E0E">
                     <a:alpha val="70000"/>
@@ -22909,6 +22341,7 @@
         <a:solidFill>
           <a:srgbClr val="F2EFE8"/>
         </a:solidFill>
+        <a:effectLst/>
       </p:bgPr>
     </p:bg>
     <p:spTree>
@@ -22968,11 +22401,11 @@
           </a:bodyPr>
           <a:lstStyle/>
           <a:p>
-            <a:pPr algn="l" indent="0" marL="0">
-              <a:buNone/>
-            </a:pPr>
-            <a:r>
-              <a:rPr lang="en-US" sz="1800" spc="108" kern="0" dirty="0">
+            <a:pPr marL="0" indent="0" algn="l">
+              <a:buNone/>
+            </a:pPr>
+            <a:r>
+              <a:rPr lang="en-US" sz="1800" kern="0" spc="108" dirty="0">
                 <a:solidFill>
                   <a:srgbClr val="888076"/>
                 </a:solidFill>
@@ -23009,11 +22442,11 @@
           </a:bodyPr>
           <a:lstStyle/>
           <a:p>
-            <a:pPr algn="l" indent="0" marL="0">
-              <a:buNone/>
-            </a:pPr>
-            <a:r>
-              <a:rPr lang="en-US" sz="1800" spc="108" kern="0" dirty="0">
+            <a:pPr marL="0" indent="0" algn="l">
+              <a:buNone/>
+            </a:pPr>
+            <a:r>
+              <a:rPr lang="en-US" sz="1800" kern="0" spc="108" dirty="0">
                 <a:solidFill>
                   <a:srgbClr val="888076"/>
                 </a:solidFill>
@@ -23070,11 +22503,11 @@
           </a:bodyPr>
           <a:lstStyle/>
           <a:p>
-            <a:pPr algn="l" indent="0" marL="0">
-              <a:buNone/>
-            </a:pPr>
-            <a:r>
-              <a:rPr lang="en-US" sz="1800" spc="144" kern="0" dirty="0">
+            <a:pPr marL="0" indent="0" algn="l">
+              <a:buNone/>
+            </a:pPr>
+            <a:r>
+              <a:rPr lang="en-US" sz="1800" kern="0" spc="144" dirty="0">
                 <a:solidFill>
                   <a:srgbClr val="FF5B1F"/>
                 </a:solidFill>
@@ -23111,11 +22544,11 @@
           </a:bodyPr>
           <a:lstStyle/>
           <a:p>
-            <a:pPr algn="l" indent="0" marL="0">
-              <a:buNone/>
-            </a:pPr>
-            <a:r>
-              <a:rPr lang="en-US" sz="1800" spc="144" kern="0" dirty="0">
+            <a:pPr marL="0" indent="0" algn="l">
+              <a:buNone/>
+            </a:pPr>
+            <a:r>
+              <a:rPr lang="en-US" sz="1800" kern="0" spc="144" dirty="0">
                 <a:solidFill>
                   <a:srgbClr val="2A2A2A"/>
                 </a:solidFill>
@@ -23152,14 +22585,14 @@
           </a:bodyPr>
           <a:lstStyle/>
           <a:p>
-            <a:pPr algn="l" indent="0" marL="0">
+            <a:pPr marL="0" indent="0" algn="l">
               <a:lnSpc>
                 <a:spcPct val="92000"/>
               </a:lnSpc>
               <a:buNone/>
             </a:pPr>
             <a:r>
-              <a:rPr lang="en-US" sz="10500" spc="-315" kern="0" dirty="0">
+              <a:rPr lang="en-US" sz="10500" kern="0" spc="-315" dirty="0">
                 <a:solidFill>
                   <a:srgbClr val="0E0E0E"/>
                 </a:solidFill>
@@ -23169,14 +22602,8 @@
               </a:rPr>
               <a:t>The illusion of </a:t>
             </a:r>
-            <a:pPr algn="l" indent="0" marL="0">
-              <a:lnSpc>
-                <a:spcPct val="92000"/>
-              </a:lnSpc>
-              <a:buNone/>
-            </a:pPr>
-            <a:r>
-              <a:rPr lang="en-US" sz="10500" i="1" spc="-315" kern="0" dirty="0">
+            <a:r>
+              <a:rPr lang="en-US" sz="10500" i="1" kern="0" spc="-315" dirty="0">
                 <a:solidFill>
                   <a:srgbClr val="0E0E0E"/>
                 </a:solidFill>
@@ -23235,11 +22662,11 @@
           </a:bodyPr>
           <a:lstStyle/>
           <a:p>
-            <a:pPr algn="l" indent="0" marL="0">
-              <a:buNone/>
-            </a:pPr>
-            <a:r>
-              <a:rPr lang="en-US" sz="1800" spc="180" kern="0" dirty="0">
+            <a:pPr marL="0" indent="0" algn="l">
+              <a:buNone/>
+            </a:pPr>
+            <a:r>
+              <a:rPr lang="en-US" sz="1800" kern="0" spc="180" dirty="0">
                 <a:solidFill>
                   <a:srgbClr val="FF3355"/>
                 </a:solidFill>
@@ -23276,14 +22703,14 @@
           </a:bodyPr>
           <a:lstStyle/>
           <a:p>
-            <a:pPr algn="l" indent="0" marL="0">
+            <a:pPr marL="0" indent="0" algn="l">
               <a:lnSpc>
                 <a:spcPct val="105000"/>
               </a:lnSpc>
               <a:buNone/>
             </a:pPr>
             <a:r>
-              <a:rPr lang="en-US" sz="3300" spc="-66" kern="0" dirty="0">
+              <a:rPr lang="en-US" sz="3300" kern="0" spc="-66" dirty="0">
                 <a:solidFill>
                   <a:srgbClr val="0E0E0E"/>
                 </a:solidFill>
@@ -23362,7 +22789,7 @@
           </a:bodyPr>
           <a:lstStyle/>
           <a:p>
-            <a:pPr algn="l" indent="0" marL="0">
+            <a:pPr marL="0" indent="0" algn="l">
               <a:buNone/>
             </a:pPr>
             <a:r>
@@ -23403,7 +22830,7 @@
           </a:bodyPr>
           <a:lstStyle/>
           <a:p>
-            <a:pPr algn="l" indent="0" marL="0">
+            <a:pPr marL="0" indent="0" algn="l">
               <a:lnSpc>
                 <a:spcPct val="145000"/>
               </a:lnSpc>
@@ -23420,12 +22847,6 @@
               </a:rPr>
               <a:t>Reading a summary </a:t>
             </a:r>
-            <a:pPr algn="l" indent="0" marL="0">
-              <a:lnSpc>
-                <a:spcPct val="145000"/>
-              </a:lnSpc>
-              <a:buNone/>
-            </a:pPr>
             <a:r>
               <a:rPr lang="en-US" sz="1800" b="1" dirty="0">
                 <a:solidFill>
@@ -23437,12 +22858,6 @@
               </a:rPr>
               <a:t>is not encoding. </a:t>
             </a:r>
-            <a:pPr algn="l" indent="0" marL="0">
-              <a:lnSpc>
-                <a:spcPct val="145000"/>
-              </a:lnSpc>
-              <a:buNone/>
-            </a:pPr>
             <a:r>
               <a:rPr lang="en-US" sz="1800" dirty="0">
                 <a:solidFill>
@@ -23454,12 +22869,6 @@
               </a:rPr>
               <a:t>Roediger &amp; Karpicke (2006) demonstrated near-zero retention gains from re-reading. A summary is re-reading at higher density. </a:t>
             </a:r>
-            <a:pPr algn="l" indent="0" marL="0">
-              <a:lnSpc>
-                <a:spcPct val="145000"/>
-              </a:lnSpc>
-              <a:buNone/>
-            </a:pPr>
             <a:r>
               <a:rPr lang="en-US" sz="1800" i="1" dirty="0">
                 <a:solidFill>
@@ -23518,11 +22927,11 @@
           </a:bodyPr>
           <a:lstStyle/>
           <a:p>
-            <a:pPr algn="l" indent="0" marL="0">
-              <a:buNone/>
-            </a:pPr>
-            <a:r>
-              <a:rPr lang="en-US" sz="1800" spc="180" kern="0" dirty="0">
+            <a:pPr marL="0" indent="0" algn="l">
+              <a:buNone/>
+            </a:pPr>
+            <a:r>
+              <a:rPr lang="en-US" sz="1800" kern="0" spc="180" dirty="0">
                 <a:solidFill>
                   <a:srgbClr val="FF5B1F"/>
                 </a:solidFill>
@@ -23559,14 +22968,14 @@
           </a:bodyPr>
           <a:lstStyle/>
           <a:p>
-            <a:pPr algn="l" indent="0" marL="0">
+            <a:pPr marL="0" indent="0" algn="l">
               <a:lnSpc>
                 <a:spcPct val="105000"/>
               </a:lnSpc>
               <a:buNone/>
             </a:pPr>
             <a:r>
-              <a:rPr lang="en-US" sz="3300" spc="-66" kern="0" dirty="0">
+              <a:rPr lang="en-US" sz="3300" kern="0" spc="-66" dirty="0">
                 <a:solidFill>
                   <a:srgbClr val="0E0E0E"/>
                 </a:solidFill>
@@ -23576,14 +22985,8 @@
               </a:rPr>
               <a:t>"Architect a study system </a:t>
             </a:r>
-            <a:pPr algn="l" indent="0" marL="0">
-              <a:lnSpc>
-                <a:spcPct val="105000"/>
-              </a:lnSpc>
-              <a:buNone/>
-            </a:pPr>
-            <a:r>
-              <a:rPr lang="en-US" sz="3300" i="1" spc="-66" kern="0" dirty="0">
+            <a:r>
+              <a:rPr lang="en-US" sz="3300" i="1" kern="0" spc="-66" dirty="0">
                 <a:solidFill>
                   <a:srgbClr val="0E0E0E"/>
                 </a:solidFill>
@@ -23593,14 +22996,8 @@
               </a:rPr>
               <a:t>around </a:t>
             </a:r>
-            <a:pPr algn="l" indent="0" marL="0">
-              <a:lnSpc>
-                <a:spcPct val="105000"/>
-              </a:lnSpc>
-              <a:buNone/>
-            </a:pPr>
-            <a:r>
-              <a:rPr lang="en-US" sz="3300" spc="-66" kern="0" dirty="0">
+            <a:r>
+              <a:rPr lang="en-US" sz="3300" kern="0" spc="-66" dirty="0">
                 <a:solidFill>
                   <a:srgbClr val="0E0E0E"/>
                 </a:solidFill>
@@ -23610,14 +23007,8 @@
               </a:rPr>
               <a:t>me — do not study </a:t>
             </a:r>
-            <a:pPr algn="l" indent="0" marL="0">
-              <a:lnSpc>
-                <a:spcPct val="105000"/>
-              </a:lnSpc>
-              <a:buNone/>
-            </a:pPr>
-            <a:r>
-              <a:rPr lang="en-US" sz="3300" i="1" spc="-66" kern="0" dirty="0">
+            <a:r>
+              <a:rPr lang="en-US" sz="3300" i="1" kern="0" spc="-66" dirty="0">
                 <a:solidFill>
                   <a:srgbClr val="0E0E0E"/>
                 </a:solidFill>
@@ -23627,14 +23018,8 @@
               </a:rPr>
               <a:t>for </a:t>
             </a:r>
-            <a:pPr algn="l" indent="0" marL="0">
-              <a:lnSpc>
-                <a:spcPct val="105000"/>
-              </a:lnSpc>
-              <a:buNone/>
-            </a:pPr>
-            <a:r>
-              <a:rPr lang="en-US" sz="3300" spc="-66" kern="0" dirty="0">
+            <a:r>
+              <a:rPr lang="en-US" sz="3300" kern="0" spc="-66" dirty="0">
                 <a:solidFill>
                   <a:srgbClr val="0E0E0E"/>
                 </a:solidFill>
@@ -23671,7 +23056,7 @@
           </a:bodyPr>
           <a:lstStyle/>
           <a:p>
-            <a:pPr algn="l" indent="0" marL="0">
+            <a:pPr marL="0" indent="0" algn="l">
               <a:lnSpc>
                 <a:spcPct val="145000"/>
               </a:lnSpc>
@@ -23715,11 +23100,11 @@
           </a:bodyPr>
           <a:lstStyle/>
           <a:p>
-            <a:pPr algn="l" indent="0" marL="0">
-              <a:buNone/>
-            </a:pPr>
-            <a:r>
-              <a:rPr lang="en-US" sz="1800" spc="108" kern="0" dirty="0">
+            <a:pPr marL="0" indent="0" algn="l">
+              <a:buNone/>
+            </a:pPr>
+            <a:r>
+              <a:rPr lang="en-US" sz="1800" kern="0" spc="108" dirty="0">
                 <a:solidFill>
                   <a:srgbClr val="888076"/>
                 </a:solidFill>
@@ -23756,11 +23141,11 @@
           </a:bodyPr>
           <a:lstStyle/>
           <a:p>
-            <a:pPr algn="l" indent="0" marL="0">
-              <a:buNone/>
-            </a:pPr>
-            <a:r>
-              <a:rPr lang="en-US" sz="2700" i="1" spc="-54" kern="0" dirty="0">
+            <a:pPr marL="0" indent="0" algn="l">
+              <a:buNone/>
+            </a:pPr>
+            <a:r>
+              <a:rPr lang="en-US" sz="2700" i="1" kern="0" spc="-54" dirty="0">
                 <a:solidFill>
                   <a:srgbClr val="888076"/>
                 </a:solidFill>
@@ -23790,6 +23175,7 @@
         <a:solidFill>
           <a:srgbClr val="E8E3D6"/>
         </a:solidFill>
+        <a:effectLst/>
       </p:bgPr>
     </p:bg>
     <p:spTree>
@@ -23849,11 +23235,11 @@
           </a:bodyPr>
           <a:lstStyle/>
           <a:p>
-            <a:pPr algn="l" indent="0" marL="0">
-              <a:buNone/>
-            </a:pPr>
-            <a:r>
-              <a:rPr lang="en-US" sz="1800" spc="108" kern="0" dirty="0">
+            <a:pPr marL="0" indent="0" algn="l">
+              <a:buNone/>
+            </a:pPr>
+            <a:r>
+              <a:rPr lang="en-US" sz="1800" kern="0" spc="108" dirty="0">
                 <a:solidFill>
                   <a:srgbClr val="888076"/>
                 </a:solidFill>
@@ -23890,11 +23276,11 @@
           </a:bodyPr>
           <a:lstStyle/>
           <a:p>
-            <a:pPr algn="l" indent="0" marL="0">
-              <a:buNone/>
-            </a:pPr>
-            <a:r>
-              <a:rPr lang="en-US" sz="1800" spc="108" kern="0" dirty="0">
+            <a:pPr marL="0" indent="0" algn="l">
+              <a:buNone/>
+            </a:pPr>
+            <a:r>
+              <a:rPr lang="en-US" sz="1800" kern="0" spc="108" dirty="0">
                 <a:solidFill>
                   <a:srgbClr val="888076"/>
                 </a:solidFill>
@@ -23951,11 +23337,11 @@
           </a:bodyPr>
           <a:lstStyle/>
           <a:p>
-            <a:pPr algn="l" indent="0" marL="0">
-              <a:buNone/>
-            </a:pPr>
-            <a:r>
-              <a:rPr lang="en-US" sz="1800" spc="144" kern="0" dirty="0">
+            <a:pPr marL="0" indent="0" algn="l">
+              <a:buNone/>
+            </a:pPr>
+            <a:r>
+              <a:rPr lang="en-US" sz="1800" kern="0" spc="144" dirty="0">
                 <a:solidFill>
                   <a:srgbClr val="FF5B1F"/>
                 </a:solidFill>
@@ -23992,11 +23378,11 @@
           </a:bodyPr>
           <a:lstStyle/>
           <a:p>
-            <a:pPr algn="l" indent="0" marL="0">
-              <a:buNone/>
-            </a:pPr>
-            <a:r>
-              <a:rPr lang="en-US" sz="1800" spc="144" kern="0" dirty="0">
+            <a:pPr marL="0" indent="0" algn="l">
+              <a:buNone/>
+            </a:pPr>
+            <a:r>
+              <a:rPr lang="en-US" sz="1800" kern="0" spc="144" dirty="0">
                 <a:solidFill>
                   <a:srgbClr val="2A2A2A"/>
                 </a:solidFill>
@@ -24033,14 +23419,14 @@
           </a:bodyPr>
           <a:lstStyle/>
           <a:p>
-            <a:pPr algn="l" indent="0" marL="0">
+            <a:pPr marL="0" indent="0" algn="l">
               <a:lnSpc>
                 <a:spcPct val="96000"/>
               </a:lnSpc>
               <a:buNone/>
             </a:pPr>
             <a:r>
-              <a:rPr lang="en-US" sz="7200" spc="-180" kern="0" dirty="0">
+              <a:rPr lang="en-US" sz="7200" kern="0" spc="-180" dirty="0">
                 <a:solidFill>
                   <a:srgbClr val="0E0E0E"/>
                 </a:solidFill>
@@ -24050,14 +23436,8 @@
               </a:rPr>
               <a:t>The study </a:t>
             </a:r>
-            <a:pPr algn="l" indent="0" marL="0">
-              <a:lnSpc>
-                <a:spcPct val="96000"/>
-              </a:lnSpc>
-              <a:buNone/>
-            </a:pPr>
-            <a:r>
-              <a:rPr lang="en-US" sz="7200" i="1" spc="-180" kern="0" dirty="0">
+            <a:r>
+              <a:rPr lang="en-US" sz="7200" i="1" kern="0" spc="-180" dirty="0">
                 <a:solidFill>
                   <a:srgbClr val="0E0E0E"/>
                 </a:solidFill>
@@ -24119,11 +23499,11 @@
           </a:bodyPr>
           <a:lstStyle/>
           <a:p>
-            <a:pPr algn="l" indent="0" marL="0">
-              <a:buNone/>
-            </a:pPr>
-            <a:r>
-              <a:rPr lang="en-US" sz="1800" spc="108" kern="0" dirty="0">
+            <a:pPr marL="0" indent="0" algn="l">
+              <a:buNone/>
+            </a:pPr>
+            <a:r>
+              <a:rPr lang="en-US" sz="1800" kern="0" spc="108" dirty="0">
                 <a:solidFill>
                   <a:srgbClr val="0E0E0E">
                     <a:alpha val="65000"/>
@@ -24162,11 +23542,11 @@
           </a:bodyPr>
           <a:lstStyle/>
           <a:p>
-            <a:pPr algn="l" indent="0" marL="0">
-              <a:buNone/>
-            </a:pPr>
-            <a:r>
-              <a:rPr lang="en-US" sz="1800" spc="144" kern="0" dirty="0">
+            <a:pPr marL="0" indent="0" algn="l">
+              <a:buNone/>
+            </a:pPr>
+            <a:r>
+              <a:rPr lang="en-US" sz="1800" kern="0" spc="144" dirty="0">
                 <a:solidFill>
                   <a:srgbClr val="0E0E0E"/>
                 </a:solidFill>
@@ -24203,14 +23583,14 @@
           </a:bodyPr>
           <a:lstStyle/>
           <a:p>
-            <a:pPr algn="l" indent="0" marL="0">
+            <a:pPr marL="0" indent="0" algn="l">
               <a:lnSpc>
                 <a:spcPct val="95000"/>
               </a:lnSpc>
               <a:buNone/>
             </a:pPr>
             <a:r>
-              <a:rPr lang="en-US" sz="3300" spc="-66" kern="0" dirty="0">
+              <a:rPr lang="en-US" sz="3300" kern="0" spc="-66" dirty="0">
                 <a:solidFill>
                   <a:srgbClr val="0E0E0E"/>
                 </a:solidFill>
@@ -24247,7 +23627,7 @@
           </a:bodyPr>
           <a:lstStyle/>
           <a:p>
-            <a:pPr algn="l" indent="0" marL="0">
+            <a:pPr marL="0" indent="0" algn="l">
               <a:lnSpc>
                 <a:spcPct val="140000"/>
               </a:lnSpc>
@@ -24266,12 +23646,6 @@
               </a:rPr>
               <a:t>Constrains output to user-supplied documents. Inline page-level citations. </a:t>
             </a:r>
-            <a:pPr algn="l" indent="0" marL="0">
-              <a:lnSpc>
-                <a:spcPct val="140000"/>
-              </a:lnSpc>
-              <a:buNone/>
-            </a:pPr>
             <a:r>
               <a:rPr lang="en-US" sz="1800" b="1" dirty="0">
                 <a:solidFill>
@@ -24285,12 +23659,6 @@
               </a:rPr>
               <a:t>Substantially reduces hallucination risk </a:t>
             </a:r>
-            <a:pPr algn="l" indent="0" marL="0">
-              <a:lnSpc>
-                <a:spcPct val="140000"/>
-              </a:lnSpc>
-              <a:buNone/>
-            </a:pPr>
             <a:r>
               <a:rPr lang="en-US" sz="1800" dirty="0">
                 <a:solidFill>
@@ -24356,11 +23724,11 @@
           </a:bodyPr>
           <a:lstStyle/>
           <a:p>
-            <a:pPr algn="l" indent="0" marL="0">
-              <a:buNone/>
-            </a:pPr>
-            <a:r>
-              <a:rPr lang="en-US" sz="1800" spc="108" kern="0" dirty="0">
+            <a:pPr marL="0" indent="0" algn="l">
+              <a:buNone/>
+            </a:pPr>
+            <a:r>
+              <a:rPr lang="en-US" sz="1800" kern="0" spc="108" dirty="0">
                 <a:solidFill>
                   <a:srgbClr val="888076"/>
                 </a:solidFill>
@@ -24397,11 +23765,11 @@
           </a:bodyPr>
           <a:lstStyle/>
           <a:p>
-            <a:pPr algn="l" indent="0" marL="0">
-              <a:buNone/>
-            </a:pPr>
-            <a:r>
-              <a:rPr lang="en-US" sz="1800" spc="144" kern="0" dirty="0">
+            <a:pPr marL="0" indent="0" algn="l">
+              <a:buNone/>
+            </a:pPr>
+            <a:r>
+              <a:rPr lang="en-US" sz="1800" kern="0" spc="144" dirty="0">
                 <a:solidFill>
                   <a:srgbClr val="888076"/>
                 </a:solidFill>
@@ -24438,14 +23806,14 @@
           </a:bodyPr>
           <a:lstStyle/>
           <a:p>
-            <a:pPr algn="l" indent="0" marL="0">
+            <a:pPr marL="0" indent="0" algn="l">
               <a:lnSpc>
                 <a:spcPct val="95000"/>
               </a:lnSpc>
               <a:buNone/>
             </a:pPr>
             <a:r>
-              <a:rPr lang="en-US" sz="3300" spc="-66" kern="0" dirty="0">
+              <a:rPr lang="en-US" sz="3300" kern="0" spc="-66" dirty="0">
                 <a:solidFill>
                   <a:srgbClr val="0E0E0E"/>
                 </a:solidFill>
@@ -24482,7 +23850,7 @@
           </a:bodyPr>
           <a:lstStyle/>
           <a:p>
-            <a:pPr algn="l" indent="0" marL="0">
+            <a:pPr marL="0" indent="0" algn="l">
               <a:lnSpc>
                 <a:spcPct val="140000"/>
               </a:lnSpc>
@@ -24551,11 +23919,11 @@
           </a:bodyPr>
           <a:lstStyle/>
           <a:p>
-            <a:pPr algn="l" indent="0" marL="0">
-              <a:buNone/>
-            </a:pPr>
-            <a:r>
-              <a:rPr lang="en-US" sz="1800" spc="108" kern="0" dirty="0">
+            <a:pPr marL="0" indent="0" algn="l">
+              <a:buNone/>
+            </a:pPr>
+            <a:r>
+              <a:rPr lang="en-US" sz="1800" kern="0" spc="108" dirty="0">
                 <a:solidFill>
                   <a:srgbClr val="888076"/>
                 </a:solidFill>
@@ -24592,11 +23960,11 @@
           </a:bodyPr>
           <a:lstStyle/>
           <a:p>
-            <a:pPr algn="l" indent="0" marL="0">
-              <a:buNone/>
-            </a:pPr>
-            <a:r>
-              <a:rPr lang="en-US" sz="1800" spc="144" kern="0" dirty="0">
+            <a:pPr marL="0" indent="0" algn="l">
+              <a:buNone/>
+            </a:pPr>
+            <a:r>
+              <a:rPr lang="en-US" sz="1800" kern="0" spc="144" dirty="0">
                 <a:solidFill>
                   <a:srgbClr val="888076"/>
                 </a:solidFill>
@@ -24633,14 +24001,14 @@
           </a:bodyPr>
           <a:lstStyle/>
           <a:p>
-            <a:pPr algn="l" indent="0" marL="0">
+            <a:pPr marL="0" indent="0" algn="l">
               <a:lnSpc>
                 <a:spcPct val="95000"/>
               </a:lnSpc>
               <a:buNone/>
             </a:pPr>
             <a:r>
-              <a:rPr lang="en-US" sz="3300" spc="-66" kern="0" dirty="0">
+              <a:rPr lang="en-US" sz="3300" kern="0" spc="-66" dirty="0">
                 <a:solidFill>
                   <a:srgbClr val="0E0E0E"/>
                 </a:solidFill>
@@ -24677,7 +24045,7 @@
           </a:bodyPr>
           <a:lstStyle/>
           <a:p>
-            <a:pPr algn="l" indent="0" marL="0">
+            <a:pPr marL="0" indent="0" algn="l">
               <a:lnSpc>
                 <a:spcPct val="140000"/>
               </a:lnSpc>
@@ -24746,11 +24114,11 @@
           </a:bodyPr>
           <a:lstStyle/>
           <a:p>
-            <a:pPr algn="l" indent="0" marL="0">
-              <a:buNone/>
-            </a:pPr>
-            <a:r>
-              <a:rPr lang="en-US" sz="1800" spc="108" kern="0" dirty="0">
+            <a:pPr marL="0" indent="0" algn="l">
+              <a:buNone/>
+            </a:pPr>
+            <a:r>
+              <a:rPr lang="en-US" sz="1800" kern="0" spc="108" dirty="0">
                 <a:solidFill>
                   <a:srgbClr val="888076"/>
                 </a:solidFill>
@@ -24787,11 +24155,11 @@
           </a:bodyPr>
           <a:lstStyle/>
           <a:p>
-            <a:pPr algn="l" indent="0" marL="0">
-              <a:buNone/>
-            </a:pPr>
-            <a:r>
-              <a:rPr lang="en-US" sz="1800" spc="144" kern="0" dirty="0">
+            <a:pPr marL="0" indent="0" algn="l">
+              <a:buNone/>
+            </a:pPr>
+            <a:r>
+              <a:rPr lang="en-US" sz="1800" kern="0" spc="144" dirty="0">
                 <a:solidFill>
                   <a:srgbClr val="888076"/>
                 </a:solidFill>
@@ -24828,14 +24196,14 @@
           </a:bodyPr>
           <a:lstStyle/>
           <a:p>
-            <a:pPr algn="l" indent="0" marL="0">
+            <a:pPr marL="0" indent="0" algn="l">
               <a:lnSpc>
                 <a:spcPct val="95000"/>
               </a:lnSpc>
               <a:buNone/>
             </a:pPr>
             <a:r>
-              <a:rPr lang="en-US" sz="3300" spc="-66" kern="0" dirty="0">
+              <a:rPr lang="en-US" sz="3300" kern="0" spc="-66" dirty="0">
                 <a:solidFill>
                   <a:srgbClr val="0E0E0E"/>
                 </a:solidFill>
@@ -24872,7 +24240,7 @@
           </a:bodyPr>
           <a:lstStyle/>
           <a:p>
-            <a:pPr algn="l" indent="0" marL="0">
+            <a:pPr marL="0" indent="0" algn="l">
               <a:lnSpc>
                 <a:spcPct val="140000"/>
               </a:lnSpc>
@@ -24941,11 +24309,11 @@
           </a:bodyPr>
           <a:lstStyle/>
           <a:p>
-            <a:pPr algn="l" indent="0" marL="0">
-              <a:buNone/>
-            </a:pPr>
-            <a:r>
-              <a:rPr lang="en-US" sz="1800" spc="108" kern="0" dirty="0">
+            <a:pPr marL="0" indent="0" algn="l">
+              <a:buNone/>
+            </a:pPr>
+            <a:r>
+              <a:rPr lang="en-US" sz="1800" kern="0" spc="108" dirty="0">
                 <a:solidFill>
                   <a:srgbClr val="888076"/>
                 </a:solidFill>
@@ -24982,11 +24350,11 @@
           </a:bodyPr>
           <a:lstStyle/>
           <a:p>
-            <a:pPr algn="l" indent="0" marL="0">
-              <a:buNone/>
-            </a:pPr>
-            <a:r>
-              <a:rPr lang="en-US" sz="1800" spc="144" kern="0" dirty="0">
+            <a:pPr marL="0" indent="0" algn="l">
+              <a:buNone/>
+            </a:pPr>
+            <a:r>
+              <a:rPr lang="en-US" sz="1800" kern="0" spc="144" dirty="0">
                 <a:solidFill>
                   <a:srgbClr val="888076"/>
                 </a:solidFill>
@@ -25023,14 +24391,14 @@
           </a:bodyPr>
           <a:lstStyle/>
           <a:p>
-            <a:pPr algn="l" indent="0" marL="0">
+            <a:pPr marL="0" indent="0" algn="l">
               <a:lnSpc>
                 <a:spcPct val="95000"/>
               </a:lnSpc>
               <a:buNone/>
             </a:pPr>
             <a:r>
-              <a:rPr lang="en-US" sz="3300" spc="-66" kern="0" dirty="0">
+              <a:rPr lang="en-US" sz="3300" kern="0" spc="-66" dirty="0">
                 <a:solidFill>
                   <a:srgbClr val="0E0E0E"/>
                 </a:solidFill>
@@ -25067,7 +24435,7 @@
           </a:bodyPr>
           <a:lstStyle/>
           <a:p>
-            <a:pPr algn="l" indent="0" marL="0">
+            <a:pPr marL="0" indent="0" algn="l">
               <a:lnSpc>
                 <a:spcPct val="140000"/>
               </a:lnSpc>
@@ -25136,11 +24504,11 @@
           </a:bodyPr>
           <a:lstStyle/>
           <a:p>
-            <a:pPr algn="l" indent="0" marL="0">
-              <a:buNone/>
-            </a:pPr>
-            <a:r>
-              <a:rPr lang="en-US" sz="1800" spc="144" kern="0" dirty="0">
+            <a:pPr marL="0" indent="0" algn="l">
+              <a:buNone/>
+            </a:pPr>
+            <a:r>
+              <a:rPr lang="en-US" sz="1800" kern="0" spc="144" dirty="0">
                 <a:solidFill>
                   <a:srgbClr val="FF5B1F"/>
                 </a:solidFill>
@@ -25177,14 +24545,14 @@
           </a:bodyPr>
           <a:lstStyle/>
           <a:p>
-            <a:pPr algn="l" indent="0" marL="0">
+            <a:pPr marL="0" indent="0" algn="l">
               <a:lnSpc>
                 <a:spcPct val="105000"/>
               </a:lnSpc>
               <a:buNone/>
             </a:pPr>
             <a:r>
-              <a:rPr lang="en-US" sz="2550" spc="-51" kern="0" dirty="0">
+              <a:rPr lang="en-US" sz="2550" kern="0" spc="-51" dirty="0">
                 <a:solidFill>
                   <a:srgbClr val="F2EFE8"/>
                 </a:solidFill>
@@ -25194,14 +24562,8 @@
               </a:rPr>
               <a:t>Two tools. Used fluently. </a:t>
             </a:r>
-            <a:pPr algn="l" indent="0" marL="0">
-              <a:lnSpc>
-                <a:spcPct val="105000"/>
-              </a:lnSpc>
-              <a:buNone/>
-            </a:pPr>
-            <a:r>
-              <a:rPr lang="en-US" sz="2550" i="1" spc="-51" kern="0" dirty="0">
+            <a:r>
+              <a:rPr lang="en-US" sz="2550" i="1" kern="0" spc="-51" dirty="0">
                 <a:solidFill>
                   <a:srgbClr val="D6FF3D"/>
                 </a:solidFill>
@@ -25238,7 +24600,7 @@
           </a:bodyPr>
           <a:lstStyle/>
           <a:p>
-            <a:pPr algn="l" indent="0" marL="0">
+            <a:pPr marL="0" indent="0" algn="l">
               <a:lnSpc>
                 <a:spcPct val="140000"/>
               </a:lnSpc>
@@ -25284,11 +24646,11 @@
           </a:bodyPr>
           <a:lstStyle/>
           <a:p>
-            <a:pPr algn="l" indent="0" marL="0">
-              <a:buNone/>
-            </a:pPr>
-            <a:r>
-              <a:rPr lang="en-US" sz="1800" spc="108" kern="0" dirty="0">
+            <a:pPr marL="0" indent="0" algn="l">
+              <a:buNone/>
+            </a:pPr>
+            <a:r>
+              <a:rPr lang="en-US" sz="1800" kern="0" spc="108" dirty="0">
                 <a:solidFill>
                   <a:srgbClr val="888076"/>
                 </a:solidFill>
@@ -25325,11 +24687,11 @@
           </a:bodyPr>
           <a:lstStyle/>
           <a:p>
-            <a:pPr algn="l" indent="0" marL="0">
-              <a:buNone/>
-            </a:pPr>
-            <a:r>
-              <a:rPr lang="en-US" sz="2700" i="1" spc="-54" kern="0" dirty="0">
+            <a:pPr marL="0" indent="0" algn="l">
+              <a:buNone/>
+            </a:pPr>
+            <a:r>
+              <a:rPr lang="en-US" sz="2700" i="1" kern="0" spc="-54" dirty="0">
                 <a:solidFill>
                   <a:srgbClr val="888076"/>
                 </a:solidFill>
@@ -25359,6 +24721,7 @@
         <a:solidFill>
           <a:srgbClr val="F2EFE8"/>
         </a:solidFill>
+        <a:effectLst/>
       </p:bgPr>
     </p:bg>
     <p:spTree>
@@ -25418,11 +24781,11 @@
           </a:bodyPr>
           <a:lstStyle/>
           <a:p>
-            <a:pPr algn="l" indent="0" marL="0">
-              <a:buNone/>
-            </a:pPr>
-            <a:r>
-              <a:rPr lang="en-US" sz="1800" spc="108" kern="0" dirty="0">
+            <a:pPr marL="0" indent="0" algn="l">
+              <a:buNone/>
+            </a:pPr>
+            <a:r>
+              <a:rPr lang="en-US" sz="1800" kern="0" spc="108" dirty="0">
                 <a:solidFill>
                   <a:srgbClr val="888076"/>
                 </a:solidFill>
@@ -25459,11 +24822,11 @@
           </a:bodyPr>
           <a:lstStyle/>
           <a:p>
-            <a:pPr algn="l" indent="0" marL="0">
-              <a:buNone/>
-            </a:pPr>
-            <a:r>
-              <a:rPr lang="en-US" sz="1800" spc="108" kern="0" dirty="0">
+            <a:pPr marL="0" indent="0" algn="l">
+              <a:buNone/>
+            </a:pPr>
+            <a:r>
+              <a:rPr lang="en-US" sz="1800" kern="0" spc="108" dirty="0">
                 <a:solidFill>
                   <a:srgbClr val="888076"/>
                 </a:solidFill>
@@ -25520,11 +24883,11 @@
           </a:bodyPr>
           <a:lstStyle/>
           <a:p>
-            <a:pPr algn="l" indent="0" marL="0">
-              <a:buNone/>
-            </a:pPr>
-            <a:r>
-              <a:rPr lang="en-US" sz="1800" spc="144" kern="0" dirty="0">
+            <a:pPr marL="0" indent="0" algn="l">
+              <a:buNone/>
+            </a:pPr>
+            <a:r>
+              <a:rPr lang="en-US" sz="1800" kern="0" spc="144" dirty="0">
                 <a:solidFill>
                   <a:srgbClr val="FF5B1F"/>
                 </a:solidFill>
@@ -25561,11 +24924,11 @@
           </a:bodyPr>
           <a:lstStyle/>
           <a:p>
-            <a:pPr algn="l" indent="0" marL="0">
-              <a:buNone/>
-            </a:pPr>
-            <a:r>
-              <a:rPr lang="en-US" sz="1800" spc="144" kern="0" dirty="0">
+            <a:pPr marL="0" indent="0" algn="l">
+              <a:buNone/>
+            </a:pPr>
+            <a:r>
+              <a:rPr lang="en-US" sz="1800" kern="0" spc="144" dirty="0">
                 <a:solidFill>
                   <a:srgbClr val="2A2A2A"/>
                 </a:solidFill>
@@ -25602,14 +24965,14 @@
           </a:bodyPr>
           <a:lstStyle/>
           <a:p>
-            <a:pPr algn="l" indent="0" marL="0">
+            <a:pPr marL="0" indent="0" algn="l">
               <a:lnSpc>
                 <a:spcPct val="96000"/>
               </a:lnSpc>
               <a:buNone/>
             </a:pPr>
             <a:r>
-              <a:rPr lang="en-US" sz="7200" spc="-180" kern="0" dirty="0">
+              <a:rPr lang="en-US" sz="7200" kern="0" spc="-180" dirty="0">
                 <a:solidFill>
                   <a:srgbClr val="0E0E0E"/>
                 </a:solidFill>
@@ -25619,14 +24982,8 @@
               </a:rPr>
               <a:t>Replaces </a:t>
             </a:r>
-            <a:pPr algn="l" indent="0" marL="0">
-              <a:lnSpc>
-                <a:spcPct val="96000"/>
-              </a:lnSpc>
-              <a:buNone/>
-            </a:pPr>
-            <a:r>
-              <a:rPr lang="en-US" sz="7200" i="1" spc="-180" kern="0" dirty="0">
+            <a:r>
+              <a:rPr lang="en-US" sz="7200" i="1" kern="0" spc="-180" dirty="0">
                 <a:solidFill>
                   <a:srgbClr val="0E0E0E"/>
                 </a:solidFill>
@@ -25663,11 +25020,11 @@
           </a:bodyPr>
           <a:lstStyle/>
           <a:p>
-            <a:pPr algn="l" indent="0" marL="0">
-              <a:buNone/>
-            </a:pPr>
-            <a:r>
-              <a:rPr lang="en-US" sz="1800" spc="180" kern="0" dirty="0">
+            <a:pPr marL="0" indent="0" algn="l">
+              <a:buNone/>
+            </a:pPr>
+            <a:r>
+              <a:rPr lang="en-US" sz="1800" kern="0" spc="180" dirty="0">
                 <a:solidFill>
                   <a:srgbClr val="FF5B1F"/>
                 </a:solidFill>
@@ -25744,7 +25101,7 @@
           </a:bodyPr>
           <a:lstStyle/>
           <a:p>
-            <a:pPr algn="l" indent="0" marL="0">
+            <a:pPr marL="0" indent="0" algn="l">
               <a:lnSpc>
                 <a:spcPct val="128000"/>
               </a:lnSpc>
@@ -25764,7 +25121,7 @@
             <a:endParaRPr lang="en-US" sz="1350" dirty="0"/>
           </a:p>
           <a:p>
-            <a:pPr algn="l" indent="0" marL="0">
+            <a:pPr marL="0" indent="0" algn="l">
               <a:lnSpc>
                 <a:spcPct val="128000"/>
               </a:lnSpc>
@@ -25784,7 +25141,7 @@
             <a:endParaRPr lang="en-US" sz="1350" dirty="0"/>
           </a:p>
           <a:p>
-            <a:pPr algn="l" indent="0" marL="0">
+            <a:pPr marL="0" indent="0" algn="l">
               <a:lnSpc>
                 <a:spcPct val="128000"/>
               </a:lnSpc>
@@ -25793,7 +25150,7 @@
             <a:endParaRPr lang="en-US" sz="1350" dirty="0"/>
           </a:p>
           <a:p>
-            <a:pPr algn="l" indent="0" marL="0">
+            <a:pPr marL="0" indent="0" algn="l">
               <a:lnSpc>
                 <a:spcPct val="128000"/>
               </a:lnSpc>
@@ -25813,7 +25170,7 @@
             <a:endParaRPr lang="en-US" sz="1350" dirty="0"/>
           </a:p>
           <a:p>
-            <a:pPr algn="l" indent="0" marL="0">
+            <a:pPr marL="0" indent="0" algn="l">
               <a:lnSpc>
                 <a:spcPct val="128000"/>
               </a:lnSpc>
@@ -25833,7 +25190,7 @@
             <a:endParaRPr lang="en-US" sz="1350" dirty="0"/>
           </a:p>
           <a:p>
-            <a:pPr algn="l" indent="0" marL="0">
+            <a:pPr marL="0" indent="0" algn="l">
               <a:lnSpc>
                 <a:spcPct val="128000"/>
               </a:lnSpc>
@@ -25853,7 +25210,7 @@
             <a:endParaRPr lang="en-US" sz="1350" dirty="0"/>
           </a:p>
           <a:p>
-            <a:pPr algn="l" indent="0" marL="0">
+            <a:pPr marL="0" indent="0" algn="l">
               <a:lnSpc>
                 <a:spcPct val="128000"/>
               </a:lnSpc>
@@ -25862,7 +25219,7 @@
             <a:endParaRPr lang="en-US" sz="1350" dirty="0"/>
           </a:p>
           <a:p>
-            <a:pPr algn="l" indent="0" marL="0">
+            <a:pPr marL="0" indent="0" algn="l">
               <a:lnSpc>
                 <a:spcPct val="128000"/>
               </a:lnSpc>
@@ -25882,7 +25239,7 @@
             <a:endParaRPr lang="en-US" sz="1350" dirty="0"/>
           </a:p>
           <a:p>
-            <a:pPr algn="l" indent="0" marL="0">
+            <a:pPr marL="0" indent="0" algn="l">
               <a:lnSpc>
                 <a:spcPct val="128000"/>
               </a:lnSpc>
@@ -25902,7 +25259,7 @@
             <a:endParaRPr lang="en-US" sz="1350" dirty="0"/>
           </a:p>
           <a:p>
-            <a:pPr algn="l" indent="0" marL="0">
+            <a:pPr marL="0" indent="0" algn="l">
               <a:lnSpc>
                 <a:spcPct val="128000"/>
               </a:lnSpc>
@@ -25922,7 +25279,7 @@
             <a:endParaRPr lang="en-US" sz="1350" dirty="0"/>
           </a:p>
           <a:p>
-            <a:pPr algn="l" indent="0" marL="0">
+            <a:pPr marL="0" indent="0" algn="l">
               <a:lnSpc>
                 <a:spcPct val="128000"/>
               </a:lnSpc>
@@ -25942,7 +25299,7 @@
             <a:endParaRPr lang="en-US" sz="1350" dirty="0"/>
           </a:p>
           <a:p>
-            <a:pPr algn="l" indent="0" marL="0">
+            <a:pPr marL="0" indent="0" algn="l">
               <a:lnSpc>
                 <a:spcPct val="128000"/>
               </a:lnSpc>
@@ -25962,7 +25319,7 @@
             <a:endParaRPr lang="en-US" sz="1350" dirty="0"/>
           </a:p>
           <a:p>
-            <a:pPr algn="l" indent="0" marL="0">
+            <a:pPr marL="0" indent="0" algn="l">
               <a:lnSpc>
                 <a:spcPct val="128000"/>
               </a:lnSpc>
@@ -25982,7 +25339,7 @@
             <a:endParaRPr lang="en-US" sz="1350" dirty="0"/>
           </a:p>
           <a:p>
-            <a:pPr algn="l" indent="0" marL="0">
+            <a:pPr marL="0" indent="0" algn="l">
               <a:lnSpc>
                 <a:spcPct val="128000"/>
               </a:lnSpc>
@@ -26002,7 +25359,7 @@
             <a:endParaRPr lang="en-US" sz="1350" dirty="0"/>
           </a:p>
           <a:p>
-            <a:pPr algn="l" indent="0" marL="0">
+            <a:pPr marL="0" indent="0" algn="l">
               <a:lnSpc>
                 <a:spcPct val="128000"/>
               </a:lnSpc>
@@ -26022,7 +25379,7 @@
             <a:endParaRPr lang="en-US" sz="1350" dirty="0"/>
           </a:p>
           <a:p>
-            <a:pPr algn="l" indent="0" marL="0">
+            <a:pPr marL="0" indent="0" algn="l">
               <a:lnSpc>
                 <a:spcPct val="128000"/>
               </a:lnSpc>
@@ -26031,7 +25388,7 @@
             <a:endParaRPr lang="en-US" sz="1350" dirty="0"/>
           </a:p>
           <a:p>
-            <a:pPr algn="l" indent="0" marL="0">
+            <a:pPr marL="0" indent="0" algn="l">
               <a:lnSpc>
                 <a:spcPct val="128000"/>
               </a:lnSpc>
@@ -26051,7 +25408,7 @@
             <a:endParaRPr lang="en-US" sz="1350" dirty="0"/>
           </a:p>
           <a:p>
-            <a:pPr algn="l" indent="0" marL="0">
+            <a:pPr marL="0" indent="0" algn="l">
               <a:lnSpc>
                 <a:spcPct val="128000"/>
               </a:lnSpc>
@@ -26060,7 +25417,7 @@
             <a:endParaRPr lang="en-US" sz="1350" dirty="0"/>
           </a:p>
           <a:p>
-            <a:pPr algn="l" indent="0" marL="0">
+            <a:pPr marL="0" indent="0" algn="l">
               <a:lnSpc>
                 <a:spcPct val="128000"/>
               </a:lnSpc>
@@ -26080,7 +25437,7 @@
             <a:endParaRPr lang="en-US" sz="1350" dirty="0"/>
           </a:p>
           <a:p>
-            <a:pPr algn="l" indent="0" marL="0">
+            <a:pPr marL="0" indent="0" algn="l">
               <a:lnSpc>
                 <a:spcPct val="128000"/>
               </a:lnSpc>
@@ -26100,7 +25457,7 @@
             <a:endParaRPr lang="en-US" sz="1350" dirty="0"/>
           </a:p>
           <a:p>
-            <a:pPr algn="l" indent="0" marL="0">
+            <a:pPr marL="0" indent="0" algn="l">
               <a:lnSpc>
                 <a:spcPct val="128000"/>
               </a:lnSpc>
@@ -26120,7 +25477,7 @@
             <a:endParaRPr lang="en-US" sz="1350" dirty="0"/>
           </a:p>
           <a:p>
-            <a:pPr algn="l" indent="0" marL="0">
+            <a:pPr marL="0" indent="0" algn="l">
               <a:lnSpc>
                 <a:spcPct val="128000"/>
               </a:lnSpc>
@@ -26140,7 +25497,7 @@
             <a:endParaRPr lang="en-US" sz="1350" dirty="0"/>
           </a:p>
           <a:p>
-            <a:pPr algn="l" indent="0" marL="0">
+            <a:pPr marL="0" indent="0" algn="l">
               <a:lnSpc>
                 <a:spcPct val="128000"/>
               </a:lnSpc>
@@ -26149,7 +25506,7 @@
             <a:endParaRPr lang="en-US" sz="1350" dirty="0"/>
           </a:p>
           <a:p>
-            <a:pPr algn="l" indent="0" marL="0">
+            <a:pPr marL="0" indent="0" algn="l">
               <a:lnSpc>
                 <a:spcPct val="128000"/>
               </a:lnSpc>
@@ -26193,11 +25550,11 @@
           </a:bodyPr>
           <a:lstStyle/>
           <a:p>
-            <a:pPr algn="l" indent="0" marL="0">
-              <a:buNone/>
-            </a:pPr>
-            <a:r>
-              <a:rPr lang="en-US" sz="1800" spc="180" kern="0" dirty="0">
+            <a:pPr marL="0" indent="0" algn="l">
+              <a:buNone/>
+            </a:pPr>
+            <a:r>
+              <a:rPr lang="en-US" sz="1800" kern="0" spc="180" dirty="0">
                 <a:solidFill>
                   <a:srgbClr val="888076"/>
                 </a:solidFill>
@@ -26254,7 +25611,7 @@
           </a:bodyPr>
           <a:lstStyle/>
           <a:p>
-            <a:pPr algn="l" indent="0" marL="0">
+            <a:pPr marL="0" indent="0" algn="l">
               <a:lnSpc>
                 <a:spcPct val="100000"/>
               </a:lnSpc>
@@ -26298,7 +25655,7 @@
           </a:bodyPr>
           <a:lstStyle/>
           <a:p>
-            <a:pPr algn="l" indent="0" marL="0">
+            <a:pPr marL="0" indent="0" algn="l">
               <a:lnSpc>
                 <a:spcPct val="135000"/>
               </a:lnSpc>
@@ -26342,7 +25699,7 @@
           </a:bodyPr>
           <a:lstStyle/>
           <a:p>
-            <a:pPr algn="l" indent="0" marL="0">
+            <a:pPr marL="0" indent="0" algn="l">
               <a:lnSpc>
                 <a:spcPct val="135000"/>
               </a:lnSpc>
@@ -26406,7 +25763,7 @@
           </a:bodyPr>
           <a:lstStyle/>
           <a:p>
-            <a:pPr algn="l" indent="0" marL="0">
+            <a:pPr marL="0" indent="0" algn="l">
               <a:lnSpc>
                 <a:spcPct val="100000"/>
               </a:lnSpc>
@@ -26450,7 +25807,7 @@
           </a:bodyPr>
           <a:lstStyle/>
           <a:p>
-            <a:pPr algn="l" indent="0" marL="0">
+            <a:pPr marL="0" indent="0" algn="l">
               <a:lnSpc>
                 <a:spcPct val="135000"/>
               </a:lnSpc>
@@ -26494,7 +25851,7 @@
           </a:bodyPr>
           <a:lstStyle/>
           <a:p>
-            <a:pPr algn="l" indent="0" marL="0">
+            <a:pPr marL="0" indent="0" algn="l">
               <a:lnSpc>
                 <a:spcPct val="135000"/>
               </a:lnSpc>
@@ -26558,7 +25915,7 @@
           </a:bodyPr>
           <a:lstStyle/>
           <a:p>
-            <a:pPr algn="l" indent="0" marL="0">
+            <a:pPr marL="0" indent="0" algn="l">
               <a:lnSpc>
                 <a:spcPct val="100000"/>
               </a:lnSpc>
@@ -26602,7 +25959,7 @@
           </a:bodyPr>
           <a:lstStyle/>
           <a:p>
-            <a:pPr algn="l" indent="0" marL="0">
+            <a:pPr marL="0" indent="0" algn="l">
               <a:lnSpc>
                 <a:spcPct val="135000"/>
               </a:lnSpc>
@@ -26646,7 +26003,7 @@
           </a:bodyPr>
           <a:lstStyle/>
           <a:p>
-            <a:pPr algn="l" indent="0" marL="0">
+            <a:pPr marL="0" indent="0" algn="l">
               <a:lnSpc>
                 <a:spcPct val="135000"/>
               </a:lnSpc>
@@ -26710,7 +26067,7 @@
           </a:bodyPr>
           <a:lstStyle/>
           <a:p>
-            <a:pPr algn="l" indent="0" marL="0">
+            <a:pPr marL="0" indent="0" algn="l">
               <a:lnSpc>
                 <a:spcPct val="100000"/>
               </a:lnSpc>
@@ -26754,7 +26111,7 @@
           </a:bodyPr>
           <a:lstStyle/>
           <a:p>
-            <a:pPr algn="l" indent="0" marL="0">
+            <a:pPr marL="0" indent="0" algn="l">
               <a:lnSpc>
                 <a:spcPct val="135000"/>
               </a:lnSpc>
@@ -26798,7 +26155,7 @@
           </a:bodyPr>
           <a:lstStyle/>
           <a:p>
-            <a:pPr algn="l" indent="0" marL="0">
+            <a:pPr marL="0" indent="0" algn="l">
               <a:lnSpc>
                 <a:spcPct val="135000"/>
               </a:lnSpc>
@@ -26882,7 +26239,7 @@
           </a:bodyPr>
           <a:lstStyle/>
           <a:p>
-            <a:pPr algn="l" indent="0" marL="0">
+            <a:pPr marL="0" indent="0" algn="l">
               <a:lnSpc>
                 <a:spcPct val="100000"/>
               </a:lnSpc>
@@ -26926,7 +26283,7 @@
           </a:bodyPr>
           <a:lstStyle/>
           <a:p>
-            <a:pPr algn="l" indent="0" marL="0">
+            <a:pPr marL="0" indent="0" algn="l">
               <a:lnSpc>
                 <a:spcPct val="135000"/>
               </a:lnSpc>
@@ -26970,7 +26327,7 @@
           </a:bodyPr>
           <a:lstStyle/>
           <a:p>
-            <a:pPr algn="l" indent="0" marL="0">
+            <a:pPr marL="0" indent="0" algn="l">
               <a:lnSpc>
                 <a:spcPct val="135000"/>
               </a:lnSpc>
@@ -27014,11 +26371,11 @@
           </a:bodyPr>
           <a:lstStyle/>
           <a:p>
-            <a:pPr algn="l" indent="0" marL="0">
-              <a:buNone/>
-            </a:pPr>
-            <a:r>
-              <a:rPr lang="en-US" sz="1800" spc="108" kern="0" dirty="0">
+            <a:pPr marL="0" indent="0" algn="l">
+              <a:buNone/>
+            </a:pPr>
+            <a:r>
+              <a:rPr lang="en-US" sz="1800" kern="0" spc="108" dirty="0">
                 <a:solidFill>
                   <a:srgbClr val="888076"/>
                 </a:solidFill>
@@ -27055,11 +26412,11 @@
           </a:bodyPr>
           <a:lstStyle/>
           <a:p>
-            <a:pPr algn="l" indent="0" marL="0">
-              <a:buNone/>
-            </a:pPr>
-            <a:r>
-              <a:rPr lang="en-US" sz="2700" i="1" spc="-54" kern="0" dirty="0">
+            <a:pPr marL="0" indent="0" algn="l">
+              <a:buNone/>
+            </a:pPr>
+            <a:r>
+              <a:rPr lang="en-US" sz="2700" i="1" kern="0" spc="-54" dirty="0">
                 <a:solidFill>
                   <a:srgbClr val="888076"/>
                 </a:solidFill>
@@ -27089,6 +26446,7 @@
         <a:solidFill>
           <a:srgbClr val="0E0E0E"/>
         </a:solidFill>
+        <a:effectLst/>
       </p:bgPr>
     </p:bg>
     <p:spTree>
@@ -27148,11 +26506,11 @@
           </a:bodyPr>
           <a:lstStyle/>
           <a:p>
-            <a:pPr algn="l" indent="0" marL="0">
-              <a:buNone/>
-            </a:pPr>
-            <a:r>
-              <a:rPr lang="en-US" sz="1800" spc="108" kern="0" dirty="0">
+            <a:pPr marL="0" indent="0" algn="l">
+              <a:buNone/>
+            </a:pPr>
+            <a:r>
+              <a:rPr lang="en-US" sz="1800" kern="0" spc="108" dirty="0">
                 <a:solidFill>
                   <a:srgbClr val="F2EFE8">
                     <a:alpha val="55000"/>
@@ -27191,11 +26549,11 @@
           </a:bodyPr>
           <a:lstStyle/>
           <a:p>
-            <a:pPr algn="l" indent="0" marL="0">
-              <a:buNone/>
-            </a:pPr>
-            <a:r>
-              <a:rPr lang="en-US" sz="1800" spc="108" kern="0" dirty="0">
+            <a:pPr marL="0" indent="0" algn="l">
+              <a:buNone/>
+            </a:pPr>
+            <a:r>
+              <a:rPr lang="en-US" sz="1800" kern="0" spc="108" dirty="0">
                 <a:solidFill>
                   <a:srgbClr val="F2EFE8">
                     <a:alpha val="55000"/>
@@ -27254,11 +26612,11 @@
           </a:bodyPr>
           <a:lstStyle/>
           <a:p>
-            <a:pPr algn="l" indent="0" marL="0">
-              <a:buNone/>
-            </a:pPr>
-            <a:r>
-              <a:rPr lang="en-US" sz="1800" spc="144" kern="0" dirty="0">
+            <a:pPr marL="0" indent="0" algn="l">
+              <a:buNone/>
+            </a:pPr>
+            <a:r>
+              <a:rPr lang="en-US" sz="1800" kern="0" spc="144" dirty="0">
                 <a:solidFill>
                   <a:srgbClr val="FF5B1F"/>
                 </a:solidFill>
@@ -27295,11 +26653,11 @@
           </a:bodyPr>
           <a:lstStyle/>
           <a:p>
-            <a:pPr algn="l" indent="0" marL="0">
-              <a:buNone/>
-            </a:pPr>
-            <a:r>
-              <a:rPr lang="en-US" sz="1800" spc="144" kern="0" dirty="0">
+            <a:pPr marL="0" indent="0" algn="l">
+              <a:buNone/>
+            </a:pPr>
+            <a:r>
+              <a:rPr lang="en-US" sz="1800" kern="0" spc="144" dirty="0">
                 <a:solidFill>
                   <a:srgbClr val="F2EFE8">
                     <a:alpha val="70000"/>
@@ -27338,14 +26696,14 @@
           </a:bodyPr>
           <a:lstStyle/>
           <a:p>
-            <a:pPr algn="l" indent="0" marL="0">
+            <a:pPr marL="0" indent="0" algn="l">
               <a:lnSpc>
                 <a:spcPct val="96000"/>
               </a:lnSpc>
               <a:buNone/>
             </a:pPr>
             <a:r>
-              <a:rPr lang="en-US" sz="7200" spc="-180" kern="0" dirty="0">
+              <a:rPr lang="en-US" sz="7200" kern="0" spc="-180" dirty="0">
                 <a:solidFill>
                   <a:srgbClr val="F2EFE8"/>
                 </a:solidFill>
@@ -27355,14 +26713,8 @@
               </a:rPr>
               <a:t>Two protocols. </a:t>
             </a:r>
-            <a:pPr algn="l" indent="0" marL="0">
-              <a:lnSpc>
-                <a:spcPct val="96000"/>
-              </a:lnSpc>
-              <a:buNone/>
-            </a:pPr>
-            <a:r>
-              <a:rPr lang="en-US" sz="7200" i="1" spc="-180" kern="0" dirty="0">
+            <a:r>
+              <a:rPr lang="en-US" sz="7200" i="1" kern="0" spc="-180" dirty="0">
                 <a:solidFill>
                   <a:srgbClr val="D6FF3D"/>
                 </a:solidFill>
@@ -27399,11 +26751,11 @@
           </a:bodyPr>
           <a:lstStyle/>
           <a:p>
-            <a:pPr algn="l" indent="0" marL="0">
-              <a:buNone/>
-            </a:pPr>
-            <a:r>
-              <a:rPr lang="en-US" sz="1800" spc="180" kern="0" dirty="0">
+            <a:pPr marL="0" indent="0" algn="l">
+              <a:buNone/>
+            </a:pPr>
+            <a:r>
+              <a:rPr lang="en-US" sz="1800" kern="0" spc="180" dirty="0">
                 <a:solidFill>
                   <a:srgbClr val="FF5B1F"/>
                 </a:solidFill>
@@ -27480,7 +26832,7 @@
           </a:bodyPr>
           <a:lstStyle/>
           <a:p>
-            <a:pPr algn="l" indent="0" marL="0">
+            <a:pPr marL="0" indent="0" algn="l">
               <a:lnSpc>
                 <a:spcPct val="132000"/>
               </a:lnSpc>
@@ -27500,7 +26852,7 @@
             <a:endParaRPr lang="en-US" sz="1425" dirty="0"/>
           </a:p>
           <a:p>
-            <a:pPr algn="l" indent="0" marL="0">
+            <a:pPr marL="0" indent="0" algn="l">
               <a:lnSpc>
                 <a:spcPct val="132000"/>
               </a:lnSpc>
@@ -27520,7 +26872,7 @@
             <a:endParaRPr lang="en-US" sz="1425" dirty="0"/>
           </a:p>
           <a:p>
-            <a:pPr algn="l" indent="0" marL="0">
+            <a:pPr marL="0" indent="0" algn="l">
               <a:lnSpc>
                 <a:spcPct val="132000"/>
               </a:lnSpc>
@@ -27540,7 +26892,7 @@
             <a:endParaRPr lang="en-US" sz="1425" dirty="0"/>
           </a:p>
           <a:p>
-            <a:pPr algn="l" indent="0" marL="0">
+            <a:pPr marL="0" indent="0" algn="l">
               <a:lnSpc>
                 <a:spcPct val="132000"/>
               </a:lnSpc>
@@ -27560,7 +26912,7 @@
             <a:endParaRPr lang="en-US" sz="1425" dirty="0"/>
           </a:p>
           <a:p>
-            <a:pPr algn="l" indent="0" marL="0">
+            <a:pPr marL="0" indent="0" algn="l">
               <a:lnSpc>
                 <a:spcPct val="132000"/>
               </a:lnSpc>
@@ -27580,7 +26932,7 @@
             <a:endParaRPr lang="en-US" sz="1425" dirty="0"/>
           </a:p>
           <a:p>
-            <a:pPr algn="l" indent="0" marL="0">
+            <a:pPr marL="0" indent="0" algn="l">
               <a:lnSpc>
                 <a:spcPct val="132000"/>
               </a:lnSpc>
@@ -27600,7 +26952,7 @@
             <a:endParaRPr lang="en-US" sz="1425" dirty="0"/>
           </a:p>
           <a:p>
-            <a:pPr algn="l" indent="0" marL="0">
+            <a:pPr marL="0" indent="0" algn="l">
               <a:lnSpc>
                 <a:spcPct val="132000"/>
               </a:lnSpc>
@@ -27609,7 +26961,7 @@
             <a:endParaRPr lang="en-US" sz="1425" dirty="0"/>
           </a:p>
           <a:p>
-            <a:pPr algn="l" indent="0" marL="0">
+            <a:pPr marL="0" indent="0" algn="l">
               <a:lnSpc>
                 <a:spcPct val="132000"/>
               </a:lnSpc>
@@ -27629,7 +26981,7 @@
             <a:endParaRPr lang="en-US" sz="1425" dirty="0"/>
           </a:p>
           <a:p>
-            <a:pPr algn="l" indent="0" marL="0">
+            <a:pPr marL="0" indent="0" algn="l">
               <a:lnSpc>
                 <a:spcPct val="132000"/>
               </a:lnSpc>
@@ -27638,7 +26990,7 @@
             <a:endParaRPr lang="en-US" sz="1425" dirty="0"/>
           </a:p>
           <a:p>
-            <a:pPr algn="l" indent="0" marL="0">
+            <a:pPr marL="0" indent="0" algn="l">
               <a:lnSpc>
                 <a:spcPct val="132000"/>
               </a:lnSpc>
@@ -27658,7 +27010,7 @@
             <a:endParaRPr lang="en-US" sz="1425" dirty="0"/>
           </a:p>
           <a:p>
-            <a:pPr algn="l" indent="0" marL="0">
+            <a:pPr marL="0" indent="0" algn="l">
               <a:lnSpc>
                 <a:spcPct val="132000"/>
               </a:lnSpc>
@@ -27678,7 +27030,7 @@
             <a:endParaRPr lang="en-US" sz="1425" dirty="0"/>
           </a:p>
           <a:p>
-            <a:pPr algn="l" indent="0" marL="0">
+            <a:pPr marL="0" indent="0" algn="l">
               <a:lnSpc>
                 <a:spcPct val="132000"/>
               </a:lnSpc>
@@ -27698,7 +27050,7 @@
             <a:endParaRPr lang="en-US" sz="1425" dirty="0"/>
           </a:p>
           <a:p>
-            <a:pPr algn="l" indent="0" marL="0">
+            <a:pPr marL="0" indent="0" algn="l">
               <a:lnSpc>
                 <a:spcPct val="132000"/>
               </a:lnSpc>
@@ -27718,7 +27070,7 @@
             <a:endParaRPr lang="en-US" sz="1425" dirty="0"/>
           </a:p>
           <a:p>
-            <a:pPr algn="l" indent="0" marL="0">
+            <a:pPr marL="0" indent="0" algn="l">
               <a:lnSpc>
                 <a:spcPct val="132000"/>
               </a:lnSpc>
@@ -27738,7 +27090,7 @@
             <a:endParaRPr lang="en-US" sz="1425" dirty="0"/>
           </a:p>
           <a:p>
-            <a:pPr algn="l" indent="0" marL="0">
+            <a:pPr marL="0" indent="0" algn="l">
               <a:lnSpc>
                 <a:spcPct val="132000"/>
               </a:lnSpc>
@@ -27758,7 +27110,7 @@
             <a:endParaRPr lang="en-US" sz="1425" dirty="0"/>
           </a:p>
           <a:p>
-            <a:pPr algn="l" indent="0" marL="0">
+            <a:pPr marL="0" indent="0" algn="l">
               <a:lnSpc>
                 <a:spcPct val="132000"/>
               </a:lnSpc>
@@ -27767,7 +27119,7 @@
             <a:endParaRPr lang="en-US" sz="1425" dirty="0"/>
           </a:p>
           <a:p>
-            <a:pPr algn="l" indent="0" marL="0">
+            <a:pPr marL="0" indent="0" algn="l">
               <a:lnSpc>
                 <a:spcPct val="132000"/>
               </a:lnSpc>
@@ -27787,7 +27139,7 @@
             <a:endParaRPr lang="en-US" sz="1425" dirty="0"/>
           </a:p>
           <a:p>
-            <a:pPr algn="l" indent="0" marL="0">
+            <a:pPr marL="0" indent="0" algn="l">
               <a:lnSpc>
                 <a:spcPct val="132000"/>
               </a:lnSpc>
@@ -27831,7 +27183,7 @@
           </a:bodyPr>
           <a:lstStyle/>
           <a:p>
-            <a:pPr algn="l" indent="0" marL="0">
+            <a:pPr marL="0" indent="0" algn="l">
               <a:lnSpc>
                 <a:spcPct val="140000"/>
               </a:lnSpc>
@@ -27850,12 +27202,6 @@
               </a:rPr>
               <a:t>Retrieval practice yields </a:t>
             </a:r>
-            <a:pPr algn="l" indent="0" marL="0">
-              <a:lnSpc>
-                <a:spcPct val="140000"/>
-              </a:lnSpc>
-              <a:buNone/>
-            </a:pPr>
             <a:r>
               <a:rPr lang="en-US" sz="1350" b="1" dirty="0">
                 <a:solidFill>
@@ -27867,12 +27213,6 @@
               </a:rPr>
               <a:t>d ≈ 0.7 </a:t>
             </a:r>
-            <a:pPr algn="l" indent="0" marL="0">
-              <a:lnSpc>
-                <a:spcPct val="140000"/>
-              </a:lnSpc>
-              <a:buNone/>
-            </a:pPr>
             <a:r>
               <a:rPr lang="en-US" sz="1350" dirty="0">
                 <a:solidFill>
@@ -27913,11 +27253,11 @@
           </a:bodyPr>
           <a:lstStyle/>
           <a:p>
-            <a:pPr algn="l" indent="0" marL="0">
-              <a:buNone/>
-            </a:pPr>
-            <a:r>
-              <a:rPr lang="en-US" sz="1800" spc="180" kern="0" dirty="0">
+            <a:pPr marL="0" indent="0" algn="l">
+              <a:buNone/>
+            </a:pPr>
+            <a:r>
+              <a:rPr lang="en-US" sz="1800" kern="0" spc="180" dirty="0">
                 <a:solidFill>
                   <a:srgbClr val="FF5B1F"/>
                 </a:solidFill>
@@ -27994,7 +27334,7 @@
           </a:bodyPr>
           <a:lstStyle/>
           <a:p>
-            <a:pPr algn="l" indent="0" marL="0">
+            <a:pPr marL="0" indent="0" algn="l">
               <a:lnSpc>
                 <a:spcPct val="132000"/>
               </a:lnSpc>
@@ -28014,7 +27354,7 @@
             <a:endParaRPr lang="en-US" sz="1425" dirty="0"/>
           </a:p>
           <a:p>
-            <a:pPr algn="l" indent="0" marL="0">
+            <a:pPr marL="0" indent="0" algn="l">
               <a:lnSpc>
                 <a:spcPct val="132000"/>
               </a:lnSpc>
@@ -28034,7 +27374,7 @@
             <a:endParaRPr lang="en-US" sz="1425" dirty="0"/>
           </a:p>
           <a:p>
-            <a:pPr algn="l" indent="0" marL="0">
+            <a:pPr marL="0" indent="0" algn="l">
               <a:lnSpc>
                 <a:spcPct val="132000"/>
               </a:lnSpc>
@@ -28043,7 +27383,7 @@
             <a:endParaRPr lang="en-US" sz="1425" dirty="0"/>
           </a:p>
           <a:p>
-            <a:pPr algn="l" indent="0" marL="0">
+            <a:pPr marL="0" indent="0" algn="l">
               <a:lnSpc>
                 <a:spcPct val="132000"/>
               </a:lnSpc>
@@ -28063,7 +27403,7 @@
             <a:endParaRPr lang="en-US" sz="1425" dirty="0"/>
           </a:p>
           <a:p>
-            <a:pPr algn="l" indent="0" marL="0">
+            <a:pPr marL="0" indent="0" algn="l">
               <a:lnSpc>
                 <a:spcPct val="132000"/>
               </a:lnSpc>
@@ -28083,7 +27423,7 @@
             <a:endParaRPr lang="en-US" sz="1425" dirty="0"/>
           </a:p>
           <a:p>
-            <a:pPr algn="l" indent="0" marL="0">
+            <a:pPr marL="0" indent="0" algn="l">
               <a:lnSpc>
                 <a:spcPct val="132000"/>
               </a:lnSpc>
@@ -28103,7 +27443,7 @@
             <a:endParaRPr lang="en-US" sz="1425" dirty="0"/>
           </a:p>
           <a:p>
-            <a:pPr algn="l" indent="0" marL="0">
+            <a:pPr marL="0" indent="0" algn="l">
               <a:lnSpc>
                 <a:spcPct val="132000"/>
               </a:lnSpc>
@@ -28123,7 +27463,7 @@
             <a:endParaRPr lang="en-US" sz="1425" dirty="0"/>
           </a:p>
           <a:p>
-            <a:pPr algn="l" indent="0" marL="0">
+            <a:pPr marL="0" indent="0" algn="l">
               <a:lnSpc>
                 <a:spcPct val="132000"/>
               </a:lnSpc>
@@ -28132,7 +27472,7 @@
             <a:endParaRPr lang="en-US" sz="1425" dirty="0"/>
           </a:p>
           <a:p>
-            <a:pPr algn="l" indent="0" marL="0">
+            <a:pPr marL="0" indent="0" algn="l">
               <a:lnSpc>
                 <a:spcPct val="132000"/>
               </a:lnSpc>
@@ -28152,7 +27492,7 @@
             <a:endParaRPr lang="en-US" sz="1425" dirty="0"/>
           </a:p>
           <a:p>
-            <a:pPr algn="l" indent="0" marL="0">
+            <a:pPr marL="0" indent="0" algn="l">
               <a:lnSpc>
                 <a:spcPct val="132000"/>
               </a:lnSpc>
@@ -28172,7 +27512,7 @@
             <a:endParaRPr lang="en-US" sz="1425" dirty="0"/>
           </a:p>
           <a:p>
-            <a:pPr algn="l" indent="0" marL="0">
+            <a:pPr marL="0" indent="0" algn="l">
               <a:lnSpc>
                 <a:spcPct val="132000"/>
               </a:lnSpc>
@@ -28192,7 +27532,7 @@
             <a:endParaRPr lang="en-US" sz="1425" dirty="0"/>
           </a:p>
           <a:p>
-            <a:pPr algn="l" indent="0" marL="0">
+            <a:pPr marL="0" indent="0" algn="l">
               <a:lnSpc>
                 <a:spcPct val="132000"/>
               </a:lnSpc>
@@ -28212,7 +27552,7 @@
             <a:endParaRPr lang="en-US" sz="1425" dirty="0"/>
           </a:p>
           <a:p>
-            <a:pPr algn="l" indent="0" marL="0">
+            <a:pPr marL="0" indent="0" algn="l">
               <a:lnSpc>
                 <a:spcPct val="132000"/>
               </a:lnSpc>
@@ -28232,7 +27572,7 @@
             <a:endParaRPr lang="en-US" sz="1425" dirty="0"/>
           </a:p>
           <a:p>
-            <a:pPr algn="l" indent="0" marL="0">
+            <a:pPr marL="0" indent="0" algn="l">
               <a:lnSpc>
                 <a:spcPct val="132000"/>
               </a:lnSpc>
@@ -28252,7 +27592,7 @@
             <a:endParaRPr lang="en-US" sz="1425" dirty="0"/>
           </a:p>
           <a:p>
-            <a:pPr algn="l" indent="0" marL="0">
+            <a:pPr marL="0" indent="0" algn="l">
               <a:lnSpc>
                 <a:spcPct val="132000"/>
               </a:lnSpc>
@@ -28272,7 +27612,7 @@
             <a:endParaRPr lang="en-US" sz="1425" dirty="0"/>
           </a:p>
           <a:p>
-            <a:pPr algn="l" indent="0" marL="0">
+            <a:pPr marL="0" indent="0" algn="l">
               <a:lnSpc>
                 <a:spcPct val="132000"/>
               </a:lnSpc>
@@ -28281,7 +27621,7 @@
             <a:endParaRPr lang="en-US" sz="1425" dirty="0"/>
           </a:p>
           <a:p>
-            <a:pPr algn="l" indent="0" marL="0">
+            <a:pPr marL="0" indent="0" algn="l">
               <a:lnSpc>
                 <a:spcPct val="132000"/>
               </a:lnSpc>
@@ -28301,7 +27641,7 @@
             <a:endParaRPr lang="en-US" sz="1425" dirty="0"/>
           </a:p>
           <a:p>
-            <a:pPr algn="l" indent="0" marL="0">
+            <a:pPr marL="0" indent="0" algn="l">
               <a:lnSpc>
                 <a:spcPct val="132000"/>
               </a:lnSpc>
@@ -28321,7 +27661,7 @@
             <a:endParaRPr lang="en-US" sz="1425" dirty="0"/>
           </a:p>
           <a:p>
-            <a:pPr algn="l" indent="0" marL="0">
+            <a:pPr marL="0" indent="0" algn="l">
               <a:lnSpc>
                 <a:spcPct val="132000"/>
               </a:lnSpc>
@@ -28341,7 +27681,7 @@
             <a:endParaRPr lang="en-US" sz="1425" dirty="0"/>
           </a:p>
           <a:p>
-            <a:pPr algn="l" indent="0" marL="0">
+            <a:pPr marL="0" indent="0" algn="l">
               <a:lnSpc>
                 <a:spcPct val="132000"/>
               </a:lnSpc>
@@ -28361,7 +27701,7 @@
             <a:endParaRPr lang="en-US" sz="1425" dirty="0"/>
           </a:p>
           <a:p>
-            <a:pPr algn="l" indent="0" marL="0">
+            <a:pPr marL="0" indent="0" algn="l">
               <a:lnSpc>
                 <a:spcPct val="132000"/>
               </a:lnSpc>
@@ -28405,7 +27745,7 @@
           </a:bodyPr>
           <a:lstStyle/>
           <a:p>
-            <a:pPr algn="l" indent="0" marL="0">
+            <a:pPr marL="0" indent="0" algn="l">
               <a:lnSpc>
                 <a:spcPct val="140000"/>
               </a:lnSpc>
@@ -28473,14 +27813,14 @@
           </a:bodyPr>
           <a:lstStyle/>
           <a:p>
-            <a:pPr algn="l" indent="0" marL="0">
+            <a:pPr marL="0" indent="0" algn="l">
               <a:lnSpc>
                 <a:spcPct val="110000"/>
               </a:lnSpc>
               <a:buNone/>
             </a:pPr>
             <a:r>
-              <a:rPr lang="en-US" sz="2250" i="1" spc="-22" kern="0" dirty="0">
+              <a:rPr lang="en-US" sz="2250" i="1" kern="0" spc="-22" dirty="0">
                 <a:solidFill>
                   <a:srgbClr val="F2EFE8"/>
                 </a:solidFill>
@@ -28490,14 +27830,8 @@
               </a:rPr>
               <a:t>The objective is not memorisation. </a:t>
             </a:r>
-            <a:pPr algn="l" indent="0" marL="0">
-              <a:lnSpc>
-                <a:spcPct val="110000"/>
-              </a:lnSpc>
-              <a:buNone/>
-            </a:pPr>
-            <a:r>
-              <a:rPr lang="en-US" sz="2250" i="1" spc="-22" kern="0" dirty="0">
+            <a:r>
+              <a:rPr lang="en-US" sz="2250" i="1" kern="0" spc="-22" dirty="0">
                 <a:solidFill>
                   <a:srgbClr val="FF5B1F"/>
                 </a:solidFill>
@@ -28534,11 +27868,11 @@
           </a:bodyPr>
           <a:lstStyle/>
           <a:p>
-            <a:pPr algn="l" indent="0" marL="0">
-              <a:buNone/>
-            </a:pPr>
-            <a:r>
-              <a:rPr lang="en-US" sz="1800" spc="108" kern="0" dirty="0">
+            <a:pPr marL="0" indent="0" algn="l">
+              <a:buNone/>
+            </a:pPr>
+            <a:r>
+              <a:rPr lang="en-US" sz="1800" kern="0" spc="108" dirty="0">
                 <a:solidFill>
                   <a:srgbClr val="F2EFE8">
                     <a:alpha val="50000"/>
@@ -28577,11 +27911,11 @@
           </a:bodyPr>
           <a:lstStyle/>
           <a:p>
-            <a:pPr algn="l" indent="0" marL="0">
-              <a:buNone/>
-            </a:pPr>
-            <a:r>
-              <a:rPr lang="en-US" sz="2700" i="1" spc="-54" kern="0" dirty="0">
+            <a:pPr marL="0" indent="0" algn="l">
+              <a:buNone/>
+            </a:pPr>
+            <a:r>
+              <a:rPr lang="en-US" sz="2700" i="1" kern="0" spc="-54" dirty="0">
                 <a:solidFill>
                   <a:srgbClr val="F2EFE8">
                     <a:alpha val="50000"/>
@@ -28613,6 +27947,7 @@
         <a:solidFill>
           <a:srgbClr val="FF5B1F"/>
         </a:solidFill>
+        <a:effectLst/>
       </p:bgPr>
     </p:bg>
     <p:spTree>
@@ -28652,11 +27987,11 @@
           </a:bodyPr>
           <a:lstStyle/>
           <a:p>
-            <a:pPr algn="l" indent="0" marL="0">
-              <a:buNone/>
-            </a:pPr>
-            <a:r>
-              <a:rPr lang="en-US" sz="1800" spc="108" kern="0" dirty="0">
+            <a:pPr marL="0" indent="0" algn="l">
+              <a:buNone/>
+            </a:pPr>
+            <a:r>
+              <a:rPr lang="en-US" sz="1800" kern="0" spc="108" dirty="0">
                 <a:solidFill>
                   <a:srgbClr val="0E0E0E">
                     <a:alpha val="70000"/>
@@ -28695,11 +28030,11 @@
           </a:bodyPr>
           <a:lstStyle/>
           <a:p>
-            <a:pPr algn="l" indent="0" marL="0">
-              <a:buNone/>
-            </a:pPr>
-            <a:r>
-              <a:rPr lang="en-US" sz="1800" spc="108" kern="0" dirty="0">
+            <a:pPr marL="0" indent="0" algn="l">
+              <a:buNone/>
+            </a:pPr>
+            <a:r>
+              <a:rPr lang="en-US" sz="1800" kern="0" spc="108" dirty="0">
                 <a:solidFill>
                   <a:srgbClr val="0E0E0E">
                     <a:alpha val="70000"/>
@@ -28738,14 +28073,14 @@
           </a:bodyPr>
           <a:lstStyle/>
           <a:p>
-            <a:pPr algn="l" indent="0" marL="0">
+            <a:pPr marL="0" indent="0" algn="l">
               <a:lnSpc>
                 <a:spcPct val="85000"/>
               </a:lnSpc>
               <a:buNone/>
             </a:pPr>
             <a:r>
-              <a:rPr lang="en-US" sz="28500" i="1" spc="-1425" kern="0" dirty="0">
+              <a:rPr lang="en-US" sz="28500" i="1" kern="0" spc="-1425" dirty="0">
                 <a:solidFill>
                   <a:srgbClr val="0E0E0E"/>
                 </a:solidFill>
@@ -28755,14 +28090,8 @@
               </a:rPr>
               <a:t>91</a:t>
             </a:r>
-            <a:pPr algn="l" indent="0" marL="0">
-              <a:lnSpc>
-                <a:spcPct val="85000"/>
-              </a:lnSpc>
-              <a:buNone/>
-            </a:pPr>
-            <a:r>
-              <a:rPr lang="en-US" sz="12000" i="1" spc="-1425" kern="0" dirty="0">
+            <a:r>
+              <a:rPr lang="en-US" sz="12000" i="1" kern="0" spc="-1425" dirty="0">
                 <a:solidFill>
                   <a:srgbClr val="0E0E0E"/>
                 </a:solidFill>
@@ -28799,11 +28128,11 @@
           </a:bodyPr>
           <a:lstStyle/>
           <a:p>
-            <a:pPr algn="l" indent="0" marL="0">
-              <a:buNone/>
-            </a:pPr>
-            <a:r>
-              <a:rPr lang="en-US" sz="1800" spc="324" kern="0" dirty="0">
+            <a:pPr marL="0" indent="0" algn="l">
+              <a:buNone/>
+            </a:pPr>
+            <a:r>
+              <a:rPr lang="en-US" sz="1800" kern="0" spc="324" dirty="0">
                 <a:solidFill>
                   <a:srgbClr val="0E0E0E"/>
                 </a:solidFill>
@@ -28840,14 +28169,14 @@
           </a:bodyPr>
           <a:lstStyle/>
           <a:p>
-            <a:pPr algn="l" indent="0" marL="0">
+            <a:pPr marL="0" indent="0" algn="l">
               <a:lnSpc>
                 <a:spcPct val="100000"/>
               </a:lnSpc>
               <a:buNone/>
             </a:pPr>
             <a:r>
-              <a:rPr lang="en-US" sz="3600" spc="-72" kern="0" dirty="0">
+              <a:rPr lang="en-US" sz="3600" kern="0" spc="-72" dirty="0">
                 <a:solidFill>
                   <a:srgbClr val="0E0E0E"/>
                 </a:solidFill>
@@ -28857,14 +28186,8 @@
               </a:rPr>
               <a:t>Identical hours. Identical material. </a:t>
             </a:r>
-            <a:pPr algn="l" indent="0" marL="0">
-              <a:lnSpc>
-                <a:spcPct val="100000"/>
-              </a:lnSpc>
-              <a:buNone/>
-            </a:pPr>
-            <a:r>
-              <a:rPr lang="en-US" sz="3600" i="1" spc="-72" kern="0" dirty="0">
+            <a:r>
+              <a:rPr lang="en-US" sz="3600" i="1" kern="0" spc="-72" dirty="0">
                 <a:solidFill>
                   <a:srgbClr val="0E0E0E"/>
                 </a:solidFill>
@@ -28921,11 +28244,11 @@
           </a:bodyPr>
           <a:lstStyle/>
           <a:p>
-            <a:pPr algn="l" indent="0" marL="0">
-              <a:buNone/>
-            </a:pPr>
-            <a:r>
-              <a:rPr lang="en-US" sz="1800" b="1" spc="72" kern="0" dirty="0">
+            <a:pPr marL="0" indent="0" algn="l">
+              <a:buNone/>
+            </a:pPr>
+            <a:r>
+              <a:rPr lang="en-US" sz="1800" b="1" kern="0" spc="72" dirty="0">
                 <a:solidFill>
                   <a:srgbClr val="0E0E0E"/>
                 </a:solidFill>
@@ -28962,7 +28285,7 @@
           </a:bodyPr>
           <a:lstStyle/>
           <a:p>
-            <a:pPr algn="l" indent="0" marL="0">
+            <a:pPr marL="0" indent="0" algn="l">
               <a:lnSpc>
                 <a:spcPct val="145000"/>
               </a:lnSpc>
@@ -28979,12 +28302,6 @@
               </a:rPr>
               <a:t>Prompts engineered to </a:t>
             </a:r>
-            <a:pPr algn="l" indent="0" marL="0">
-              <a:lnSpc>
-                <a:spcPct val="145000"/>
-              </a:lnSpc>
-              <a:buNone/>
-            </a:pPr>
             <a:r>
               <a:rPr lang="en-US" sz="2250" b="1" dirty="0">
                 <a:solidFill>
@@ -28996,12 +28313,6 @@
               </a:rPr>
               <a:t>force retrieval and analysis. </a:t>
             </a:r>
-            <a:pPr algn="l" indent="0" marL="0">
-              <a:lnSpc>
-                <a:spcPct val="145000"/>
-              </a:lnSpc>
-              <a:buNone/>
-            </a:pPr>
             <a:r>
               <a:rPr lang="en-US" sz="2250" dirty="0">
                 <a:solidFill>
@@ -29040,11 +28351,11 @@
           </a:bodyPr>
           <a:lstStyle/>
           <a:p>
-            <a:pPr algn="l" indent="0" marL="0">
-              <a:buNone/>
-            </a:pPr>
-            <a:r>
-              <a:rPr lang="en-US" sz="1800" b="1" spc="72" kern="0" dirty="0">
+            <a:pPr marL="0" indent="0" algn="l">
+              <a:buNone/>
+            </a:pPr>
+            <a:r>
+              <a:rPr lang="en-US" sz="1800" b="1" kern="0" spc="72" dirty="0">
                 <a:solidFill>
                   <a:srgbClr val="FF3355"/>
                 </a:solidFill>
@@ -29081,7 +28392,7 @@
           </a:bodyPr>
           <a:lstStyle/>
           <a:p>
-            <a:pPr algn="l" indent="0" marL="0">
+            <a:pPr marL="0" indent="0" algn="l">
               <a:lnSpc>
                 <a:spcPct val="145000"/>
               </a:lnSpc>
@@ -29098,12 +28409,6 @@
               </a:rPr>
               <a:t>Prompts that </a:t>
             </a:r>
-            <a:pPr algn="l" indent="0" marL="0">
-              <a:lnSpc>
-                <a:spcPct val="145000"/>
-              </a:lnSpc>
-              <a:buNone/>
-            </a:pPr>
             <a:r>
               <a:rPr lang="en-US" sz="2250" b="1" dirty="0">
                 <a:solidFill>
@@ -29115,12 +28420,6 @@
               </a:rPr>
               <a:t>substitute for thinking. </a:t>
             </a:r>
-            <a:pPr algn="l" indent="0" marL="0">
-              <a:lnSpc>
-                <a:spcPct val="145000"/>
-              </a:lnSpc>
-              <a:buNone/>
-            </a:pPr>
             <a:r>
               <a:rPr lang="en-US" sz="2250" dirty="0">
                 <a:solidFill>
@@ -29159,11 +28458,11 @@
           </a:bodyPr>
           <a:lstStyle/>
           <a:p>
-            <a:pPr algn="l" indent="0" marL="0">
-              <a:buNone/>
-            </a:pPr>
-            <a:r>
-              <a:rPr lang="en-US" sz="1800" spc="108" kern="0" dirty="0">
+            <a:pPr marL="0" indent="0" algn="l">
+              <a:buNone/>
+            </a:pPr>
+            <a:r>
+              <a:rPr lang="en-US" sz="1800" kern="0" spc="108" dirty="0">
                 <a:solidFill>
                   <a:srgbClr val="0E0E0E">
                     <a:alpha val="70000"/>
@@ -29202,11 +28501,11 @@
           </a:bodyPr>
           <a:lstStyle/>
           <a:p>
-            <a:pPr algn="l" indent="0" marL="0">
-              <a:buNone/>
-            </a:pPr>
-            <a:r>
-              <a:rPr lang="en-US" sz="2700" i="1" spc="-54" kern="0" dirty="0">
+            <a:pPr marL="0" indent="0" algn="l">
+              <a:buNone/>
+            </a:pPr>
+            <a:r>
+              <a:rPr lang="en-US" sz="2700" i="1" kern="0" spc="-54" dirty="0">
                 <a:solidFill>
                   <a:srgbClr val="0E0E0E">
                     <a:alpha val="70000"/>
@@ -29238,6 +28537,7 @@
         <a:solidFill>
           <a:srgbClr val="FF3355"/>
         </a:solidFill>
+        <a:effectLst/>
       </p:bgPr>
     </p:bg>
     <p:spTree>
@@ -29297,11 +28597,11 @@
           </a:bodyPr>
           <a:lstStyle/>
           <a:p>
-            <a:pPr algn="l" indent="0" marL="0">
-              <a:buNone/>
-            </a:pPr>
-            <a:r>
-              <a:rPr lang="en-US" sz="1800" spc="108" kern="0" dirty="0">
+            <a:pPr marL="0" indent="0" algn="l">
+              <a:buNone/>
+            </a:pPr>
+            <a:r>
+              <a:rPr lang="en-US" sz="1800" kern="0" spc="108" dirty="0">
                 <a:solidFill>
                   <a:srgbClr val="F2EFE8">
                     <a:alpha val="85000"/>
@@ -29340,11 +28640,11 @@
           </a:bodyPr>
           <a:lstStyle/>
           <a:p>
-            <a:pPr algn="l" indent="0" marL="0">
-              <a:buNone/>
-            </a:pPr>
-            <a:r>
-              <a:rPr lang="en-US" sz="1800" spc="108" kern="0" dirty="0">
+            <a:pPr marL="0" indent="0" algn="l">
+              <a:buNone/>
+            </a:pPr>
+            <a:r>
+              <a:rPr lang="en-US" sz="1800" kern="0" spc="108" dirty="0">
                 <a:solidFill>
                   <a:srgbClr val="F2EFE8">
                     <a:alpha val="85000"/>
@@ -29403,11 +28703,11 @@
           </a:bodyPr>
           <a:lstStyle/>
           <a:p>
-            <a:pPr algn="l" indent="0" marL="0">
-              <a:buNone/>
-            </a:pPr>
-            <a:r>
-              <a:rPr lang="en-US" sz="1800" spc="144" kern="0" dirty="0">
+            <a:pPr marL="0" indent="0" algn="l">
+              <a:buNone/>
+            </a:pPr>
+            <a:r>
+              <a:rPr lang="en-US" sz="1800" kern="0" spc="144" dirty="0">
                 <a:solidFill>
                   <a:srgbClr val="F2EFE8"/>
                 </a:solidFill>
@@ -29444,11 +28744,11 @@
           </a:bodyPr>
           <a:lstStyle/>
           <a:p>
-            <a:pPr algn="l" indent="0" marL="0">
-              <a:buNone/>
-            </a:pPr>
-            <a:r>
-              <a:rPr lang="en-US" sz="1800" spc="144" kern="0" dirty="0">
+            <a:pPr marL="0" indent="0" algn="l">
+              <a:buNone/>
+            </a:pPr>
+            <a:r>
+              <a:rPr lang="en-US" sz="1800" kern="0" spc="144" dirty="0">
                 <a:solidFill>
                   <a:srgbClr val="F2EFE8">
                     <a:alpha val="85000"/>
@@ -29507,11 +28807,11 @@
           </a:bodyPr>
           <a:lstStyle/>
           <a:p>
-            <a:pPr algn="l" indent="0" marL="0">
-              <a:buNone/>
-            </a:pPr>
-            <a:r>
-              <a:rPr lang="en-US" sz="2100" b="1" i="1" spc="216" kern="0" dirty="0">
+            <a:pPr marL="0" indent="0" algn="l">
+              <a:buNone/>
+            </a:pPr>
+            <a:r>
+              <a:rPr lang="en-US" sz="2100" b="1" i="1" kern="0" spc="216" dirty="0">
                 <a:solidFill>
                   <a:srgbClr val="F2EFE8"/>
                 </a:solidFill>
@@ -29548,11 +28848,11 @@
           </a:bodyPr>
           <a:lstStyle/>
           <a:p>
-            <a:pPr algn="l" indent="0" marL="0">
-              <a:buNone/>
-            </a:pPr>
-            <a:r>
-              <a:rPr lang="en-US" sz="1800" b="1" spc="216" kern="0" dirty="0">
+            <a:pPr marL="0" indent="0" algn="l">
+              <a:buNone/>
+            </a:pPr>
+            <a:r>
+              <a:rPr lang="en-US" sz="1800" b="1" kern="0" spc="216" dirty="0">
                 <a:solidFill>
                   <a:srgbClr val="F2EFE8"/>
                 </a:solidFill>
@@ -29589,14 +28889,14 @@
           </a:bodyPr>
           <a:lstStyle/>
           <a:p>
-            <a:pPr algn="l" indent="0" marL="0">
+            <a:pPr marL="0" indent="0" algn="l">
               <a:lnSpc>
                 <a:spcPct val="112000"/>
               </a:lnSpc>
               <a:buNone/>
             </a:pPr>
             <a:r>
-              <a:rPr lang="en-US" sz="7200" spc="-252" kern="0" dirty="0">
+              <a:rPr lang="en-US" sz="7200" kern="0" spc="-252" dirty="0">
                 <a:solidFill>
                   <a:srgbClr val="F2EFE8"/>
                 </a:solidFill>
@@ -29606,14 +28906,8 @@
               </a:rPr>
               <a:t>“This citation does </a:t>
             </a:r>
-            <a:pPr algn="l" indent="0" marL="0">
-              <a:lnSpc>
-                <a:spcPct val="112000"/>
-              </a:lnSpc>
-              <a:buNone/>
-            </a:pPr>
-            <a:r>
-              <a:rPr lang="en-US" sz="7200" i="1" spc="-252" kern="0" dirty="0">
+            <a:r>
+              <a:rPr lang="en-US" sz="7200" i="1" kern="0" spc="-252" dirty="0">
                 <a:solidFill>
                   <a:srgbClr val="F2EFE8"/>
                 </a:solidFill>
@@ -29650,7 +28944,7 @@
           </a:bodyPr>
           <a:lstStyle/>
           <a:p>
-            <a:pPr algn="l" indent="0" marL="0">
+            <a:pPr marL="0" indent="0" algn="l">
               <a:lnSpc>
                 <a:spcPct val="145000"/>
               </a:lnSpc>
@@ -29667,12 +28961,6 @@
               </a:rPr>
               <a:t>Large language models generate citations that are syntactically plausible but bibliographically nonexistent. Bohannon (2023, </a:t>
             </a:r>
-            <a:pPr algn="l" indent="0" marL="0">
-              <a:lnSpc>
-                <a:spcPct val="145000"/>
-              </a:lnSpc>
-              <a:buNone/>
-            </a:pPr>
             <a:r>
               <a:rPr lang="en-US" sz="1800" i="1" dirty="0">
                 <a:solidFill>
@@ -29684,12 +28972,6 @@
               </a:rPr>
               <a:t>Science </a:t>
             </a:r>
-            <a:pPr algn="l" indent="0" marL="0">
-              <a:lnSpc>
-                <a:spcPct val="145000"/>
-              </a:lnSpc>
-              <a:buNone/>
-            </a:pPr>
             <a:r>
               <a:rPr lang="en-US" sz="1800" dirty="0">
                 <a:solidFill>
@@ -29701,12 +28983,6 @@
               </a:rPr>
               <a:t>) documented the pattern across submitted student work; multiple institutions have updated academic-integrity policies in response. </a:t>
             </a:r>
-            <a:pPr algn="l" indent="0" marL="0">
-              <a:lnSpc>
-                <a:spcPct val="145000"/>
-              </a:lnSpc>
-              <a:buNone/>
-            </a:pPr>
             <a:r>
               <a:rPr lang="en-US" sz="1800" b="1" dirty="0">
                 <a:solidFill>
@@ -29745,11 +29021,11 @@
           </a:bodyPr>
           <a:lstStyle/>
           <a:p>
-            <a:pPr algn="l" indent="0" marL="0">
-              <a:buNone/>
-            </a:pPr>
-            <a:r>
-              <a:rPr lang="en-US" sz="1800" spc="108" kern="0" dirty="0">
+            <a:pPr marL="0" indent="0" algn="l">
+              <a:buNone/>
+            </a:pPr>
+            <a:r>
+              <a:rPr lang="en-US" sz="1800" kern="0" spc="108" dirty="0">
                 <a:solidFill>
                   <a:srgbClr val="F2EFE8">
                     <a:alpha val="70000"/>
@@ -29788,11 +29064,11 @@
           </a:bodyPr>
           <a:lstStyle/>
           <a:p>
-            <a:pPr algn="l" indent="0" marL="0">
-              <a:buNone/>
-            </a:pPr>
-            <a:r>
-              <a:rPr lang="en-US" sz="2700" i="1" spc="-54" kern="0" dirty="0">
+            <a:pPr marL="0" indent="0" algn="l">
+              <a:buNone/>
+            </a:pPr>
+            <a:r>
+              <a:rPr lang="en-US" sz="2700" i="1" kern="0" spc="-54" dirty="0">
                 <a:solidFill>
                   <a:srgbClr val="F2EFE8">
                     <a:alpha val="70000"/>
@@ -30109,4 +29385,299 @@
     </a:ext>
   </a:extLst>
 </a:theme>
+</file>
+
+<file path=ppt/theme/theme2.xml><?xml version="1.0" encoding="utf-8"?>
+<a:theme xmlns:a="http://schemas.openxmlformats.org/drawingml/2006/main" name="Office Theme">
+  <a:themeElements>
+    <a:clrScheme name="Office">
+      <a:dk1>
+        <a:sysClr val="windowText" lastClr="000000"/>
+      </a:dk1>
+      <a:lt1>
+        <a:sysClr val="window" lastClr="FFFFFF"/>
+      </a:lt1>
+      <a:dk2>
+        <a:srgbClr val="44546A"/>
+      </a:dk2>
+      <a:lt2>
+        <a:srgbClr val="E7E6E6"/>
+      </a:lt2>
+      <a:accent1>
+        <a:srgbClr val="4472C4"/>
+      </a:accent1>
+      <a:accent2>
+        <a:srgbClr val="ED7D31"/>
+      </a:accent2>
+      <a:accent3>
+        <a:srgbClr val="A5A5A5"/>
+      </a:accent3>
+      <a:accent4>
+        <a:srgbClr val="FFC000"/>
+      </a:accent4>
+      <a:accent5>
+        <a:srgbClr val="5B9BD5"/>
+      </a:accent5>
+      <a:accent6>
+        <a:srgbClr val="70AD47"/>
+      </a:accent6>
+      <a:hlink>
+        <a:srgbClr val="0563C1"/>
+      </a:hlink>
+      <a:folHlink>
+        <a:srgbClr val="954F72"/>
+      </a:folHlink>
+    </a:clrScheme>
+    <a:fontScheme name="Office">
+      <a:majorFont>
+        <a:latin typeface="Calibri Light" panose="020F0302020204030204"/>
+        <a:ea typeface=""/>
+        <a:cs typeface=""/>
+        <a:font script="Jpan" typeface="游ゴシック Light"/>
+        <a:font script="Hang" typeface="맑은 고딕"/>
+        <a:font script="Hans" typeface="等线 Light"/>
+        <a:font script="Hant" typeface="新細明體"/>
+        <a:font script="Arab" typeface="Times New Roman"/>
+        <a:font script="Hebr" typeface="Times New Roman"/>
+        <a:font script="Thai" typeface="Angsana New"/>
+        <a:font script="Ethi" typeface="Nyala"/>
+        <a:font script="Beng" typeface="Vrinda"/>
+        <a:font script="Gujr" typeface="Shruti"/>
+        <a:font script="Khmr" typeface="MoolBoran"/>
+        <a:font script="Knda" typeface="Tunga"/>
+        <a:font script="Guru" typeface="Raavi"/>
+        <a:font script="Cans" typeface="Euphemia"/>
+        <a:font script="Cher" typeface="Plantagenet Cherokee"/>
+        <a:font script="Yiii" typeface="Microsoft Yi Baiti"/>
+        <a:font script="Tibt" typeface="Microsoft Himalaya"/>
+        <a:font script="Thaa" typeface="MV Boli"/>
+        <a:font script="Deva" typeface="Mangal"/>
+        <a:font script="Telu" typeface="Gautami"/>
+        <a:font script="Taml" typeface="Latha"/>
+        <a:font script="Syrc" typeface="Estrangelo Edessa"/>
+        <a:font script="Orya" typeface="Kalinga"/>
+        <a:font script="Mlym" typeface="Kartika"/>
+        <a:font script="Laoo" typeface="DokChampa"/>
+        <a:font script="Sinh" typeface="Iskoola Pota"/>
+        <a:font script="Mong" typeface="Mongolian Baiti"/>
+        <a:font script="Viet" typeface="Times New Roman"/>
+        <a:font script="Uigh" typeface="Microsoft Uighur"/>
+        <a:font script="Geor" typeface="Sylfaen"/>
+        <a:font script="Armn" typeface="Arial"/>
+        <a:font script="Bugi" typeface="Leelawadee UI"/>
+        <a:font script="Bopo" typeface="Microsoft JhengHei"/>
+        <a:font script="Java" typeface="Javanese Text"/>
+        <a:font script="Lisu" typeface="Segoe UI"/>
+        <a:font script="Mymr" typeface="Myanmar Text"/>
+        <a:font script="Nkoo" typeface="Ebrima"/>
+        <a:font script="Olck" typeface="Nirmala UI"/>
+        <a:font script="Osma" typeface="Ebrima"/>
+        <a:font script="Phag" typeface="Phagspa"/>
+        <a:font script="Syrn" typeface="Estrangelo Edessa"/>
+        <a:font script="Syrj" typeface="Estrangelo Edessa"/>
+        <a:font script="Syre" typeface="Estrangelo Edessa"/>
+        <a:font script="Sora" typeface="Nirmala UI"/>
+        <a:font script="Tale" typeface="Microsoft Tai Le"/>
+        <a:font script="Talu" typeface="Microsoft New Tai Lue"/>
+        <a:font script="Tfng" typeface="Ebrima"/>
+      </a:majorFont>
+      <a:minorFont>
+        <a:latin typeface="Calibri" panose="020F0502020204030204"/>
+        <a:ea typeface=""/>
+        <a:cs typeface=""/>
+        <a:font script="Jpan" typeface="游ゴシック"/>
+        <a:font script="Hang" typeface="맑은 고딕"/>
+        <a:font script="Hans" typeface="等线"/>
+        <a:font script="Hant" typeface="新細明體"/>
+        <a:font script="Arab" typeface="Arial"/>
+        <a:font script="Hebr" typeface="Arial"/>
+        <a:font script="Thai" typeface="Cordia New"/>
+        <a:font script="Ethi" typeface="Nyala"/>
+        <a:font script="Beng" typeface="Vrinda"/>
+        <a:font script="Gujr" typeface="Shruti"/>
+        <a:font script="Khmr" typeface="DaunPenh"/>
+        <a:font script="Knda" typeface="Tunga"/>
+        <a:font script="Guru" typeface="Raavi"/>
+        <a:font script="Cans" typeface="Euphemia"/>
+        <a:font script="Cher" typeface="Plantagenet Cherokee"/>
+        <a:font script="Yiii" typeface="Microsoft Yi Baiti"/>
+        <a:font script="Tibt" typeface="Microsoft Himalaya"/>
+        <a:font script="Thaa" typeface="MV Boli"/>
+        <a:font script="Deva" typeface="Mangal"/>
+        <a:font script="Telu" typeface="Gautami"/>
+        <a:font script="Taml" typeface="Latha"/>
+        <a:font script="Syrc" typeface="Estrangelo Edessa"/>
+        <a:font script="Orya" typeface="Kalinga"/>
+        <a:font script="Mlym" typeface="Kartika"/>
+        <a:font script="Laoo" typeface="DokChampa"/>
+        <a:font script="Sinh" typeface="Iskoola Pota"/>
+        <a:font script="Mong" typeface="Mongolian Baiti"/>
+        <a:font script="Viet" typeface="Arial"/>
+        <a:font script="Uigh" typeface="Microsoft Uighur"/>
+        <a:font script="Geor" typeface="Sylfaen"/>
+        <a:font script="Armn" typeface="Arial"/>
+        <a:font script="Bugi" typeface="Leelawadee UI"/>
+        <a:font script="Bopo" typeface="Microsoft JhengHei"/>
+        <a:font script="Java" typeface="Javanese Text"/>
+        <a:font script="Lisu" typeface="Segoe UI"/>
+        <a:font script="Mymr" typeface="Myanmar Text"/>
+        <a:font script="Nkoo" typeface="Ebrima"/>
+        <a:font script="Olck" typeface="Nirmala UI"/>
+        <a:font script="Osma" typeface="Ebrima"/>
+        <a:font script="Phag" typeface="Phagspa"/>
+        <a:font script="Syrn" typeface="Estrangelo Edessa"/>
+        <a:font script="Syrj" typeface="Estrangelo Edessa"/>
+        <a:font script="Syre" typeface="Estrangelo Edessa"/>
+        <a:font script="Sora" typeface="Nirmala UI"/>
+        <a:font script="Tale" typeface="Microsoft Tai Le"/>
+        <a:font script="Talu" typeface="Microsoft New Tai Lue"/>
+        <a:font script="Tfng" typeface="Ebrima"/>
+      </a:minorFont>
+    </a:fontScheme>
+    <a:fmtScheme name="Office">
+      <a:fillStyleLst>
+        <a:solidFill>
+          <a:schemeClr val="phClr"/>
+        </a:solidFill>
+        <a:gradFill rotWithShape="1">
+          <a:gsLst>
+            <a:gs pos="0">
+              <a:schemeClr val="phClr">
+                <a:lumMod val="110000"/>
+                <a:satMod val="105000"/>
+                <a:tint val="67000"/>
+              </a:schemeClr>
+            </a:gs>
+            <a:gs pos="50000">
+              <a:schemeClr val="phClr">
+                <a:lumMod val="105000"/>
+                <a:satMod val="103000"/>
+                <a:tint val="73000"/>
+              </a:schemeClr>
+            </a:gs>
+            <a:gs pos="100000">
+              <a:schemeClr val="phClr">
+                <a:lumMod val="105000"/>
+                <a:satMod val="109000"/>
+                <a:tint val="81000"/>
+              </a:schemeClr>
+            </a:gs>
+          </a:gsLst>
+          <a:lin ang="5400000" scaled="0"/>
+        </a:gradFill>
+        <a:gradFill rotWithShape="1">
+          <a:gsLst>
+            <a:gs pos="0">
+              <a:schemeClr val="phClr">
+                <a:satMod val="103000"/>
+                <a:lumMod val="102000"/>
+                <a:tint val="94000"/>
+              </a:schemeClr>
+            </a:gs>
+            <a:gs pos="50000">
+              <a:schemeClr val="phClr">
+                <a:satMod val="110000"/>
+                <a:lumMod val="100000"/>
+                <a:shade val="100000"/>
+              </a:schemeClr>
+            </a:gs>
+            <a:gs pos="100000">
+              <a:schemeClr val="phClr">
+                <a:lumMod val="99000"/>
+                <a:satMod val="120000"/>
+                <a:shade val="78000"/>
+              </a:schemeClr>
+            </a:gs>
+          </a:gsLst>
+          <a:lin ang="5400000" scaled="0"/>
+        </a:gradFill>
+      </a:fillStyleLst>
+      <a:lnStyleLst>
+        <a:ln w="6350" cap="flat" cmpd="sng" algn="ctr">
+          <a:solidFill>
+            <a:schemeClr val="phClr"/>
+          </a:solidFill>
+          <a:prstDash val="solid"/>
+          <a:miter lim="800000"/>
+        </a:ln>
+        <a:ln w="12700" cap="flat" cmpd="sng" algn="ctr">
+          <a:solidFill>
+            <a:schemeClr val="phClr"/>
+          </a:solidFill>
+          <a:prstDash val="solid"/>
+          <a:miter lim="800000"/>
+        </a:ln>
+        <a:ln w="19050" cap="flat" cmpd="sng" algn="ctr">
+          <a:solidFill>
+            <a:schemeClr val="phClr"/>
+          </a:solidFill>
+          <a:prstDash val="solid"/>
+          <a:miter lim="800000"/>
+        </a:ln>
+      </a:lnStyleLst>
+      <a:effectStyleLst>
+        <a:effectStyle>
+          <a:effectLst/>
+        </a:effectStyle>
+        <a:effectStyle>
+          <a:effectLst/>
+        </a:effectStyle>
+        <a:effectStyle>
+          <a:effectLst>
+            <a:outerShdw blurRad="57150" dist="19050" dir="5400000" algn="ctr" rotWithShape="0">
+              <a:srgbClr val="000000">
+                <a:alpha val="63000"/>
+              </a:srgbClr>
+            </a:outerShdw>
+          </a:effectLst>
+        </a:effectStyle>
+      </a:effectStyleLst>
+      <a:bgFillStyleLst>
+        <a:solidFill>
+          <a:schemeClr val="phClr"/>
+        </a:solidFill>
+        <a:solidFill>
+          <a:schemeClr val="phClr">
+            <a:tint val="95000"/>
+            <a:satMod val="170000"/>
+          </a:schemeClr>
+        </a:solidFill>
+        <a:gradFill rotWithShape="1">
+          <a:gsLst>
+            <a:gs pos="0">
+              <a:schemeClr val="phClr">
+                <a:tint val="93000"/>
+                <a:satMod val="150000"/>
+                <a:shade val="98000"/>
+                <a:lumMod val="102000"/>
+              </a:schemeClr>
+            </a:gs>
+            <a:gs pos="50000">
+              <a:schemeClr val="phClr">
+                <a:tint val="98000"/>
+                <a:satMod val="130000"/>
+                <a:shade val="90000"/>
+                <a:lumMod val="103000"/>
+              </a:schemeClr>
+            </a:gs>
+            <a:gs pos="100000">
+              <a:schemeClr val="phClr">
+                <a:shade val="63000"/>
+                <a:satMod val="120000"/>
+              </a:schemeClr>
+            </a:gs>
+          </a:gsLst>
+          <a:lin ang="5400000" scaled="0"/>
+        </a:gradFill>
+      </a:bgFillStyleLst>
+    </a:fmtScheme>
+  </a:themeElements>
+  <a:objectDefaults/>
+  <a:extraClrSchemeLst/>
+  <a:extLst>
+    <a:ext uri="{05A4C25C-085E-4340-85A3-A5531E510DB2}">
+      <thm15:themeFamily xmlns:thm15="http://schemas.microsoft.com/office/thememl/2012/main" name="Office Theme" id="{62F939B6-93AF-4DB8-9C6B-D6C7DFDC589F}" vid="{4A3C46E8-61CC-4603-A589-7422A47A8E4A}"/>
+    </a:ext>
+  </a:extLst>
+</a:theme>
 </file>